--- a/presentation/Bussito_Salerno.pptx
+++ b/presentation/Bussito_Salerno.pptx
@@ -4,6 +4,9 @@
   <p:sldMasterIdLst>
     <p:sldMasterId id="2147483648" r:id="rId1"/>
   </p:sldMasterIdLst>
+  <p:notesMasterIdLst>
+    <p:notesMasterId r:id="rId17"/>
+  </p:notesMasterIdLst>
   <p:sldIdLst>
     <p:sldId id="256" r:id="rId2"/>
     <p:sldId id="257" r:id="rId3"/>
@@ -14,14 +17,13 @@
     <p:sldId id="262" r:id="rId8"/>
     <p:sldId id="263" r:id="rId9"/>
     <p:sldId id="264" r:id="rId10"/>
-    <p:sldId id="265" r:id="rId11"/>
-    <p:sldId id="266" r:id="rId12"/>
-    <p:sldId id="267" r:id="rId13"/>
-    <p:sldId id="268" r:id="rId14"/>
+    <p:sldId id="271" r:id="rId11"/>
+    <p:sldId id="270" r:id="rId12"/>
+    <p:sldId id="265" r:id="rId13"/>
+    <p:sldId id="266" r:id="rId14"/>
+    <p:sldId id="267" r:id="rId15"/>
+    <p:sldId id="268" r:id="rId16"/>
   </p:sldIdLst>
-  <p:notesMasterIdLst>
-    <p:notesMasterId r:id="rId15"/>
-  </p:notesMasterIdLst>
   <p:sldSz cx="12192000" cy="6858000"/>
   <p:notesSz cx="6858000" cy="12192000"/>
   <p:defaultTextStyle>
@@ -119,6 +121,17 @@
 </p:presentation>
 </file>
 
+<file path=ppt/revisionInfo.xml><?xml version="1.0" encoding="utf-8"?>
+<p1510:revInfo xmlns:a="http://schemas.openxmlformats.org/drawingml/2006/main" xmlns:r="http://schemas.openxmlformats.org/officeDocument/2006/relationships" xmlns:p1510="http://schemas.microsoft.com/office/powerpoint/2015/10/main">
+  <p1510:revLst>
+    <p1510:client id="{158D54F4-619E-F1E0-AC39-28CD6F5FA18C}" v="91" dt="2026-10-29T14:33:04.463"/>
+    <p1510:client id="{20801215-A7BC-0EC2-9ECB-65092E145061}" v="14" dt="2026-10-29T14:20:21.928"/>
+    <p1510:client id="{A12D6940-0DDB-C4CE-C422-87E9954A59B7}" v="7" dt="2026-10-29T14:18:32.495"/>
+    <p1510:client id="{F1B4E35B-454D-4E2F-A9D7-889C136CB970}" v="156" dt="2026-10-29T14:02:26.524"/>
+  </p1510:revLst>
+</p1510:revInfo>
+</file>
+
 <file path=ppt/notesMasters/notesMaster1.xml><?xml version="1.0" encoding="utf-8"?>
 <p:notesMaster xmlns:a="http://schemas.openxmlformats.org/drawingml/2006/main" xmlns:r="http://schemas.openxmlformats.org/officeDocument/2006/relationships" xmlns:p="http://schemas.openxmlformats.org/presentationml/2006/main">
   <p:cSld>
@@ -154,7 +167,7 @@
         <p:spPr>
           <a:xfrm>
             <a:off x="0" y="0"/>
-            <a:ext cx="2971800" cy="458788"/>
+            <a:ext cx="2971800" cy="611188"/>
           </a:xfrm>
           <a:prstGeom prst="rect">
             <a:avLst/>
@@ -185,7 +198,7 @@
         <p:spPr>
           <a:xfrm>
             <a:off x="3884613" y="0"/>
-            <a:ext cx="2971800" cy="458788"/>
+            <a:ext cx="2971800" cy="611188"/>
           </a:xfrm>
           <a:prstGeom prst="rect">
             <a:avLst/>
@@ -199,9 +212,8 @@
             </a:lvl1pPr>
           </a:lstStyle>
           <a:p>
-            <a:fld id="{5282F153-3F37-0F45-9E97-73ACFA13230C}" type="datetimeFigureOut">
-              <a:rPr lang="en-US"/>
-              <a:t>7/23/19</a:t>
+            <a:fld id="{435D9EF5-58FB-43F9-909E-9B311E67AC21}" type="datetimeFigureOut">
+              <a:t>10/29/2026</a:t>
             </a:fld>
             <a:endParaRPr lang="en-US"/>
           </a:p>
@@ -219,8 +231,8 @@
         </p:nvSpPr>
         <p:spPr>
           <a:xfrm>
-            <a:off x="685800" y="1143000"/>
-            <a:ext cx="5486400" cy="3086100"/>
+            <a:off x="-228600" y="1524000"/>
+            <a:ext cx="7315200" cy="4114800"/>
           </a:xfrm>
           <a:prstGeom prst="rect">
             <a:avLst/>
@@ -252,8 +264,8 @@
         </p:nvSpPr>
         <p:spPr>
           <a:xfrm>
-            <a:off x="685800" y="4400550"/>
-            <a:ext cx="5486400" cy="3600450"/>
+            <a:off x="685800" y="5867400"/>
+            <a:ext cx="5486400" cy="4800600"/>
           </a:xfrm>
           <a:prstGeom prst="rect">
             <a:avLst/>
@@ -311,8 +323,8 @@
         </p:nvSpPr>
         <p:spPr>
           <a:xfrm>
-            <a:off x="0" y="8685213"/>
-            <a:ext cx="2971800" cy="458787"/>
+            <a:off x="0" y="11580813"/>
+            <a:ext cx="2971800" cy="611187"/>
           </a:xfrm>
           <a:prstGeom prst="rect">
             <a:avLst/>
@@ -342,8 +354,8 @@
         </p:nvSpPr>
         <p:spPr>
           <a:xfrm>
-            <a:off x="3884613" y="8685213"/>
-            <a:ext cx="2971800" cy="458787"/>
+            <a:off x="3884613" y="11580813"/>
+            <a:ext cx="2971800" cy="611187"/>
           </a:xfrm>
           <a:prstGeom prst="rect">
             <a:avLst/>
@@ -357,8 +369,7 @@
             </a:lvl1pPr>
           </a:lstStyle>
           <a:p>
-            <a:fld id="{CE5E9CC1-C706-0F49-92D6-E571CC5EEA8F}" type="slidenum">
-              <a:rPr lang="en-US"/>
+            <a:fld id="{915D8E43-2388-43E6-A786-12D2798818D1}" type="slidenum">
               <a:t>‹#›</a:t>
             </a:fld>
             <a:endParaRPr lang="en-US"/>
@@ -368,7 +379,7 @@
     </p:spTree>
     <p:extLst>
       <p:ext uri="{BB962C8B-B14F-4D97-AF65-F5344CB8AC3E}">
-        <p14:creationId xmlns:p14="http://schemas.microsoft.com/office/powerpoint/2010/main" val="1024086991"/>
+        <p14:creationId xmlns:p14="http://schemas.microsoft.com/office/powerpoint/2010/main" val="787458390"/>
       </p:ext>
     </p:extLst>
   </p:cSld>
@@ -513,10 +524,9 @@
           <a:lstStyle/>
           <a:p>
             <a:r>
-              <a:rPr lang="en-US" dirty="0"/>
+              <a:rPr lang="en-US"/>
               <a:t>Introduce the project: Bussito Salerno is a university project exploring smart contracts. The idea is to move bus ticket issuing and validation onto a shared blockchain ledger. The ticket on the right is what a ticket looks like in our system: an NFT that costs 1.30 euro in stablecoin and is valid for 90 minutes after validation.</a:t>
             </a:r>
-            <a:endParaRPr lang="en-US" dirty="0"/>
           </a:p>
         </p:txBody>
       </p:sp>
@@ -561,7 +571,13 @@
   <p:cSld>
     <p:spTree>
       <p:nvGrpSpPr>
-        <p:cNvPr id="1" name=""/>
+        <p:cNvPr id="1" name="">
+          <a:extLst>
+            <a:ext uri="{FF2B5EF4-FFF2-40B4-BE49-F238E27FC236}">
+              <a16:creationId xmlns:a16="http://schemas.microsoft.com/office/drawing/2014/main" id="{DA12558F-9064-48DA-EF78-E0C5CB82AAB5}"/>
+            </a:ext>
+          </a:extLst>
+        </p:cNvPr>
         <p:cNvGrpSpPr/>
         <p:nvPr/>
       </p:nvGrpSpPr>
@@ -575,7 +591,13 @@
       </p:grpSpPr>
       <p:sp>
         <p:nvSpPr>
-          <p:cNvPr id="2" name="Slide Image Placeholder 1"/>
+          <p:cNvPr id="2" name="Slide Image Placeholder 1">
+            <a:extLst>
+              <a:ext uri="{FF2B5EF4-FFF2-40B4-BE49-F238E27FC236}">
+                <a16:creationId xmlns:a16="http://schemas.microsoft.com/office/drawing/2014/main" id="{06AC4B5B-5357-F593-7090-7680DB290E10}"/>
+              </a:ext>
+            </a:extLst>
+          </p:cNvPr>
           <p:cNvSpPr>
             <a:spLocks noGrp="1" noRot="1" noChangeAspect="1"/>
           </p:cNvSpPr>
@@ -587,7 +609,13 @@
       </p:sp>
       <p:sp>
         <p:nvSpPr>
-          <p:cNvPr id="3" name="Notes Placeholder 2"/>
+          <p:cNvPr id="3" name="Notes Placeholder 2">
+            <a:extLst>
+              <a:ext uri="{FF2B5EF4-FFF2-40B4-BE49-F238E27FC236}">
+                <a16:creationId xmlns:a16="http://schemas.microsoft.com/office/drawing/2014/main" id="{A8A24399-9BF7-B726-928D-AD0FFA259178}"/>
+              </a:ext>
+            </a:extLst>
+          </p:cNvPr>
           <p:cNvSpPr>
             <a:spLocks noGrp="1"/>
           </p:cNvSpPr>
@@ -601,16 +629,21 @@
           <a:lstStyle/>
           <a:p>
             <a:r>
-              <a:rPr lang="en-US" dirty="0"/>
-              <a:t>We want to be honest about the limits. Addresses are pseudonymous, so linking a wallet to a person exposes their travel history. Riders need a wallet and stablecoin, which is a real usability barrier. Every buy and validate costs gas and takes time, so a production version would need a cheap, fast chain such as a layer 2. Validators and conductors must be online. Revenue is controlled by a single owner key. And the prototype covers only one operator and one ticket type, on a local chain with a mock token.</a:t>
-            </a:r>
-            <a:endParaRPr lang="en-US" dirty="0"/>
-          </a:p>
-        </p:txBody>
-      </p:sp>
-      <p:sp>
-        <p:nvSpPr>
-          <p:cNvPr id="4" name="Slide Number Placeholder 3"/>
+              <a:rPr lang="en-US"/>
+              <a:t>We deliberately store as little as possible. Per ticket the contract keeps only the validation timestamp, and our own events contain only ticket IDs. But some things are public by the nature of the standards: who owns a ticket, the stablecoin payments, and the sender of every transaction. So addresses are pseudonymous, not anonymous. No names or personal details are ever written on chain; for now, a fresh address per ticket limits how much trips can be linked.</a:t>
+            </a:r>
+          </a:p>
+        </p:txBody>
+      </p:sp>
+      <p:sp>
+        <p:nvSpPr>
+          <p:cNvPr id="4" name="Slide Number Placeholder 3">
+            <a:extLst>
+              <a:ext uri="{FF2B5EF4-FFF2-40B4-BE49-F238E27FC236}">
+                <a16:creationId xmlns:a16="http://schemas.microsoft.com/office/drawing/2014/main" id="{A5FEB3CD-1BDC-EC60-639A-5068CF3B7717}"/>
+              </a:ext>
+            </a:extLst>
+          </p:cNvPr>
           <p:cNvSpPr>
             <a:spLocks noGrp="1"/>
           </p:cNvSpPr>
@@ -625,7 +658,7 @@
           <a:p>
             <a:fld id="{F7021451-1387-4CA6-816F-3879F97B5CBC}" type="slidenum">
               <a:rPr lang="en-US"/>
-              <a:t>10</a:t>
+              <a:t>11</a:t>
             </a:fld>
             <a:endParaRPr lang="en-US"/>
           </a:p>
@@ -634,7 +667,7 @@
     </p:spTree>
     <p:extLst>
       <p:ext uri="{BB962C8B-B14F-4D97-AF65-F5344CB8AC3E}">
-        <p14:creationId xmlns:p14="http://schemas.microsoft.com/office/powerpoint/2010/main" val="1024086991"/>
+        <p14:creationId xmlns:p14="http://schemas.microsoft.com/office/powerpoint/2010/main" val="1844737927"/>
       </p:ext>
     </p:extLst>
   </p:cSld>
@@ -649,7 +682,13 @@
   <p:cSld>
     <p:spTree>
       <p:nvGrpSpPr>
-        <p:cNvPr id="1" name=""/>
+        <p:cNvPr id="1" name="">
+          <a:extLst>
+            <a:ext uri="{FF2B5EF4-FFF2-40B4-BE49-F238E27FC236}">
+              <a16:creationId xmlns:a16="http://schemas.microsoft.com/office/drawing/2014/main" id="{F72A8FFD-42FE-985F-4E8E-2AD427B4DBE1}"/>
+            </a:ext>
+          </a:extLst>
+        </p:cNvPr>
         <p:cNvGrpSpPr/>
         <p:nvPr/>
       </p:nvGrpSpPr>
@@ -663,7 +702,13 @@
       </p:grpSpPr>
       <p:sp>
         <p:nvSpPr>
-          <p:cNvPr id="2" name="Slide Image Placeholder 1"/>
+          <p:cNvPr id="2" name="Slide Image Placeholder 1">
+            <a:extLst>
+              <a:ext uri="{FF2B5EF4-FFF2-40B4-BE49-F238E27FC236}">
+                <a16:creationId xmlns:a16="http://schemas.microsoft.com/office/drawing/2014/main" id="{7DA7D1B6-DE0B-D9DA-2888-E41FF017F599}"/>
+              </a:ext>
+            </a:extLst>
+          </p:cNvPr>
           <p:cNvSpPr>
             <a:spLocks noGrp="1" noRot="1" noChangeAspect="1"/>
           </p:cNvSpPr>
@@ -675,7 +720,13 @@
       </p:sp>
       <p:sp>
         <p:nvSpPr>
-          <p:cNvPr id="3" name="Notes Placeholder 2"/>
+          <p:cNvPr id="3" name="Notes Placeholder 2">
+            <a:extLst>
+              <a:ext uri="{FF2B5EF4-FFF2-40B4-BE49-F238E27FC236}">
+                <a16:creationId xmlns:a16="http://schemas.microsoft.com/office/drawing/2014/main" id="{0F202870-69C8-53B1-55D0-D3460C3CA7F1}"/>
+              </a:ext>
+            </a:extLst>
+          </p:cNvPr>
           <p:cNvSpPr>
             <a:spLocks noGrp="1"/>
           </p:cNvSpPr>
@@ -689,16 +740,21 @@
           <a:lstStyle/>
           <a:p>
             <a:r>
-              <a:rPr lang="en-US" dirty="0"/>
-              <a:t>Looking ahead, the prototype can grow into the common platform from our goal. First, the application can keep personal data about the user off chain: name, discounts such as student or senior fares, and subscriptions, stored in a protected database. On chain we would keep only a hash or a verifiable credential, so the data stays private and can be erased. Second, a registry lets many operators plug in their own ticket contracts, so one rider account accumulates all kinds of tickets. Third, one common interface to issue, validate and check tickets, used by every operator and every validator app.</a:t>
-            </a:r>
-            <a:endParaRPr lang="en-US" dirty="0"/>
-          </a:p>
-        </p:txBody>
-      </p:sp>
-      <p:sp>
-        <p:nvSpPr>
-          <p:cNvPr id="4" name="Slide Number Placeholder 3"/>
+              <a:rPr lang="en-US"/>
+              <a:t>We deliberately store as little as possible. Per ticket the contract keeps only the validation timestamp, and our own events contain only ticket IDs. But some things are public by the nature of the standards: who owns a ticket, the stablecoin payments, and the sender of every transaction. So addresses are pseudonymous, not anonymous. No names or personal details are ever written on chain; for now, a fresh address per ticket limits how much trips can be linked.</a:t>
+            </a:r>
+          </a:p>
+        </p:txBody>
+      </p:sp>
+      <p:sp>
+        <p:nvSpPr>
+          <p:cNvPr id="4" name="Slide Number Placeholder 3">
+            <a:extLst>
+              <a:ext uri="{FF2B5EF4-FFF2-40B4-BE49-F238E27FC236}">
+                <a16:creationId xmlns:a16="http://schemas.microsoft.com/office/drawing/2014/main" id="{EB9C58A7-A3A7-C7B8-E10D-5419F2049780}"/>
+              </a:ext>
+            </a:extLst>
+          </p:cNvPr>
           <p:cNvSpPr>
             <a:spLocks noGrp="1"/>
           </p:cNvSpPr>
@@ -713,7 +769,7 @@
           <a:p>
             <a:fld id="{F7021451-1387-4CA6-816F-3879F97B5CBC}" type="slidenum">
               <a:rPr lang="en-US"/>
-              <a:t>11</a:t>
+              <a:t>10</a:t>
             </a:fld>
             <a:endParaRPr lang="en-US"/>
           </a:p>
@@ -722,7 +778,7 @@
     </p:spTree>
     <p:extLst>
       <p:ext uri="{BB962C8B-B14F-4D97-AF65-F5344CB8AC3E}">
-        <p14:creationId xmlns:p14="http://schemas.microsoft.com/office/powerpoint/2010/main" val="1024086991"/>
+        <p14:creationId xmlns:p14="http://schemas.microsoft.com/office/powerpoint/2010/main" val="3984071253"/>
       </p:ext>
     </p:extLst>
   </p:cSld>
@@ -777,10 +833,9 @@
           <a:lstStyle/>
           <a:p>
             <a:r>
-              <a:rPr lang="en-US" dirty="0"/>
-              <a:t>This is the target architecture. Rider apps, bus validators and conductor apps all talk to one common interface with three calls: issue, validate and check. Behind it, an on-chain registry lists operators and ticket types, each operator has its own ticket contracts, and a euro stablecoin settles payments. Personal data sits in a separate off-chain store; only a hash links it to the chain, so it can be updated or deleted without touching the ledger.</a:t>
-            </a:r>
-            <a:endParaRPr lang="en-US" dirty="0"/>
+              <a:rPr lang="en-US"/>
+              <a:t>We want to be honest about the limits. Addresses are pseudonymous, so linking a wallet to a person exposes their travel history. Riders need a wallet and stablecoin, which is a real usability barrier. Every buy and validate costs gas and takes time, so a production version would need a cheap, fast chain such as a layer 2. Validators and conductors must be online. Revenue is controlled by a single owner key. And the prototype covers only one operator and one ticket type, on a local chain with a mock token.</a:t>
+            </a:r>
           </a:p>
         </p:txBody>
       </p:sp>
@@ -801,7 +856,7 @@
           <a:p>
             <a:fld id="{F7021451-1387-4CA6-816F-3879F97B5CBC}" type="slidenum">
               <a:rPr lang="en-US"/>
-              <a:t>12</a:t>
+              <a:t>11</a:t>
             </a:fld>
             <a:endParaRPr lang="en-US"/>
           </a:p>
@@ -865,10 +920,9 @@
           <a:lstStyle/>
           <a:p>
             <a:r>
-              <a:rPr lang="en-US" dirty="0"/>
-              <a:t>To sum up: a shared ledger that no single operator owns, ticket rules enforced by the smart contract, and free verification for any conductor. Thank you, we are happy to take questions, and we can show the live demo.</a:t>
-            </a:r>
-            <a:endParaRPr lang="en-US" dirty="0"/>
+              <a:rPr lang="en-US"/>
+              <a:t>Looking ahead, the prototype can grow into the common platform from our goal. First, the application can keep personal data about the user off chain: name, discounts such as student or senior fares, and subscriptions, stored in a protected database. On chain we would keep only a hash or a verifiable credential, so the data stays private and can be erased. Second, a registry lets many operators plug in their own ticket contracts, so one rider account accumulates all kinds of tickets. Third, one common interface to issue, validate and check tickets, used by every operator and every validator app.</a:t>
+            </a:r>
           </a:p>
         </p:txBody>
       </p:sp>
@@ -889,7 +943,181 @@
           <a:p>
             <a:fld id="{F7021451-1387-4CA6-816F-3879F97B5CBC}" type="slidenum">
               <a:rPr lang="en-US"/>
+              <a:t>12</a:t>
+            </a:fld>
+            <a:endParaRPr lang="en-US"/>
+          </a:p>
+        </p:txBody>
+      </p:sp>
+    </p:spTree>
+    <p:extLst>
+      <p:ext uri="{BB962C8B-B14F-4D97-AF65-F5344CB8AC3E}">
+        <p14:creationId xmlns:p14="http://schemas.microsoft.com/office/powerpoint/2010/main" val="1024086991"/>
+      </p:ext>
+    </p:extLst>
+  </p:cSld>
+  <p:clrMapOvr>
+    <a:masterClrMapping/>
+  </p:clrMapOvr>
+</p:notes>
+</file>
+
+<file path=ppt/notesSlides/notesSlide14.xml><?xml version="1.0" encoding="utf-8"?>
+<p:notes xmlns:a="http://schemas.openxmlformats.org/drawingml/2006/main" xmlns:r="http://schemas.openxmlformats.org/officeDocument/2006/relationships" xmlns:p="http://schemas.openxmlformats.org/presentationml/2006/main">
+  <p:cSld>
+    <p:spTree>
+      <p:nvGrpSpPr>
+        <p:cNvPr id="1" name=""/>
+        <p:cNvGrpSpPr/>
+        <p:nvPr/>
+      </p:nvGrpSpPr>
+      <p:grpSpPr>
+        <a:xfrm>
+          <a:off x="0" y="0"/>
+          <a:ext cx="0" cy="0"/>
+          <a:chOff x="0" y="0"/>
+          <a:chExt cx="0" cy="0"/>
+        </a:xfrm>
+      </p:grpSpPr>
+      <p:sp>
+        <p:nvSpPr>
+          <p:cNvPr id="2" name="Slide Image Placeholder 1"/>
+          <p:cNvSpPr>
+            <a:spLocks noGrp="1" noRot="1" noChangeAspect="1"/>
+          </p:cNvSpPr>
+          <p:nvPr>
+            <p:ph type="sldImg"/>
+          </p:nvPr>
+        </p:nvSpPr>
+        <p:spPr/>
+      </p:sp>
+      <p:sp>
+        <p:nvSpPr>
+          <p:cNvPr id="3" name="Notes Placeholder 2"/>
+          <p:cNvSpPr>
+            <a:spLocks noGrp="1"/>
+          </p:cNvSpPr>
+          <p:nvPr>
+            <p:ph type="body" idx="1"/>
+          </p:nvPr>
+        </p:nvSpPr>
+        <p:spPr/>
+        <p:txBody>
+          <a:bodyPr/>
+          <a:lstStyle/>
+          <a:p>
+            <a:r>
+              <a:rPr lang="en-US"/>
+              <a:t>This is the target architecture. Rider apps, bus validators and conductor apps all talk to one common interface with three calls: issue, validate and check. Behind it, an on-chain registry lists operators and ticket types, each operator has its own ticket contracts, and a euro stablecoin settles payments. Personal data sits in a separate off-chain store; only a hash links it to the chain, so it can be updated or deleted without touching the ledger.</a:t>
+            </a:r>
+          </a:p>
+        </p:txBody>
+      </p:sp>
+      <p:sp>
+        <p:nvSpPr>
+          <p:cNvPr id="4" name="Slide Number Placeholder 3"/>
+          <p:cNvSpPr>
+            <a:spLocks noGrp="1"/>
+          </p:cNvSpPr>
+          <p:nvPr>
+            <p:ph type="sldNum" sz="quarter" idx="10"/>
+          </p:nvPr>
+        </p:nvSpPr>
+        <p:spPr/>
+        <p:txBody>
+          <a:bodyPr/>
+          <a:lstStyle/>
+          <a:p>
+            <a:fld id="{F7021451-1387-4CA6-816F-3879F97B5CBC}" type="slidenum">
+              <a:rPr lang="en-US"/>
               <a:t>13</a:t>
+            </a:fld>
+            <a:endParaRPr lang="en-US"/>
+          </a:p>
+        </p:txBody>
+      </p:sp>
+    </p:spTree>
+    <p:extLst>
+      <p:ext uri="{BB962C8B-B14F-4D97-AF65-F5344CB8AC3E}">
+        <p14:creationId xmlns:p14="http://schemas.microsoft.com/office/powerpoint/2010/main" val="1024086991"/>
+      </p:ext>
+    </p:extLst>
+  </p:cSld>
+  <p:clrMapOvr>
+    <a:masterClrMapping/>
+  </p:clrMapOvr>
+</p:notes>
+</file>
+
+<file path=ppt/notesSlides/notesSlide15.xml><?xml version="1.0" encoding="utf-8"?>
+<p:notes xmlns:a="http://schemas.openxmlformats.org/drawingml/2006/main" xmlns:r="http://schemas.openxmlformats.org/officeDocument/2006/relationships" xmlns:p="http://schemas.openxmlformats.org/presentationml/2006/main">
+  <p:cSld>
+    <p:spTree>
+      <p:nvGrpSpPr>
+        <p:cNvPr id="1" name=""/>
+        <p:cNvGrpSpPr/>
+        <p:nvPr/>
+      </p:nvGrpSpPr>
+      <p:grpSpPr>
+        <a:xfrm>
+          <a:off x="0" y="0"/>
+          <a:ext cx="0" cy="0"/>
+          <a:chOff x="0" y="0"/>
+          <a:chExt cx="0" cy="0"/>
+        </a:xfrm>
+      </p:grpSpPr>
+      <p:sp>
+        <p:nvSpPr>
+          <p:cNvPr id="2" name="Slide Image Placeholder 1"/>
+          <p:cNvSpPr>
+            <a:spLocks noGrp="1" noRot="1" noChangeAspect="1"/>
+          </p:cNvSpPr>
+          <p:nvPr>
+            <p:ph type="sldImg"/>
+          </p:nvPr>
+        </p:nvSpPr>
+        <p:spPr/>
+      </p:sp>
+      <p:sp>
+        <p:nvSpPr>
+          <p:cNvPr id="3" name="Notes Placeholder 2"/>
+          <p:cNvSpPr>
+            <a:spLocks noGrp="1"/>
+          </p:cNvSpPr>
+          <p:nvPr>
+            <p:ph type="body" idx="1"/>
+          </p:nvPr>
+        </p:nvSpPr>
+        <p:spPr/>
+        <p:txBody>
+          <a:bodyPr/>
+          <a:lstStyle/>
+          <a:p>
+            <a:r>
+              <a:rPr lang="en-US"/>
+              <a:t>To sum up: a shared ledger that no single operator owns, ticket rules enforced by the smart contract, and free verification for any conductor. Thank you, we are happy to take questions, and we can show the live demo.</a:t>
+            </a:r>
+          </a:p>
+        </p:txBody>
+      </p:sp>
+      <p:sp>
+        <p:nvSpPr>
+          <p:cNvPr id="4" name="Slide Number Placeholder 3"/>
+          <p:cNvSpPr>
+            <a:spLocks noGrp="1"/>
+          </p:cNvSpPr>
+          <p:nvPr>
+            <p:ph type="sldNum" sz="quarter" idx="10"/>
+          </p:nvPr>
+        </p:nvSpPr>
+        <p:spPr/>
+        <p:txBody>
+          <a:bodyPr/>
+          <a:lstStyle/>
+          <a:p>
+            <a:fld id="{F7021451-1387-4CA6-816F-3879F97B5CBC}" type="slidenum">
+              <a:rPr lang="en-US"/>
+              <a:t>14</a:t>
             </a:fld>
             <a:endParaRPr lang="en-US"/>
           </a:p>
@@ -953,10 +1181,9 @@
           <a:lstStyle/>
           <a:p>
             <a:r>
-              <a:rPr lang="en-US" dirty="0"/>
+              <a:rPr lang="en-US"/>
               <a:t>Today each bus operator runs its own ticketing: paper tickets, its own app, its own validators. A conductor can only check the tickets of their own company, and paper tickets can be photocopied or reused. All the data sits in private databases, so there is no common record that every party trusts. For the rider this means juggling several tickets and apps.</a:t>
             </a:r>
-            <a:endParaRPr lang="en-US" dirty="0"/>
           </a:p>
         </p:txBody>
       </p:sp>
@@ -1041,10 +1268,9 @@
           <a:lstStyle/>
           <a:p>
             <a:r>
-              <a:rPr lang="en-US" dirty="0"/>
+              <a:rPr lang="en-US"/>
               <a:t>Our goal is a single shared platform for bus tickets. Operators issue tickets on it, riders hold all their tickets in one place, and any conductor can verify any ticket using the same public record.</a:t>
             </a:r>
-            <a:endParaRPr lang="en-US" dirty="0"/>
           </a:p>
         </p:txBody>
       </p:sp>
@@ -1129,10 +1355,9 @@
           <a:lstStyle/>
           <a:p>
             <a:r>
-              <a:rPr lang="en-US" dirty="0"/>
+              <a:rPr lang="en-US"/>
               <a:t>Why blockchain rather than one central database? Because a common platform needs a record that no single operator controls. Every party reads the same state, records can’t be quietly changed, the rules are enforced by code instead of by trust, and verifying a ticket is a free read-only call. Concretely, each ticket is an ERC-721 NFT, payment is in an ERC-20 euro stablecoin, and the logic is a Solidity smart contract.</a:t>
             </a:r>
-            <a:endParaRPr lang="en-US" dirty="0"/>
           </a:p>
         </p:txBody>
       </p:sp>
@@ -1217,10 +1442,9 @@
           <a:lstStyle/>
           <a:p>
             <a:r>
-              <a:rPr lang="en-US" dirty="0"/>
+              <a:rPr lang="en-US"/>
               <a:t>Each ticket goes through four steps. The rider calls buy, which takes 1.30 EURC and mints an NFT ticket in the Unused state. On boarding the rider calls validate, which stores the block timestamp; a second call reverts. For 90 minutes the ticket is Active and isValid returns true; it also becomes non-transferable. After 90 minutes it is Expired forever. A conductor only needs two read-only calls: is the ticket active, and does it belong to the person showing it.</a:t>
             </a:r>
-            <a:endParaRPr lang="en-US" dirty="0"/>
           </a:p>
         </p:txBody>
       </p:sp>
@@ -1305,10 +1529,9 @@
           <a:lstStyle/>
           <a:p>
             <a:r>
-              <a:rPr lang="en-US" dirty="0"/>
+              <a:rPr lang="en-US"/>
               <a:t>The rider uses a web app with MetaMask to send transactions: buy and validate. The conductor view needs no wallet at all; it only makes free view calls. The BusTicket contract holds the price, the 90 minute duration and one timestamp per ticket. Payments go through an ERC-20 euro stablecoin; in our prototype a MockEURC token with 6 decimals stands in for Circle’s EURC. The operator, as contract owner, collects the revenue with withdraw.</a:t>
             </a:r>
-            <a:endParaRPr lang="en-US" dirty="0"/>
           </a:p>
         </p:txBody>
       </p:sp>
@@ -1393,10 +1616,9 @@
           <a:lstStyle/>
           <a:p>
             <a:r>
-              <a:rPr lang="en-US" dirty="0"/>
+              <a:rPr lang="en-US"/>
               <a:t>Integrity comes from the contract rules, not from trusting an operator. A ticket can be validated once only. Only its owner can validate it. Once validated it cannot be transferred, which stops one active ticket being passed around. Tickets can’t be forged because the truth is the on-chain state, not a picture of a ticket. Payment is taken before the ticket is minted, using SafeERC20 and the checks-effects-interactions pattern, and only the owner can withdraw revenue. All of these are tested.</a:t>
             </a:r>
-            <a:endParaRPr lang="en-US" dirty="0"/>
           </a:p>
         </p:txBody>
       </p:sp>
@@ -1481,10 +1703,9 @@
           <a:lstStyle/>
           <a:p>
             <a:r>
-              <a:rPr lang="en-US" dirty="0"/>
+              <a:rPr lang="en-US"/>
               <a:t>We deliberately store as little as possible. Per ticket the contract keeps only the validation timestamp, and our own events contain only ticket IDs. But some things are public by the nature of the standards: who owns a ticket, the stablecoin payments, and the sender of every transaction. So addresses are pseudonymous, not anonymous. No names or personal details are ever written on chain; for now, a fresh address per ticket limits how much trips can be linked.</a:t>
             </a:r>
-            <a:endParaRPr lang="en-US" dirty="0"/>
           </a:p>
         </p:txBody>
       </p:sp>
@@ -1569,10 +1790,9 @@
           <a:lstStyle/>
           <a:p>
             <a:r>
-              <a:rPr lang="en-US" dirty="0"/>
+              <a:rPr lang="en-US"/>
               <a:t>The prototype runs on a local Hardhat chain. It has two contracts, an Ignition deployment module, a demo script that runs the whole ticket lifecycle in the terminal, and a web front end with a rider view using MetaMask and a conductor view without a wallet. A Skip 91 minutes button moves the local chain clock forward so we can show a ticket expiring live. Fourteen Solidity unit tests cover the contract’s behaviour.</a:t>
             </a:r>
-            <a:endParaRPr lang="en-US" dirty="0"/>
           </a:p>
         </p:txBody>
       </p:sp>
@@ -1645,6 +1865,11 @@
 <file path=ppt/slideMasters/slideMaster1.xml><?xml version="1.0" encoding="utf-8"?>
 <p:sldMaster xmlns:a="http://schemas.openxmlformats.org/drawingml/2006/main" xmlns:r="http://schemas.openxmlformats.org/officeDocument/2006/relationships" xmlns:p="http://schemas.openxmlformats.org/presentationml/2006/main">
   <p:cSld>
+    <p:bg>
+      <p:bgRef idx="1001">
+        <a:schemeClr val="bg1"/>
+      </p:bgRef>
+    </p:bg>
     <p:spTree>
       <p:nvGrpSpPr>
         <p:cNvPr id="1" name=""/>
@@ -1927,6 +2152,7 @@
         <a:solidFill>
           <a:srgbClr val="14213D"/>
         </a:solidFill>
+        <a:effectLst/>
       </p:bgPr>
     </p:bg>
     <p:spTree>
@@ -1945,13 +2171,57 @@
       </p:grpSpPr>
       <p:sp>
         <p:nvSpPr>
+          <p:cNvPr id="27" name="Rectangle: Rounded Corners 26">
+            <a:extLst>
+              <a:ext uri="{FF2B5EF4-FFF2-40B4-BE49-F238E27FC236}">
+                <a16:creationId xmlns:a16="http://schemas.microsoft.com/office/drawing/2014/main" id="{79DB2D05-3F37-B43A-3793-51660C46E027}"/>
+              </a:ext>
+            </a:extLst>
+          </p:cNvPr>
+          <p:cNvSpPr/>
+          <p:nvPr/>
+        </p:nvSpPr>
+        <p:spPr>
+          <a:xfrm>
+            <a:off x="157655" y="105103"/>
+            <a:ext cx="6269920" cy="2220144"/>
+          </a:xfrm>
+          <a:prstGeom prst="roundRect">
+            <a:avLst/>
+          </a:prstGeom>
+        </p:spPr>
+        <p:style>
+          <a:lnRef idx="2">
+            <a:schemeClr val="accent1"/>
+          </a:lnRef>
+          <a:fillRef idx="1">
+            <a:schemeClr val="lt1"/>
+          </a:fillRef>
+          <a:effectRef idx="0">
+            <a:schemeClr val="accent1"/>
+          </a:effectRef>
+          <a:fontRef idx="minor">
+            <a:schemeClr val="dk1"/>
+          </a:fontRef>
+        </p:style>
+        <p:txBody>
+          <a:bodyPr rtlCol="0" anchor="ctr"/>
+          <a:lstStyle/>
+          <a:p>
+            <a:pPr algn="ctr"/>
+            <a:endParaRPr lang="en-US"/>
+          </a:p>
+        </p:txBody>
+      </p:sp>
+      <p:sp>
+        <p:nvSpPr>
           <p:cNvPr id="2" name="Text 0"/>
           <p:cNvSpPr/>
           <p:nvPr/>
         </p:nvSpPr>
         <p:spPr>
           <a:xfrm>
-            <a:off x="812800" y="1709420"/>
+            <a:off x="341086" y="2964906"/>
             <a:ext cx="6854444" cy="238760"/>
           </a:xfrm>
           <a:prstGeom prst="rect">
@@ -1966,14 +2236,14 @@
           </a:bodyPr>
           <a:lstStyle/>
           <a:p>
-            <a:pPr algn="l" indent="0" marL="0">
+            <a:pPr marL="0" indent="0" algn="l">
               <a:lnSpc>
                 <a:spcPts val="1680"/>
               </a:lnSpc>
               <a:buNone/>
             </a:pPr>
             <a:r>
-              <a:rPr lang="en-US" sz="1200" b="1" spc="150" kern="0" dirty="0">
+              <a:rPr lang="en-US" sz="1200" b="1" kern="0" spc="150">
                 <a:solidFill>
                   <a:srgbClr val="F2A541"/>
                 </a:solidFill>
@@ -1983,7 +2253,7 @@
               </a:rPr>
               <a:t>UNIVERSITY PROJECT · SMART CONTRACTS &amp; BLOCKCHAIN</a:t>
             </a:r>
-            <a:endParaRPr lang="en-US" sz="1200" dirty="0"/>
+            <a:endParaRPr lang="en-US" sz="1200"/>
           </a:p>
         </p:txBody>
       </p:sp>
@@ -1995,7 +2265,7 @@
         </p:nvSpPr>
         <p:spPr>
           <a:xfrm>
-            <a:off x="812800" y="2176780"/>
+            <a:off x="341086" y="3432266"/>
             <a:ext cx="6854444" cy="1549400"/>
           </a:xfrm>
           <a:prstGeom prst="rect">
@@ -2010,14 +2280,14 @@
           </a:bodyPr>
           <a:lstStyle/>
           <a:p>
-            <a:pPr algn="l" indent="0" marL="0">
+            <a:pPr marL="0" indent="0" algn="l">
               <a:lnSpc>
                 <a:spcPts val="6000"/>
               </a:lnSpc>
               <a:buNone/>
             </a:pPr>
             <a:r>
-              <a:rPr lang="en-US" sz="6000" b="1" dirty="0">
+              <a:rPr lang="en-US" sz="6000" b="1">
                 <a:solidFill>
                   <a:srgbClr val="F6F4EE"/>
                 </a:solidFill>
@@ -2027,17 +2297,17 @@
               </a:rPr>
               <a:t>Bussito</a:t>
             </a:r>
-            <a:endParaRPr lang="en-US" sz="6000" dirty="0"/>
-          </a:p>
-          <a:p>
-            <a:pPr algn="l" indent="0" marL="0">
+            <a:endParaRPr lang="en-US" sz="6000"/>
+          </a:p>
+          <a:p>
+            <a:pPr marL="0" indent="0" algn="l">
               <a:lnSpc>
                 <a:spcPts val="6000"/>
               </a:lnSpc>
               <a:buNone/>
             </a:pPr>
             <a:r>
-              <a:rPr lang="en-US" sz="6000" b="1" dirty="0">
+              <a:rPr lang="en-US" sz="6000" b="1">
                 <a:solidFill>
                   <a:srgbClr val="F6F4EE"/>
                 </a:solidFill>
@@ -2047,7 +2317,7 @@
               </a:rPr>
               <a:t>Salerno</a:t>
             </a:r>
-            <a:endParaRPr lang="en-US" sz="6000" dirty="0"/>
+            <a:endParaRPr lang="en-US" sz="6000"/>
           </a:p>
         </p:txBody>
       </p:sp>
@@ -2059,7 +2329,7 @@
         </p:nvSpPr>
         <p:spPr>
           <a:xfrm>
-            <a:off x="812800" y="3954780"/>
+            <a:off x="341086" y="5210266"/>
             <a:ext cx="6854444" cy="751840"/>
           </a:xfrm>
           <a:prstGeom prst="rect">
@@ -2074,14 +2344,14 @@
           </a:bodyPr>
           <a:lstStyle/>
           <a:p>
-            <a:pPr algn="l" indent="0" marL="0">
+            <a:pPr marL="0" indent="0" algn="l">
               <a:lnSpc>
                 <a:spcPts val="2860"/>
               </a:lnSpc>
               <a:buNone/>
             </a:pPr>
             <a:r>
-              <a:rPr lang="en-US" sz="2200" dirty="0">
+              <a:rPr lang="en-US" sz="2200">
                 <a:solidFill>
                   <a:srgbClr val="C9D3E3"/>
                 </a:solidFill>
@@ -2091,7 +2361,7 @@
               </a:rPr>
               <a:t>One shared ledger to issue and validate every bus ticket</a:t>
             </a:r>
-            <a:endParaRPr lang="en-US" sz="2200" dirty="0"/>
+            <a:endParaRPr lang="en-US" sz="2200"/>
           </a:p>
         </p:txBody>
       </p:sp>
@@ -2103,39 +2373,103 @@
         </p:nvSpPr>
         <p:spPr>
           <a:xfrm>
-            <a:off x="812800" y="4935220"/>
-            <a:ext cx="6854444" cy="238760"/>
-          </a:xfrm>
-          <a:prstGeom prst="rect">
-            <a:avLst/>
-          </a:prstGeom>
-          <a:noFill/>
-          <a:ln/>
-        </p:spPr>
-        <p:txBody>
-          <a:bodyPr wrap="square" lIns="0" tIns="0" rIns="0" bIns="0" rtlCol="0" anchor="t">
-            <a:normAutofit/>
-          </a:bodyPr>
-          <a:lstStyle/>
-          <a:p>
-            <a:pPr algn="l" indent="0" marL="0">
-              <a:lnSpc>
-                <a:spcPts val="1680"/>
-              </a:lnSpc>
-              <a:buNone/>
-            </a:pPr>
-            <a:r>
-              <a:rPr lang="en-US" sz="1200" dirty="0">
-                <a:solidFill>
-                  <a:srgbClr val="9AA8C0"/>
-                </a:solidFill>
-                <a:latin typeface="Arial" pitchFamily="34" charset="0"/>
-                <a:ea typeface="Arial" pitchFamily="34" charset="-122"/>
-                <a:cs typeface="Arial" pitchFamily="34" charset="-120"/>
-              </a:rPr>
-              <a:t>[Team names] · [Course] · [Date]</a:t>
-            </a:r>
-            <a:endParaRPr lang="en-US" sz="1200" dirty="0"/>
+            <a:off x="8169436" y="719163"/>
+            <a:ext cx="3545187" cy="1987879"/>
+          </a:xfrm>
+          <a:prstGeom prst="rect">
+            <a:avLst/>
+          </a:prstGeom>
+          <a:noFill/>
+          <a:ln/>
+        </p:spPr>
+        <p:txBody>
+          <a:bodyPr wrap="square" lIns="0" tIns="0" rIns="0" bIns="0" rtlCol="0" anchor="t">
+            <a:normAutofit/>
+          </a:bodyPr>
+          <a:lstStyle/>
+          <a:p>
+            <a:pPr algn="ctr"/>
+            <a:r>
+              <a:rPr lang="en-US" sz="3100">
+                <a:solidFill>
+                  <a:schemeClr val="bg1"/>
+                </a:solidFill>
+                <a:latin typeface="Arial"/>
+                <a:cs typeface="Arial"/>
+              </a:rPr>
+              <a:t>Leonardo Monaco </a:t>
+            </a:r>
+            <a:endParaRPr lang="en-US" sz="3100">
+              <a:solidFill>
+                <a:schemeClr val="bg1"/>
+              </a:solidFill>
+              <a:latin typeface="Arial"/>
+              <a:ea typeface="Calibri"/>
+              <a:cs typeface="Arial"/>
+            </a:endParaRPr>
+          </a:p>
+          <a:p>
+            <a:pPr algn="ctr"/>
+            <a:r>
+              <a:rPr lang="en-US" sz="3100">
+                <a:solidFill>
+                  <a:schemeClr val="bg1"/>
+                </a:solidFill>
+                <a:latin typeface="Arial"/>
+                <a:cs typeface="Arial"/>
+              </a:rPr>
+              <a:t>Ivan Sukhanov </a:t>
+            </a:r>
+            <a:endParaRPr lang="en-US" sz="3100">
+              <a:solidFill>
+                <a:schemeClr val="bg1"/>
+              </a:solidFill>
+              <a:latin typeface="Arial"/>
+              <a:ea typeface="Calibri"/>
+              <a:cs typeface="Arial"/>
+            </a:endParaRPr>
+          </a:p>
+          <a:p>
+            <a:pPr algn="ctr"/>
+            <a:r>
+              <a:rPr lang="en-US" sz="3100">
+                <a:solidFill>
+                  <a:schemeClr val="bg1"/>
+                </a:solidFill>
+                <a:latin typeface="Arial"/>
+                <a:cs typeface="Arial"/>
+              </a:rPr>
+              <a:t>Mojtaba Hosseini  </a:t>
+            </a:r>
+            <a:endParaRPr lang="en-US" sz="3100">
+              <a:solidFill>
+                <a:schemeClr val="bg1"/>
+              </a:solidFill>
+              <a:latin typeface="Arial"/>
+              <a:ea typeface="Calibri"/>
+              <a:cs typeface="Arial"/>
+            </a:endParaRPr>
+          </a:p>
+          <a:p>
+            <a:pPr algn="ctr"/>
+            <a:r>
+              <a:rPr lang="en-US" sz="3100">
+                <a:solidFill>
+                  <a:schemeClr val="bg1"/>
+                </a:solidFill>
+                <a:latin typeface="Arial"/>
+                <a:cs typeface="Arial"/>
+              </a:rPr>
+              <a:t>Bence Kanyok</a:t>
+            </a:r>
+            <a:endParaRPr lang="en-US" sz="3100">
+              <a:solidFill>
+                <a:schemeClr val="bg1"/>
+              </a:solidFill>
+              <a:latin typeface="Arial"/>
+              <a:ea typeface="Calibri"/>
+              <a:cs typeface="Arial"/>
+            </a:endParaRPr>
           </a:p>
         </p:txBody>
       </p:sp>
@@ -2147,7 +2481,7 @@
         </p:nvSpPr>
         <p:spPr>
           <a:xfrm>
-            <a:off x="8077200" y="1950720"/>
+            <a:off x="8251372" y="3293291"/>
             <a:ext cx="3302000" cy="2956560"/>
           </a:xfrm>
           <a:prstGeom prst="roundRect">
@@ -2160,7 +2494,7 @@
           </a:solidFill>
           <a:ln/>
           <a:effectLst>
-            <a:outerShdw sx="100000" sy="100000" kx="0" ky="0" algn="bl" rotWithShape="0" blurRad="406400" dist="152400" dir="5400000">
+            <a:outerShdw blurRad="406400" dist="152400" dir="5400000" algn="bl" rotWithShape="0">
               <a:srgbClr val="000000">
                 <a:alpha val="35000"/>
               </a:srgbClr>
@@ -2176,7 +2510,7 @@
         </p:nvSpPr>
         <p:spPr>
           <a:xfrm>
-            <a:off x="8382000" y="2255520"/>
+            <a:off x="8556172" y="3598091"/>
             <a:ext cx="2773172" cy="238760"/>
           </a:xfrm>
           <a:prstGeom prst="rect">
@@ -2191,14 +2525,14 @@
           </a:bodyPr>
           <a:lstStyle/>
           <a:p>
-            <a:pPr algn="l" indent="0" marL="0">
+            <a:pPr marL="0" indent="0" algn="l">
               <a:lnSpc>
                 <a:spcPts val="1680"/>
               </a:lnSpc>
               <a:buNone/>
             </a:pPr>
             <a:r>
-              <a:rPr lang="en-US" sz="1200" dirty="0">
+              <a:rPr lang="en-US" sz="1200">
                 <a:solidFill>
                   <a:srgbClr val="4A5568"/>
                 </a:solidFill>
@@ -2208,7 +2542,7 @@
               </a:rPr>
               <a:t>BUS · ERC-721</a:t>
             </a:r>
-            <a:endParaRPr lang="en-US" sz="1200" dirty="0"/>
+            <a:endParaRPr lang="en-US" sz="1200"/>
           </a:p>
         </p:txBody>
       </p:sp>
@@ -2220,7 +2554,7 @@
         </p:nvSpPr>
         <p:spPr>
           <a:xfrm>
-            <a:off x="8382000" y="2621280"/>
+            <a:off x="8556172" y="3963851"/>
             <a:ext cx="2773172" cy="482600"/>
           </a:xfrm>
           <a:prstGeom prst="rect">
@@ -2235,14 +2569,14 @@
           </a:bodyPr>
           <a:lstStyle/>
           <a:p>
-            <a:pPr algn="l" indent="0" marL="0">
+            <a:pPr marL="0" indent="0" algn="l">
               <a:lnSpc>
                 <a:spcPts val="3600"/>
               </a:lnSpc>
               <a:buNone/>
             </a:pPr>
             <a:r>
-              <a:rPr lang="en-US" sz="3600" b="1" dirty="0">
+              <a:rPr lang="en-US" sz="3600" b="1">
                 <a:solidFill>
                   <a:srgbClr val="14213D"/>
                 </a:solidFill>
@@ -2252,26 +2586,26 @@
               </a:rPr>
               <a:t>Ticket #42</a:t>
             </a:r>
-            <a:endParaRPr lang="en-US" sz="3600" dirty="0"/>
+            <a:endParaRPr lang="en-US" sz="3600"/>
           </a:p>
         </p:txBody>
       </p:sp>
       <p:pic>
         <p:nvPicPr>
-          <p:cNvPr id="9" name="Image 0" descr="line">    </p:cNvPr>
+          <p:cNvPr id="9" name="Image 0" descr="line"/>
           <p:cNvPicPr>
             <a:picLocks noChangeAspect="1"/>
           </p:cNvPicPr>
           <p:nvPr/>
         </p:nvPicPr>
         <p:blipFill>
-          <a:blip r:embed="rId1"/>
-          <a:srcRect l="-2083" r="-2083" t="0" b="0"/>
+          <a:blip r:embed="rId3"/>
+          <a:srcRect l="-2083" r="-2083"/>
           <a:stretch/>
         </p:blipFill>
         <p:spPr>
           <a:xfrm>
-            <a:off x="8382000" y="3230880"/>
+            <a:off x="8556172" y="4573451"/>
             <a:ext cx="2692400" cy="30480"/>
           </a:xfrm>
           <a:prstGeom prst="rect">
@@ -2287,7 +2621,7 @@
         </p:nvSpPr>
         <p:spPr>
           <a:xfrm>
-            <a:off x="8382000" y="3413760"/>
+            <a:off x="8556172" y="4756331"/>
             <a:ext cx="555593" cy="309880"/>
           </a:xfrm>
           <a:prstGeom prst="rect">
@@ -2302,14 +2636,14 @@
           </a:bodyPr>
           <a:lstStyle/>
           <a:p>
-            <a:pPr algn="l" indent="0" marL="0">
+            <a:pPr marL="0" indent="0" algn="l">
               <a:lnSpc>
                 <a:spcPts val="2240"/>
               </a:lnSpc>
               <a:buNone/>
             </a:pPr>
             <a:r>
-              <a:rPr lang="en-US" sz="1600" dirty="0">
+              <a:rPr lang="en-US" sz="1600">
                 <a:solidFill>
                   <a:srgbClr val="4A5568"/>
                 </a:solidFill>
@@ -2319,7 +2653,7 @@
               </a:rPr>
               <a:t>Price</a:t>
             </a:r>
-            <a:endParaRPr lang="en-US" sz="1600" dirty="0"/>
+            <a:endParaRPr lang="en-US" sz="1600"/>
           </a:p>
         </p:txBody>
       </p:sp>
@@ -2331,7 +2665,7 @@
         </p:nvSpPr>
         <p:spPr>
           <a:xfrm>
-            <a:off x="9757378" y="3413760"/>
+            <a:off x="9931550" y="4756331"/>
             <a:ext cx="1317022" cy="309880"/>
           </a:xfrm>
           <a:prstGeom prst="rect">
@@ -2346,14 +2680,14 @@
           </a:bodyPr>
           <a:lstStyle/>
           <a:p>
-            <a:pPr algn="r" indent="0" marL="0">
+            <a:pPr marL="0" indent="0" algn="r">
               <a:lnSpc>
                 <a:spcPts val="2240"/>
               </a:lnSpc>
               <a:buNone/>
             </a:pPr>
             <a:r>
-              <a:rPr lang="en-US" sz="1600" dirty="0">
+              <a:rPr lang="en-US" sz="1600">
                 <a:solidFill>
                   <a:srgbClr val="14213D"/>
                 </a:solidFill>
@@ -2363,7 +2697,7 @@
               </a:rPr>
               <a:t>1.30 EURC</a:t>
             </a:r>
-            <a:endParaRPr lang="en-US" sz="1600" dirty="0"/>
+            <a:endParaRPr lang="en-US" sz="1600"/>
           </a:p>
         </p:txBody>
       </p:sp>
@@ -2375,7 +2709,7 @@
         </p:nvSpPr>
         <p:spPr>
           <a:xfrm>
-            <a:off x="8382000" y="3850640"/>
+            <a:off x="8556172" y="5193211"/>
             <a:ext cx="876491" cy="309880"/>
           </a:xfrm>
           <a:prstGeom prst="rect">
@@ -2390,14 +2724,14 @@
           </a:bodyPr>
           <a:lstStyle/>
           <a:p>
-            <a:pPr algn="l" indent="0" marL="0">
+            <a:pPr marL="0" indent="0" algn="l">
               <a:lnSpc>
                 <a:spcPts val="2240"/>
               </a:lnSpc>
               <a:buNone/>
             </a:pPr>
             <a:r>
-              <a:rPr lang="en-US" sz="1600" dirty="0">
+              <a:rPr lang="en-US" sz="1600">
                 <a:solidFill>
                   <a:srgbClr val="4A5568"/>
                 </a:solidFill>
@@ -2407,7 +2741,7 @@
               </a:rPr>
               <a:t>Valid for</a:t>
             </a:r>
-            <a:endParaRPr lang="en-US" sz="1600" dirty="0"/>
+            <a:endParaRPr lang="en-US" sz="1600"/>
           </a:p>
         </p:txBody>
       </p:sp>
@@ -2419,7 +2753,7 @@
         </p:nvSpPr>
         <p:spPr>
           <a:xfrm>
-            <a:off x="10196386" y="3850640"/>
+            <a:off x="10370558" y="5193211"/>
             <a:ext cx="878014" cy="309880"/>
           </a:xfrm>
           <a:prstGeom prst="rect">
@@ -2434,14 +2768,14 @@
           </a:bodyPr>
           <a:lstStyle/>
           <a:p>
-            <a:pPr algn="r" indent="0" marL="0">
+            <a:pPr marL="0" indent="0" algn="r">
               <a:lnSpc>
                 <a:spcPts val="2240"/>
               </a:lnSpc>
               <a:buNone/>
             </a:pPr>
             <a:r>
-              <a:rPr lang="en-US" sz="1600" dirty="0">
+              <a:rPr lang="en-US" sz="1600">
                 <a:solidFill>
                   <a:srgbClr val="14213D"/>
                 </a:solidFill>
@@ -2451,7 +2785,7 @@
               </a:rPr>
               <a:t>90 min</a:t>
             </a:r>
-            <a:endParaRPr lang="en-US" sz="1600" dirty="0"/>
+            <a:endParaRPr lang="en-US" sz="1600"/>
           </a:p>
         </p:txBody>
       </p:sp>
@@ -2463,7 +2797,7 @@
         </p:nvSpPr>
         <p:spPr>
           <a:xfrm>
-            <a:off x="8382000" y="4302760"/>
+            <a:off x="8556172" y="5645331"/>
             <a:ext cx="691324" cy="309880"/>
           </a:xfrm>
           <a:prstGeom prst="rect">
@@ -2478,14 +2812,14 @@
           </a:bodyPr>
           <a:lstStyle/>
           <a:p>
-            <a:pPr algn="l" indent="0" marL="0">
+            <a:pPr marL="0" indent="0" algn="l">
               <a:lnSpc>
                 <a:spcPts val="2240"/>
               </a:lnSpc>
               <a:buNone/>
             </a:pPr>
             <a:r>
-              <a:rPr lang="en-US" sz="1600" dirty="0">
+              <a:rPr lang="en-US" sz="1600">
                 <a:solidFill>
                   <a:srgbClr val="4A5568"/>
                 </a:solidFill>
@@ -2495,7 +2829,7 @@
               </a:rPr>
               <a:t>Status</a:t>
             </a:r>
-            <a:endParaRPr lang="en-US" sz="1600" dirty="0"/>
+            <a:endParaRPr lang="en-US" sz="1600"/>
           </a:p>
         </p:txBody>
       </p:sp>
@@ -2507,7 +2841,7 @@
         </p:nvSpPr>
         <p:spPr>
           <a:xfrm>
-            <a:off x="10185321" y="4287520"/>
+            <a:off x="10359493" y="5630091"/>
             <a:ext cx="889079" cy="314960"/>
           </a:xfrm>
           <a:prstGeom prst="roundRect">
@@ -2526,14 +2860,14 @@
           </a:bodyPr>
           <a:lstStyle/>
           <a:p>
-            <a:pPr algn="ctr" indent="0" marL="0">
+            <a:pPr marL="0" indent="0" algn="ctr">
               <a:lnSpc>
                 <a:spcPts val="1680"/>
               </a:lnSpc>
               <a:buNone/>
             </a:pPr>
             <a:r>
-              <a:rPr lang="en-US" sz="1200" b="1" spc="100" kern="0" dirty="0">
+              <a:rPr lang="en-US" sz="1200" b="1" kern="0" spc="100">
                 <a:solidFill>
                   <a:srgbClr val="14213D"/>
                 </a:solidFill>
@@ -2543,10 +2877,40 @@
               </a:rPr>
               <a:t>ACTIVE</a:t>
             </a:r>
-            <a:endParaRPr lang="en-US" sz="1200" dirty="0"/>
-          </a:p>
-        </p:txBody>
-      </p:sp>
+            <a:endParaRPr lang="en-US" sz="1200"/>
+          </a:p>
+        </p:txBody>
+      </p:sp>
+      <p:pic>
+        <p:nvPicPr>
+          <p:cNvPr id="17" name="Picture 16">
+            <a:extLst>
+              <a:ext uri="{FF2B5EF4-FFF2-40B4-BE49-F238E27FC236}">
+                <a16:creationId xmlns:a16="http://schemas.microsoft.com/office/drawing/2014/main" id="{2EA8E292-3EAE-2776-BAAD-30F4EC2E2662}"/>
+              </a:ext>
+            </a:extLst>
+          </p:cNvPr>
+          <p:cNvPicPr>
+            <a:picLocks noChangeAspect="1"/>
+          </p:cNvPicPr>
+          <p:nvPr/>
+        </p:nvPicPr>
+        <p:blipFill>
+          <a:blip r:embed="rId4"/>
+          <a:stretch>
+            <a:fillRect/>
+          </a:stretch>
+        </p:blipFill>
+        <p:spPr>
+          <a:xfrm>
+            <a:off x="304800" y="314161"/>
+            <a:ext cx="5972629" cy="1810077"/>
+          </a:xfrm>
+          <a:prstGeom prst="rect">
+            <a:avLst/>
+          </a:prstGeom>
+        </p:spPr>
+      </p:pic>
     </p:spTree>
   </p:cSld>
   <p:clrMapOvr>
@@ -2557,12 +2921,443 @@
 
 <file path=ppt/slides/slide10.xml><?xml version="1.0" encoding="utf-8"?>
 <p:sld xmlns:a="http://schemas.openxmlformats.org/drawingml/2006/main" xmlns:r="http://schemas.openxmlformats.org/officeDocument/2006/relationships" xmlns:p="http://schemas.openxmlformats.org/presentationml/2006/main">
+  <p:cSld>
+    <p:bg>
+      <p:bgPr>
+        <a:solidFill>
+          <a:srgbClr val="F6F4EE"/>
+        </a:solidFill>
+        <a:effectLst/>
+      </p:bgPr>
+    </p:bg>
+    <p:spTree>
+      <p:nvGrpSpPr>
+        <p:cNvPr id="1" name="">
+          <a:extLst>
+            <a:ext uri="{FF2B5EF4-FFF2-40B4-BE49-F238E27FC236}">
+              <a16:creationId xmlns:a16="http://schemas.microsoft.com/office/drawing/2014/main" id="{AAB27175-EC6B-6235-CD09-3BC9C17115AE}"/>
+            </a:ext>
+          </a:extLst>
+        </p:cNvPr>
+        <p:cNvGrpSpPr/>
+        <p:nvPr/>
+      </p:nvGrpSpPr>
+      <p:grpSpPr>
+        <a:xfrm>
+          <a:off x="0" y="0"/>
+          <a:ext cx="0" cy="0"/>
+          <a:chOff x="0" y="0"/>
+          <a:chExt cx="0" cy="0"/>
+        </a:xfrm>
+      </p:grpSpPr>
+      <p:sp>
+        <p:nvSpPr>
+          <p:cNvPr id="2" name="Text 0">
+            <a:extLst>
+              <a:ext uri="{FF2B5EF4-FFF2-40B4-BE49-F238E27FC236}">
+                <a16:creationId xmlns:a16="http://schemas.microsoft.com/office/drawing/2014/main" id="{C8FB4D8B-8259-29B1-21E8-1668863F38F0}"/>
+              </a:ext>
+            </a:extLst>
+          </p:cNvPr>
+          <p:cNvSpPr/>
+          <p:nvPr/>
+        </p:nvSpPr>
+        <p:spPr>
+          <a:xfrm>
+            <a:off x="812800" y="812800"/>
+            <a:ext cx="10883392" cy="238760"/>
+          </a:xfrm>
+          <a:prstGeom prst="rect">
+            <a:avLst/>
+          </a:prstGeom>
+          <a:noFill/>
+          <a:ln/>
+        </p:spPr>
+        <p:txBody>
+          <a:bodyPr wrap="square" lIns="0" tIns="0" rIns="0" bIns="0" rtlCol="0" anchor="t">
+            <a:normAutofit/>
+          </a:bodyPr>
+          <a:lstStyle/>
+          <a:p>
+            <a:r>
+              <a:rPr lang="en-US" sz="1200" b="1" kern="0" spc="150">
+                <a:solidFill>
+                  <a:srgbClr val="B86E12"/>
+                </a:solidFill>
+                <a:latin typeface="Arial"/>
+                <a:cs typeface="Arial"/>
+              </a:rPr>
+              <a:t>THE PROTOTYPE · WEB APP</a:t>
+            </a:r>
+            <a:endParaRPr lang="en-US"/>
+          </a:p>
+          <a:p>
+            <a:pPr marL="0" indent="0" algn="l">
+              <a:lnSpc>
+                <a:spcPts val="1680"/>
+              </a:lnSpc>
+              <a:buNone/>
+            </a:pPr>
+            <a:endParaRPr lang="en-US" sz="1200" b="1" kern="0" spc="150" dirty="0">
+              <a:solidFill>
+                <a:srgbClr val="B86E12"/>
+              </a:solidFill>
+              <a:latin typeface="Arial"/>
+              <a:cs typeface="Arial"/>
+            </a:endParaRPr>
+          </a:p>
+        </p:txBody>
+      </p:sp>
+      <p:sp>
+        <p:nvSpPr>
+          <p:cNvPr id="3" name="Text 1">
+            <a:extLst>
+              <a:ext uri="{FF2B5EF4-FFF2-40B4-BE49-F238E27FC236}">
+                <a16:creationId xmlns:a16="http://schemas.microsoft.com/office/drawing/2014/main" id="{C2B61824-9763-1CB5-B888-5E60F5AC104D}"/>
+              </a:ext>
+            </a:extLst>
+          </p:cNvPr>
+          <p:cNvSpPr/>
+          <p:nvPr/>
+        </p:nvSpPr>
+        <p:spPr>
+          <a:xfrm>
+            <a:off x="812800" y="1127761"/>
+            <a:ext cx="10883392" cy="528320"/>
+          </a:xfrm>
+          <a:prstGeom prst="rect">
+            <a:avLst/>
+          </a:prstGeom>
+          <a:noFill/>
+          <a:ln/>
+        </p:spPr>
+        <p:txBody>
+          <a:bodyPr wrap="square" lIns="0" tIns="0" rIns="0" bIns="0" rtlCol="0" anchor="t">
+            <a:normAutofit lnSpcReduction="10000"/>
+          </a:bodyPr>
+          <a:lstStyle/>
+          <a:p>
+            <a:r>
+              <a:rPr lang="en-US" sz="3600" b="1">
+                <a:solidFill>
+                  <a:srgbClr val="14213D"/>
+                </a:solidFill>
+                <a:latin typeface="Arial"/>
+                <a:cs typeface="Arial"/>
+              </a:rPr>
+              <a:t>Rider and conductor views</a:t>
+            </a:r>
+            <a:endParaRPr lang="en-US"/>
+          </a:p>
+          <a:p>
+            <a:pPr marL="0" indent="0" algn="l">
+              <a:lnSpc>
+                <a:spcPts val="3960"/>
+              </a:lnSpc>
+              <a:buNone/>
+            </a:pPr>
+            <a:endParaRPr lang="en-US" sz="3600" b="1" dirty="0">
+              <a:solidFill>
+                <a:srgbClr val="14213D"/>
+              </a:solidFill>
+              <a:latin typeface="Arial"/>
+              <a:cs typeface="Arial"/>
+            </a:endParaRPr>
+          </a:p>
+        </p:txBody>
+      </p:sp>
+      <p:pic>
+        <p:nvPicPr>
+          <p:cNvPr id="14" name="Picture 13">
+            <a:extLst>
+              <a:ext uri="{FF2B5EF4-FFF2-40B4-BE49-F238E27FC236}">
+                <a16:creationId xmlns:a16="http://schemas.microsoft.com/office/drawing/2014/main" id="{BFC94696-FA48-0F54-EEB9-F5B59A315B5B}"/>
+              </a:ext>
+            </a:extLst>
+          </p:cNvPr>
+          <p:cNvPicPr>
+            <a:picLocks noChangeAspect="1"/>
+          </p:cNvPicPr>
+          <p:nvPr/>
+        </p:nvPicPr>
+        <p:blipFill>
+          <a:blip r:embed="rId3"/>
+          <a:stretch>
+            <a:fillRect/>
+          </a:stretch>
+        </p:blipFill>
+        <p:spPr>
+          <a:xfrm>
+            <a:off x="1262055" y="1847592"/>
+            <a:ext cx="3387704" cy="4745683"/>
+          </a:xfrm>
+          <a:prstGeom prst="rect">
+            <a:avLst/>
+          </a:prstGeom>
+        </p:spPr>
+      </p:pic>
+      <p:pic>
+        <p:nvPicPr>
+          <p:cNvPr id="4" name="Picture 3">
+            <a:extLst>
+              <a:ext uri="{FF2B5EF4-FFF2-40B4-BE49-F238E27FC236}">
+                <a16:creationId xmlns:a16="http://schemas.microsoft.com/office/drawing/2014/main" id="{69014D20-0353-EADF-F162-A2EBF010CFD7}"/>
+              </a:ext>
+            </a:extLst>
+          </p:cNvPr>
+          <p:cNvPicPr>
+            <a:picLocks noChangeAspect="1"/>
+          </p:cNvPicPr>
+          <p:nvPr/>
+        </p:nvPicPr>
+        <p:blipFill>
+          <a:blip r:embed="rId4"/>
+          <a:stretch>
+            <a:fillRect/>
+          </a:stretch>
+        </p:blipFill>
+        <p:spPr>
+          <a:xfrm>
+            <a:off x="5077714" y="2381968"/>
+            <a:ext cx="3145767" cy="3373648"/>
+          </a:xfrm>
+          <a:prstGeom prst="rect">
+            <a:avLst/>
+          </a:prstGeom>
+        </p:spPr>
+      </p:pic>
+      <p:pic>
+        <p:nvPicPr>
+          <p:cNvPr id="5" name="Picture 4">
+            <a:extLst>
+              <a:ext uri="{FF2B5EF4-FFF2-40B4-BE49-F238E27FC236}">
+                <a16:creationId xmlns:a16="http://schemas.microsoft.com/office/drawing/2014/main" id="{86DEDCA1-C070-3868-CE20-5BBF4503D735}"/>
+              </a:ext>
+            </a:extLst>
+          </p:cNvPr>
+          <p:cNvPicPr>
+            <a:picLocks noChangeAspect="1"/>
+          </p:cNvPicPr>
+          <p:nvPr/>
+        </p:nvPicPr>
+        <p:blipFill>
+          <a:blip r:embed="rId5"/>
+          <a:stretch>
+            <a:fillRect/>
+          </a:stretch>
+        </p:blipFill>
+        <p:spPr>
+          <a:xfrm>
+            <a:off x="8470771" y="2381969"/>
+            <a:ext cx="3145767" cy="3359270"/>
+          </a:xfrm>
+          <a:prstGeom prst="rect">
+            <a:avLst/>
+          </a:prstGeom>
+        </p:spPr>
+      </p:pic>
+    </p:spTree>
+    <p:extLst>
+      <p:ext uri="{BB962C8B-B14F-4D97-AF65-F5344CB8AC3E}">
+        <p14:creationId xmlns:p14="http://schemas.microsoft.com/office/powerpoint/2010/main" val="2299811320"/>
+      </p:ext>
+    </p:extLst>
+  </p:cSld>
+  <p:clrMapOvr>
+    <a:masterClrMapping/>
+  </p:clrMapOvr>
+</p:sld>
+</file>
+
+<file path=ppt/slides/slide11.xml><?xml version="1.0" encoding="utf-8"?>
+<p:sld xmlns:a="http://schemas.openxmlformats.org/drawingml/2006/main" xmlns:r="http://schemas.openxmlformats.org/officeDocument/2006/relationships" xmlns:p="http://schemas.openxmlformats.org/presentationml/2006/main">
+  <p:cSld>
+    <p:bg>
+      <p:bgPr>
+        <a:solidFill>
+          <a:srgbClr val="F6F4EE"/>
+        </a:solidFill>
+        <a:effectLst/>
+      </p:bgPr>
+    </p:bg>
+    <p:spTree>
+      <p:nvGrpSpPr>
+        <p:cNvPr id="1" name="">
+          <a:extLst>
+            <a:ext uri="{FF2B5EF4-FFF2-40B4-BE49-F238E27FC236}">
+              <a16:creationId xmlns:a16="http://schemas.microsoft.com/office/drawing/2014/main" id="{3FF99D98-9721-92CC-9656-5CC9AB31B721}"/>
+            </a:ext>
+          </a:extLst>
+        </p:cNvPr>
+        <p:cNvGrpSpPr/>
+        <p:nvPr/>
+      </p:nvGrpSpPr>
+      <p:grpSpPr>
+        <a:xfrm>
+          <a:off x="0" y="0"/>
+          <a:ext cx="0" cy="0"/>
+          <a:chOff x="0" y="0"/>
+          <a:chExt cx="0" cy="0"/>
+        </a:xfrm>
+      </p:grpSpPr>
+      <p:sp>
+        <p:nvSpPr>
+          <p:cNvPr id="2" name="Text 0">
+            <a:extLst>
+              <a:ext uri="{FF2B5EF4-FFF2-40B4-BE49-F238E27FC236}">
+                <a16:creationId xmlns:a16="http://schemas.microsoft.com/office/drawing/2014/main" id="{62C3A54F-553D-9174-B79E-1E717E4323EA}"/>
+              </a:ext>
+            </a:extLst>
+          </p:cNvPr>
+          <p:cNvSpPr/>
+          <p:nvPr/>
+        </p:nvSpPr>
+        <p:spPr>
+          <a:xfrm>
+            <a:off x="812800" y="812800"/>
+            <a:ext cx="10883392" cy="238760"/>
+          </a:xfrm>
+          <a:prstGeom prst="rect">
+            <a:avLst/>
+          </a:prstGeom>
+          <a:noFill/>
+          <a:ln/>
+        </p:spPr>
+        <p:txBody>
+          <a:bodyPr wrap="square" lIns="0" tIns="0" rIns="0" bIns="0" rtlCol="0" anchor="t">
+            <a:normAutofit/>
+          </a:bodyPr>
+          <a:lstStyle/>
+          <a:p>
+            <a:r>
+              <a:rPr lang="en-US" sz="1200" b="1" kern="0" spc="150">
+                <a:solidFill>
+                  <a:srgbClr val="B86E12"/>
+                </a:solidFill>
+                <a:latin typeface="Arial"/>
+                <a:cs typeface="Arial"/>
+              </a:rPr>
+              <a:t>THE PROTOTYPE · WEB APP</a:t>
+            </a:r>
+            <a:endParaRPr lang="en-US"/>
+          </a:p>
+          <a:p>
+            <a:pPr marL="0" indent="0" algn="l">
+              <a:lnSpc>
+                <a:spcPts val="1680"/>
+              </a:lnSpc>
+              <a:buNone/>
+            </a:pPr>
+            <a:endParaRPr lang="en-US" sz="1200" b="1" kern="0" spc="150" dirty="0">
+              <a:solidFill>
+                <a:srgbClr val="B86E12"/>
+              </a:solidFill>
+              <a:latin typeface="Arial"/>
+              <a:cs typeface="Arial"/>
+            </a:endParaRPr>
+          </a:p>
+        </p:txBody>
+      </p:sp>
+      <p:sp>
+        <p:nvSpPr>
+          <p:cNvPr id="3" name="Text 1">
+            <a:extLst>
+              <a:ext uri="{FF2B5EF4-FFF2-40B4-BE49-F238E27FC236}">
+                <a16:creationId xmlns:a16="http://schemas.microsoft.com/office/drawing/2014/main" id="{A796ABA6-143E-6AA0-CDC1-A2558BB70134}"/>
+              </a:ext>
+            </a:extLst>
+          </p:cNvPr>
+          <p:cNvSpPr/>
+          <p:nvPr/>
+        </p:nvSpPr>
+        <p:spPr>
+          <a:xfrm>
+            <a:off x="812800" y="1127761"/>
+            <a:ext cx="10883392" cy="528320"/>
+          </a:xfrm>
+          <a:prstGeom prst="rect">
+            <a:avLst/>
+          </a:prstGeom>
+          <a:noFill/>
+          <a:ln/>
+        </p:spPr>
+        <p:txBody>
+          <a:bodyPr wrap="square" lIns="0" tIns="0" rIns="0" bIns="0" rtlCol="0" anchor="t">
+            <a:normAutofit/>
+          </a:bodyPr>
+          <a:lstStyle/>
+          <a:p>
+            <a:pPr>
+              <a:lnSpc>
+                <a:spcPts val="3960"/>
+              </a:lnSpc>
+            </a:pPr>
+            <a:r>
+              <a:rPr lang="en-US" sz="3600" b="1">
+                <a:solidFill>
+                  <a:srgbClr val="14213D"/>
+                </a:solidFill>
+                <a:latin typeface="Arial"/>
+                <a:cs typeface="Arial"/>
+              </a:rPr>
+              <a:t>End to end test script</a:t>
+            </a:r>
+            <a:endParaRPr lang="en-US"/>
+          </a:p>
+        </p:txBody>
+      </p:sp>
+      <p:pic>
+        <p:nvPicPr>
+          <p:cNvPr id="7" name="Picture 6">
+            <a:extLst>
+              <a:ext uri="{FF2B5EF4-FFF2-40B4-BE49-F238E27FC236}">
+                <a16:creationId xmlns:a16="http://schemas.microsoft.com/office/drawing/2014/main" id="{9EDF71CC-446D-BCF6-6ECA-4285A48A3A0B}"/>
+              </a:ext>
+            </a:extLst>
+          </p:cNvPr>
+          <p:cNvPicPr>
+            <a:picLocks noChangeAspect="1"/>
+          </p:cNvPicPr>
+          <p:nvPr/>
+        </p:nvPicPr>
+        <p:blipFill>
+          <a:blip r:embed="rId3"/>
+          <a:stretch>
+            <a:fillRect/>
+          </a:stretch>
+        </p:blipFill>
+        <p:spPr>
+          <a:xfrm>
+            <a:off x="6982212" y="460075"/>
+            <a:ext cx="4855539" cy="5995359"/>
+          </a:xfrm>
+          <a:prstGeom prst="rect">
+            <a:avLst/>
+          </a:prstGeom>
+        </p:spPr>
+      </p:pic>
+    </p:spTree>
+    <p:extLst>
+      <p:ext uri="{BB962C8B-B14F-4D97-AF65-F5344CB8AC3E}">
+        <p14:creationId xmlns:p14="http://schemas.microsoft.com/office/powerpoint/2010/main" val="3008865724"/>
+      </p:ext>
+    </p:extLst>
+  </p:cSld>
+  <p:clrMapOvr>
+    <a:masterClrMapping/>
+  </p:clrMapOvr>
+</p:sld>
+</file>
+
+<file path=ppt/slides/slide12.xml><?xml version="1.0" encoding="utf-8"?>
+<p:sld xmlns:a="http://schemas.openxmlformats.org/drawingml/2006/main" xmlns:r="http://schemas.openxmlformats.org/officeDocument/2006/relationships" xmlns:p="http://schemas.openxmlformats.org/presentationml/2006/main">
   <p:cSld name="Slide 10">
     <p:bg>
       <p:bgPr>
         <a:solidFill>
           <a:srgbClr val="F6F4EE"/>
         </a:solidFill>
+        <a:effectLst/>
       </p:bgPr>
     </p:bg>
     <p:spTree>
@@ -2602,14 +3397,14 @@
           </a:bodyPr>
           <a:lstStyle/>
           <a:p>
-            <a:pPr algn="l" indent="0" marL="0">
+            <a:pPr marL="0" indent="0" algn="l">
               <a:lnSpc>
                 <a:spcPts val="1680"/>
               </a:lnSpc>
               <a:buNone/>
             </a:pPr>
             <a:r>
-              <a:rPr lang="en-US" sz="1200" b="1" spc="150" kern="0" dirty="0">
+              <a:rPr lang="en-US" sz="1200" b="1" kern="0" spc="150">
                 <a:solidFill>
                   <a:srgbClr val="B86E12"/>
                 </a:solidFill>
@@ -2619,7 +3414,7 @@
               </a:rPr>
               <a:t>LIMITATIONS</a:t>
             </a:r>
-            <a:endParaRPr lang="en-US" sz="1200" dirty="0"/>
+            <a:endParaRPr lang="en-US" sz="1200"/>
           </a:p>
         </p:txBody>
       </p:sp>
@@ -2646,14 +3441,14 @@
           </a:bodyPr>
           <a:lstStyle/>
           <a:p>
-            <a:pPr algn="l" indent="0" marL="0">
+            <a:pPr marL="0" indent="0" algn="l">
               <a:lnSpc>
                 <a:spcPts val="3960"/>
               </a:lnSpc>
               <a:buNone/>
             </a:pPr>
             <a:r>
-              <a:rPr lang="en-US" sz="3600" b="1" dirty="0">
+              <a:rPr lang="en-US" sz="3600" b="1">
                 <a:solidFill>
                   <a:srgbClr val="14213D"/>
                 </a:solidFill>
@@ -2663,7 +3458,7 @@
               </a:rPr>
               <a:t>What the prototype doesn’t solve yet</a:t>
             </a:r>
-            <a:endParaRPr lang="en-US" sz="3600" dirty="0"/>
+            <a:endParaRPr lang="en-US" sz="3600"/>
           </a:p>
         </p:txBody>
       </p:sp>
@@ -2717,14 +3512,14 @@
           </a:bodyPr>
           <a:lstStyle/>
           <a:p>
-            <a:pPr algn="l" indent="0" marL="0">
+            <a:pPr marL="0" indent="0" algn="l">
               <a:lnSpc>
                 <a:spcPts val="1920"/>
               </a:lnSpc>
               <a:buNone/>
             </a:pPr>
             <a:r>
-              <a:rPr lang="en-US" sz="1600" b="1" dirty="0">
+              <a:rPr lang="en-US" sz="1600" b="1">
                 <a:solidFill>
                   <a:srgbClr val="14213D"/>
                 </a:solidFill>
@@ -2734,7 +3529,7 @@
               </a:rPr>
               <a:t>Pseudonymous, not private</a:t>
             </a:r>
-            <a:endParaRPr lang="en-US" sz="1600" dirty="0"/>
+            <a:endParaRPr lang="en-US" sz="1600"/>
           </a:p>
         </p:txBody>
       </p:sp>
@@ -2761,14 +3556,14 @@
           </a:bodyPr>
           <a:lstStyle/>
           <a:p>
-            <a:pPr algn="l" indent="0" marL="0">
+            <a:pPr marL="0" indent="0" algn="l">
               <a:lnSpc>
                 <a:spcPts val="1680"/>
               </a:lnSpc>
               <a:buNone/>
             </a:pPr>
             <a:r>
-              <a:rPr lang="en-US" sz="1200" dirty="0">
+              <a:rPr lang="en-US" sz="1200">
                 <a:solidFill>
                   <a:srgbClr val="4A5568"/>
                 </a:solidFill>
@@ -2778,7 +3573,7 @@
               </a:rPr>
               <a:t>Owners and payments are public. Once a wallet is linked to a person, their trips are too.</a:t>
             </a:r>
-            <a:endParaRPr lang="en-US" sz="1200" dirty="0"/>
+            <a:endParaRPr lang="en-US" sz="1200"/>
           </a:p>
         </p:txBody>
       </p:sp>
@@ -2832,14 +3627,14 @@
           </a:bodyPr>
           <a:lstStyle/>
           <a:p>
-            <a:pPr algn="l" indent="0" marL="0">
+            <a:pPr marL="0" indent="0" algn="l">
               <a:lnSpc>
                 <a:spcPts val="1920"/>
               </a:lnSpc>
               <a:buNone/>
             </a:pPr>
             <a:r>
-              <a:rPr lang="en-US" sz="1600" b="1" dirty="0">
+              <a:rPr lang="en-US" sz="1600" b="1">
                 <a:solidFill>
                   <a:srgbClr val="14213D"/>
                 </a:solidFill>
@@ -2849,7 +3644,7 @@
               </a:rPr>
               <a:t>Wallet experience</a:t>
             </a:r>
-            <a:endParaRPr lang="en-US" sz="1600" dirty="0"/>
+            <a:endParaRPr lang="en-US" sz="1600"/>
           </a:p>
         </p:txBody>
       </p:sp>
@@ -2876,14 +3671,14 @@
           </a:bodyPr>
           <a:lstStyle/>
           <a:p>
-            <a:pPr algn="l" indent="0" marL="0">
+            <a:pPr marL="0" indent="0" algn="l">
               <a:lnSpc>
                 <a:spcPts val="1680"/>
               </a:lnSpc>
               <a:buNone/>
             </a:pPr>
             <a:r>
-              <a:rPr lang="en-US" sz="1200" dirty="0">
+              <a:rPr lang="en-US" sz="1200">
                 <a:solidFill>
                   <a:srgbClr val="4A5568"/>
                 </a:solidFill>
@@ -2893,7 +3688,7 @@
               </a:rPr>
               <a:t>Riders must manage keys and hold stablecoin. A lost key means a lost ticket.</a:t>
             </a:r>
-            <a:endParaRPr lang="en-US" sz="1200" dirty="0"/>
+            <a:endParaRPr lang="en-US" sz="1200"/>
           </a:p>
         </p:txBody>
       </p:sp>
@@ -2947,14 +3742,14 @@
           </a:bodyPr>
           <a:lstStyle/>
           <a:p>
-            <a:pPr algn="l" indent="0" marL="0">
+            <a:pPr marL="0" indent="0" algn="l">
               <a:lnSpc>
                 <a:spcPts val="1920"/>
               </a:lnSpc>
               <a:buNone/>
             </a:pPr>
             <a:r>
-              <a:rPr lang="en-US" sz="1600" b="1" dirty="0">
+              <a:rPr lang="en-US" sz="1600" b="1">
                 <a:solidFill>
                   <a:srgbClr val="14213D"/>
                 </a:solidFill>
@@ -2964,7 +3759,7 @@
               </a:rPr>
               <a:t>Fees and speed</a:t>
             </a:r>
-            <a:endParaRPr lang="en-US" sz="1600" dirty="0"/>
+            <a:endParaRPr lang="en-US" sz="1600"/>
           </a:p>
         </p:txBody>
       </p:sp>
@@ -2991,14 +3786,14 @@
           </a:bodyPr>
           <a:lstStyle/>
           <a:p>
-            <a:pPr algn="l" indent="0" marL="0">
+            <a:pPr marL="0" indent="0" algn="l">
               <a:lnSpc>
                 <a:spcPts val="1680"/>
               </a:lnSpc>
               <a:buNone/>
             </a:pPr>
             <a:r>
-              <a:rPr lang="en-US" sz="1200" dirty="0">
+              <a:rPr lang="en-US" sz="1200">
                 <a:solidFill>
                   <a:srgbClr val="4A5568"/>
                 </a:solidFill>
@@ -3008,7 +3803,7 @@
               </a:rPr>
               <a:t>Buying and validating are transactions. Gas and confirmation time must stay small next to a 1.30 € fare.</a:t>
             </a:r>
-            <a:endParaRPr lang="en-US" sz="1200" dirty="0"/>
+            <a:endParaRPr lang="en-US" sz="1200"/>
           </a:p>
         </p:txBody>
       </p:sp>
@@ -3062,14 +3857,14 @@
           </a:bodyPr>
           <a:lstStyle/>
           <a:p>
-            <a:pPr algn="l" indent="0" marL="0">
+            <a:pPr marL="0" indent="0" algn="l">
               <a:lnSpc>
                 <a:spcPts val="1920"/>
               </a:lnSpc>
               <a:buNone/>
             </a:pPr>
             <a:r>
-              <a:rPr lang="en-US" sz="1600" b="1" dirty="0">
+              <a:rPr lang="en-US" sz="1600" b="1">
                 <a:solidFill>
                   <a:srgbClr val="14213D"/>
                 </a:solidFill>
@@ -3079,7 +3874,7 @@
               </a:rPr>
               <a:t>Always online</a:t>
             </a:r>
-            <a:endParaRPr lang="en-US" sz="1600" dirty="0"/>
+            <a:endParaRPr lang="en-US" sz="1600"/>
           </a:p>
         </p:txBody>
       </p:sp>
@@ -3106,14 +3901,14 @@
           </a:bodyPr>
           <a:lstStyle/>
           <a:p>
-            <a:pPr algn="l" indent="0" marL="0">
+            <a:pPr marL="0" indent="0" algn="l">
               <a:lnSpc>
                 <a:spcPts val="1680"/>
               </a:lnSpc>
               <a:buNone/>
             </a:pPr>
             <a:r>
-              <a:rPr lang="en-US" sz="1200" dirty="0">
+              <a:rPr lang="en-US" sz="1200">
                 <a:solidFill>
                   <a:srgbClr val="4A5568"/>
                 </a:solidFill>
@@ -3123,7 +3918,7 @@
               </a:rPr>
               <a:t>Validating and checking need a live connection to a blockchain node.</a:t>
             </a:r>
-            <a:endParaRPr lang="en-US" sz="1200" dirty="0"/>
+            <a:endParaRPr lang="en-US" sz="1200"/>
           </a:p>
         </p:txBody>
       </p:sp>
@@ -3177,14 +3972,14 @@
           </a:bodyPr>
           <a:lstStyle/>
           <a:p>
-            <a:pPr algn="l" indent="0" marL="0">
+            <a:pPr marL="0" indent="0" algn="l">
               <a:lnSpc>
                 <a:spcPts val="1920"/>
               </a:lnSpc>
               <a:buNone/>
             </a:pPr>
             <a:r>
-              <a:rPr lang="en-US" sz="1600" b="1" dirty="0">
+              <a:rPr lang="en-US" sz="1600" b="1">
                 <a:solidFill>
                   <a:srgbClr val="14213D"/>
                 </a:solidFill>
@@ -3194,7 +3989,7 @@
               </a:rPr>
               <a:t>One owner key</a:t>
             </a:r>
-            <a:endParaRPr lang="en-US" sz="1600" dirty="0"/>
+            <a:endParaRPr lang="en-US" sz="1600"/>
           </a:p>
         </p:txBody>
       </p:sp>
@@ -3221,14 +4016,14 @@
           </a:bodyPr>
           <a:lstStyle/>
           <a:p>
-            <a:pPr algn="l" indent="0" marL="0">
+            <a:pPr marL="0" indent="0" algn="l">
               <a:lnSpc>
                 <a:spcPts val="1680"/>
               </a:lnSpc>
               <a:buNone/>
             </a:pPr>
             <a:r>
-              <a:rPr lang="en-US" sz="1200" dirty="0">
+              <a:rPr lang="en-US" sz="1200">
                 <a:solidFill>
                   <a:srgbClr val="4A5568"/>
                 </a:solidFill>
@@ -3238,7 +4033,7 @@
               </a:rPr>
               <a:t>A single account controls the revenue; real use needs a multisig or shared governance.</a:t>
             </a:r>
-            <a:endParaRPr lang="en-US" sz="1200" dirty="0"/>
+            <a:endParaRPr lang="en-US" sz="1200"/>
           </a:p>
         </p:txBody>
       </p:sp>
@@ -3292,14 +4087,14 @@
           </a:bodyPr>
           <a:lstStyle/>
           <a:p>
-            <a:pPr algn="l" indent="0" marL="0">
+            <a:pPr marL="0" indent="0" algn="l">
               <a:lnSpc>
                 <a:spcPts val="1920"/>
               </a:lnSpc>
               <a:buNone/>
             </a:pPr>
             <a:r>
-              <a:rPr lang="en-US" sz="1600" b="1" dirty="0">
+              <a:rPr lang="en-US" sz="1600" b="1">
                 <a:solidFill>
                   <a:srgbClr val="14213D"/>
                 </a:solidFill>
@@ -3309,7 +4104,7 @@
               </a:rPr>
               <a:t>Prototype scope</a:t>
             </a:r>
-            <a:endParaRPr lang="en-US" sz="1600" dirty="0"/>
+            <a:endParaRPr lang="en-US" sz="1600"/>
           </a:p>
         </p:txBody>
       </p:sp>
@@ -3336,14 +4131,14 @@
           </a:bodyPr>
           <a:lstStyle/>
           <a:p>
-            <a:pPr algn="l" indent="0" marL="0">
+            <a:pPr marL="0" indent="0" algn="l">
               <a:lnSpc>
                 <a:spcPts val="1680"/>
               </a:lnSpc>
               <a:buNone/>
             </a:pPr>
             <a:r>
-              <a:rPr lang="en-US" sz="1200" dirty="0">
+              <a:rPr lang="en-US" sz="1200">
                 <a:solidFill>
                   <a:srgbClr val="4A5568"/>
                 </a:solidFill>
@@ -3353,7 +4148,7 @@
               </a:rPr>
               <a:t>One operator, one ticket type, a mock stablecoin and a local test chain.</a:t>
             </a:r>
-            <a:endParaRPr lang="en-US" sz="1200" dirty="0"/>
+            <a:endParaRPr lang="en-US" sz="1200"/>
           </a:p>
         </p:txBody>
       </p:sp>
@@ -3365,7 +4160,7 @@
 </p:sld>
 </file>
 
-<file path=ppt/slides/slide11.xml><?xml version="1.0" encoding="utf-8"?>
+<file path=ppt/slides/slide13.xml><?xml version="1.0" encoding="utf-8"?>
 <p:sld xmlns:a="http://schemas.openxmlformats.org/drawingml/2006/main" xmlns:r="http://schemas.openxmlformats.org/officeDocument/2006/relationships" xmlns:p="http://schemas.openxmlformats.org/presentationml/2006/main">
   <p:cSld name="Slide 11">
     <p:bg>
@@ -3373,6 +4168,7 @@
         <a:solidFill>
           <a:srgbClr val="14213D"/>
         </a:solidFill>
+        <a:effectLst/>
       </p:bgPr>
     </p:bg>
     <p:spTree>
@@ -3412,14 +4208,14 @@
           </a:bodyPr>
           <a:lstStyle/>
           <a:p>
-            <a:pPr algn="l" indent="0" marL="0">
+            <a:pPr marL="0" indent="0" algn="l">
               <a:lnSpc>
                 <a:spcPts val="1680"/>
               </a:lnSpc>
               <a:buNone/>
             </a:pPr>
             <a:r>
-              <a:rPr lang="en-US" sz="1200" b="1" spc="150" kern="0" dirty="0">
+              <a:rPr lang="en-US" sz="1200" b="1" kern="0" spc="150">
                 <a:solidFill>
                   <a:srgbClr val="F2A541"/>
                 </a:solidFill>
@@ -3429,7 +4225,7 @@
               </a:rPr>
               <a:t>PROSPECTS</a:t>
             </a:r>
-            <a:endParaRPr lang="en-US" sz="1200" dirty="0"/>
+            <a:endParaRPr lang="en-US" sz="1200"/>
           </a:p>
         </p:txBody>
       </p:sp>
@@ -3456,14 +4252,14 @@
           </a:bodyPr>
           <a:lstStyle/>
           <a:p>
-            <a:pPr algn="l" indent="0" marL="0">
+            <a:pPr marL="0" indent="0" algn="l">
               <a:lnSpc>
                 <a:spcPts val="3960"/>
               </a:lnSpc>
               <a:buNone/>
             </a:pPr>
             <a:r>
-              <a:rPr lang="en-US" sz="3600" b="1" dirty="0">
+              <a:rPr lang="en-US" sz="3600" b="1">
                 <a:solidFill>
                   <a:srgbClr val="F6F4EE"/>
                 </a:solidFill>
@@ -3473,7 +4269,7 @@
               </a:rPr>
               <a:t>From one contract to one platform</a:t>
             </a:r>
-            <a:endParaRPr lang="en-US" sz="3600" dirty="0"/>
+            <a:endParaRPr lang="en-US" sz="3600"/>
           </a:p>
         </p:txBody>
       </p:sp>
@@ -3527,14 +4323,14 @@
           </a:bodyPr>
           <a:lstStyle/>
           <a:p>
-            <a:pPr algn="l" indent="0" marL="0">
+            <a:pPr marL="0" indent="0" algn="l">
               <a:lnSpc>
                 <a:spcPts val="3080"/>
               </a:lnSpc>
               <a:buNone/>
             </a:pPr>
             <a:r>
-              <a:rPr lang="en-US" sz="2200" b="1" dirty="0">
+              <a:rPr lang="en-US" sz="2200" b="1">
                 <a:solidFill>
                   <a:srgbClr val="F2A541"/>
                 </a:solidFill>
@@ -3544,7 +4340,7 @@
               </a:rPr>
               <a:t>01</a:t>
             </a:r>
-            <a:endParaRPr lang="en-US" sz="2200" dirty="0"/>
+            <a:endParaRPr lang="en-US" sz="2200"/>
           </a:p>
         </p:txBody>
       </p:sp>
@@ -3571,14 +4367,14 @@
           </a:bodyPr>
           <a:lstStyle/>
           <a:p>
-            <a:pPr algn="l" indent="0" marL="0">
+            <a:pPr marL="0" indent="0" algn="l">
               <a:lnSpc>
                 <a:spcPts val="2530"/>
               </a:lnSpc>
               <a:buNone/>
             </a:pPr>
             <a:r>
-              <a:rPr lang="en-US" sz="2200" b="1" dirty="0">
+              <a:rPr lang="en-US" sz="2200" b="1">
                 <a:solidFill>
                   <a:srgbClr val="F6F4EE"/>
                 </a:solidFill>
@@ -3588,7 +4384,7 @@
               </a:rPr>
               <a:t>Off-chain user profile</a:t>
             </a:r>
-            <a:endParaRPr lang="en-US" sz="2200" dirty="0"/>
+            <a:endParaRPr lang="en-US" sz="2200"/>
           </a:p>
         </p:txBody>
       </p:sp>
@@ -3615,14 +4411,14 @@
           </a:bodyPr>
           <a:lstStyle/>
           <a:p>
-            <a:pPr algn="l" indent="0" marL="0">
+            <a:pPr marL="0" indent="0" algn="l">
               <a:lnSpc>
                 <a:spcPts val="1680"/>
               </a:lnSpc>
               <a:buNone/>
             </a:pPr>
             <a:r>
-              <a:rPr lang="en-US" sz="1200" dirty="0">
+              <a:rPr lang="en-US" sz="1200">
                 <a:solidFill>
                   <a:srgbClr val="C9D3E3"/>
                 </a:solidFill>
@@ -3632,7 +4428,7 @@
               </a:rPr>
               <a:t>Name, concessions and subscriptions stay in a protected off-chain store. The chain sees only a hash, so data can be corrected or erased.</a:t>
             </a:r>
-            <a:endParaRPr lang="en-US" sz="1200" dirty="0"/>
+            <a:endParaRPr lang="en-US" sz="1200"/>
           </a:p>
         </p:txBody>
       </p:sp>
@@ -3686,14 +4482,14 @@
           </a:bodyPr>
           <a:lstStyle/>
           <a:p>
-            <a:pPr algn="l" indent="0" marL="0">
+            <a:pPr marL="0" indent="0" algn="l">
               <a:lnSpc>
                 <a:spcPts val="3080"/>
               </a:lnSpc>
               <a:buNone/>
             </a:pPr>
             <a:r>
-              <a:rPr lang="en-US" sz="2200" b="1" dirty="0">
+              <a:rPr lang="en-US" sz="2200" b="1">
                 <a:solidFill>
                   <a:srgbClr val="F2A541"/>
                 </a:solidFill>
@@ -3703,7 +4499,7 @@
               </a:rPr>
               <a:t>02</a:t>
             </a:r>
-            <a:endParaRPr lang="en-US" sz="2200" dirty="0"/>
+            <a:endParaRPr lang="en-US" sz="2200"/>
           </a:p>
         </p:txBody>
       </p:sp>
@@ -3730,14 +4526,14 @@
           </a:bodyPr>
           <a:lstStyle/>
           <a:p>
-            <a:pPr algn="l" indent="0" marL="0">
+            <a:pPr marL="0" indent="0" algn="l">
               <a:lnSpc>
                 <a:spcPts val="2530"/>
               </a:lnSpc>
               <a:buNone/>
             </a:pPr>
             <a:r>
-              <a:rPr lang="en-US" sz="2200" b="1" dirty="0">
+              <a:rPr lang="en-US" sz="2200" b="1">
                 <a:solidFill>
                   <a:srgbClr val="F6F4EE"/>
                 </a:solidFill>
@@ -3747,7 +4543,7 @@
               </a:rPr>
               <a:t>Many operators, many tickets</a:t>
             </a:r>
-            <a:endParaRPr lang="en-US" sz="2200" dirty="0"/>
+            <a:endParaRPr lang="en-US" sz="2200"/>
           </a:p>
         </p:txBody>
       </p:sp>
@@ -3774,14 +4570,14 @@
           </a:bodyPr>
           <a:lstStyle/>
           <a:p>
-            <a:pPr algn="l" indent="0" marL="0">
+            <a:pPr marL="0" indent="0" algn="l">
               <a:lnSpc>
                 <a:spcPts val="1680"/>
               </a:lnSpc>
               <a:buNone/>
             </a:pPr>
             <a:r>
-              <a:rPr lang="en-US" sz="1200" dirty="0">
+              <a:rPr lang="en-US" sz="1200">
                 <a:solidFill>
                   <a:srgbClr val="C9D3E3"/>
                 </a:solidFill>
@@ -3791,7 +4587,7 @@
               </a:rPr>
               <a:t>A registry where each operator plugs in its ticket contract: single rides, day passes, monthly subscriptions, all gathered in one rider account.</a:t>
             </a:r>
-            <a:endParaRPr lang="en-US" sz="1200" dirty="0"/>
+            <a:endParaRPr lang="en-US" sz="1200"/>
           </a:p>
         </p:txBody>
       </p:sp>
@@ -3845,14 +4641,14 @@
           </a:bodyPr>
           <a:lstStyle/>
           <a:p>
-            <a:pPr algn="l" indent="0" marL="0">
+            <a:pPr marL="0" indent="0" algn="l">
               <a:lnSpc>
                 <a:spcPts val="3080"/>
               </a:lnSpc>
               <a:buNone/>
             </a:pPr>
             <a:r>
-              <a:rPr lang="en-US" sz="2200" b="1" dirty="0">
+              <a:rPr lang="en-US" sz="2200" b="1">
                 <a:solidFill>
                   <a:srgbClr val="F2A541"/>
                 </a:solidFill>
@@ -3862,7 +4658,7 @@
               </a:rPr>
               <a:t>03</a:t>
             </a:r>
-            <a:endParaRPr lang="en-US" sz="2200" dirty="0"/>
+            <a:endParaRPr lang="en-US" sz="2200"/>
           </a:p>
         </p:txBody>
       </p:sp>
@@ -3889,14 +4685,14 @@
           </a:bodyPr>
           <a:lstStyle/>
           <a:p>
-            <a:pPr algn="l" indent="0" marL="0">
+            <a:pPr marL="0" indent="0" algn="l">
               <a:lnSpc>
                 <a:spcPts val="2530"/>
               </a:lnSpc>
               <a:buNone/>
             </a:pPr>
             <a:r>
-              <a:rPr lang="en-US" sz="2200" b="1" dirty="0">
+              <a:rPr lang="en-US" sz="2200" b="1">
                 <a:solidFill>
                   <a:srgbClr val="F6F4EE"/>
                 </a:solidFill>
@@ -3906,7 +4702,7 @@
               </a:rPr>
               <a:t>One interface to issue and validate</a:t>
             </a:r>
-            <a:endParaRPr lang="en-US" sz="2200" dirty="0"/>
+            <a:endParaRPr lang="en-US" sz="2200"/>
           </a:p>
         </p:txBody>
       </p:sp>
@@ -3933,14 +4729,14 @@
           </a:bodyPr>
           <a:lstStyle/>
           <a:p>
-            <a:pPr algn="l" indent="0" marL="0">
+            <a:pPr marL="0" indent="0" algn="l">
               <a:lnSpc>
                 <a:spcPts val="1680"/>
               </a:lnSpc>
               <a:buNone/>
             </a:pPr>
             <a:r>
-              <a:rPr lang="en-US" sz="1200" dirty="0">
+              <a:rPr lang="en-US" sz="1200">
                 <a:solidFill>
                   <a:srgbClr val="C9D3E3"/>
                 </a:solidFill>
@@ -3950,7 +4746,7 @@
               </a:rPr>
               <a:t>A common API and SDK (issue, validate, check) used the same way by every operator, bus validator and conductor app.</a:t>
             </a:r>
-            <a:endParaRPr lang="en-US" sz="1200" dirty="0"/>
+            <a:endParaRPr lang="en-US" sz="1200"/>
           </a:p>
         </p:txBody>
       </p:sp>
@@ -3977,14 +4773,14 @@
           </a:bodyPr>
           <a:lstStyle/>
           <a:p>
-            <a:pPr algn="l" indent="0" marL="0">
+            <a:pPr marL="0" indent="0" algn="l">
               <a:lnSpc>
                 <a:spcPts val="1960"/>
               </a:lnSpc>
               <a:buNone/>
             </a:pPr>
             <a:r>
-              <a:rPr lang="en-US" sz="1400" b="1" dirty="0">
+              <a:rPr lang="en-US" sz="1400" b="1">
                 <a:solidFill>
                   <a:srgbClr val="F6F4EE"/>
                 </a:solidFill>
@@ -3995,7 +4791,7 @@
               <a:t>Also next:</a:t>
             </a:r>
             <a:r>
-              <a:rPr lang="en-US" sz="1400" dirty="0">
+              <a:rPr lang="en-US" sz="1400">
                 <a:solidFill>
                   <a:srgbClr val="C9D3E3"/>
                 </a:solidFill>
@@ -4005,7 +4801,7 @@
               </a:rPr>
               <a:t> a low-fee layer 2 · QR codes with signed messages for offline checks · multisig ownership</a:t>
             </a:r>
-            <a:endParaRPr lang="en-US" sz="1400" dirty="0"/>
+            <a:endParaRPr lang="en-US" sz="1400"/>
           </a:p>
         </p:txBody>
       </p:sp>
@@ -4017,7 +4813,7 @@
 </p:sld>
 </file>
 
-<file path=ppt/slides/slide12.xml><?xml version="1.0" encoding="utf-8"?>
+<file path=ppt/slides/slide14.xml><?xml version="1.0" encoding="utf-8"?>
 <p:sld xmlns:a="http://schemas.openxmlformats.org/drawingml/2006/main" xmlns:r="http://schemas.openxmlformats.org/officeDocument/2006/relationships" xmlns:p="http://schemas.openxmlformats.org/presentationml/2006/main">
   <p:cSld name="Slide 12">
     <p:bg>
@@ -4025,6 +4821,7 @@
         <a:solidFill>
           <a:srgbClr val="F6F4EE"/>
         </a:solidFill>
+        <a:effectLst/>
       </p:bgPr>
     </p:bg>
     <p:spTree>
@@ -4064,14 +4861,14 @@
           </a:bodyPr>
           <a:lstStyle/>
           <a:p>
-            <a:pPr algn="l" indent="0" marL="0">
+            <a:pPr marL="0" indent="0" algn="l">
               <a:lnSpc>
                 <a:spcPts val="1680"/>
               </a:lnSpc>
               <a:buNone/>
             </a:pPr>
             <a:r>
-              <a:rPr lang="en-US" sz="1200" b="1" spc="150" kern="0" dirty="0">
+              <a:rPr lang="en-US" sz="1200" b="1" kern="0" spc="150">
                 <a:solidFill>
                   <a:srgbClr val="B86E12"/>
                 </a:solidFill>
@@ -4081,7 +4878,7 @@
               </a:rPr>
               <a:t>THE VISION</a:t>
             </a:r>
-            <a:endParaRPr lang="en-US" sz="1200" dirty="0"/>
+            <a:endParaRPr lang="en-US" sz="1200"/>
           </a:p>
         </p:txBody>
       </p:sp>
@@ -4108,14 +4905,14 @@
           </a:bodyPr>
           <a:lstStyle/>
           <a:p>
-            <a:pPr algn="l" indent="0" marL="0">
+            <a:pPr marL="0" indent="0" algn="l">
               <a:lnSpc>
                 <a:spcPts val="3960"/>
               </a:lnSpc>
               <a:buNone/>
             </a:pPr>
             <a:r>
-              <a:rPr lang="en-US" sz="3600" b="1" dirty="0">
+              <a:rPr lang="en-US" sz="3600" b="1">
                 <a:solidFill>
                   <a:srgbClr val="14213D"/>
                 </a:solidFill>
@@ -4125,21 +4922,21 @@
               </a:rPr>
               <a:t>The common ticket platform</a:t>
             </a:r>
-            <a:endParaRPr lang="en-US" sz="3600" dirty="0"/>
+            <a:endParaRPr lang="en-US" sz="3600"/>
           </a:p>
         </p:txBody>
       </p:sp>
       <p:pic>
         <p:nvPicPr>
-          <p:cNvPr id="4" name="Image 0" descr="connector">    </p:cNvPr>
+          <p:cNvPr id="4" name="Image 0" descr="connector"/>
           <p:cNvPicPr>
             <a:picLocks noChangeAspect="1"/>
           </p:cNvPicPr>
           <p:nvPr/>
         </p:nvPicPr>
         <p:blipFill>
-          <a:blip r:embed="rId1"/>
-          <a:srcRect l="0" r="0" t="0" b="0"/>
+          <a:blip r:embed="rId3"/>
+          <a:srcRect/>
           <a:stretch/>
         </p:blipFill>
         <p:spPr>
@@ -4154,15 +4951,15 @@
       </p:pic>
       <p:pic>
         <p:nvPicPr>
-          <p:cNvPr id="5" name="Image 1" descr="connector">    </p:cNvPr>
+          <p:cNvPr id="5" name="Image 1" descr="connector"/>
           <p:cNvPicPr>
             <a:picLocks noChangeAspect="1"/>
           </p:cNvPicPr>
           <p:nvPr/>
         </p:nvPicPr>
         <p:blipFill>
-          <a:blip r:embed="rId2"/>
-          <a:srcRect l="0" r="0" t="0" b="0"/>
+          <a:blip r:embed="rId3"/>
+          <a:srcRect/>
           <a:stretch/>
         </p:blipFill>
         <p:spPr>
@@ -4177,7 +4974,7 @@
       </p:pic>
       <p:pic>
         <p:nvPicPr>
-          <p:cNvPr id="6" name="Image 2" descr="connector">    </p:cNvPr>
+          <p:cNvPr id="6" name="Image 2" descr="connector"/>
           <p:cNvPicPr>
             <a:picLocks noChangeAspect="1"/>
           </p:cNvPicPr>
@@ -4185,7 +4982,7 @@
         </p:nvPicPr>
         <p:blipFill>
           <a:blip r:embed="rId3"/>
-          <a:srcRect l="0" r="0" t="0" b="0"/>
+          <a:srcRect/>
           <a:stretch/>
         </p:blipFill>
         <p:spPr>
@@ -4200,7 +4997,7 @@
       </p:pic>
       <p:pic>
         <p:nvPicPr>
-          <p:cNvPr id="7" name="Image 3" descr="connector">    </p:cNvPr>
+          <p:cNvPr id="7" name="Image 3" descr="connector"/>
           <p:cNvPicPr>
             <a:picLocks noChangeAspect="1"/>
           </p:cNvPicPr>
@@ -4208,7 +5005,7 @@
         </p:nvPicPr>
         <p:blipFill>
           <a:blip r:embed="rId4"/>
-          <a:srcRect l="0" r="0" t="0" b="0"/>
+          <a:srcRect/>
           <a:stretch/>
         </p:blipFill>
         <p:spPr>
@@ -4223,7 +5020,7 @@
       </p:pic>
       <p:pic>
         <p:nvPicPr>
-          <p:cNvPr id="8" name="Image 4" descr="connector">    </p:cNvPr>
+          <p:cNvPr id="8" name="Image 4" descr="connector"/>
           <p:cNvPicPr>
             <a:picLocks noChangeAspect="1"/>
           </p:cNvPicPr>
@@ -4231,7 +5028,7 @@
         </p:nvPicPr>
         <p:blipFill>
           <a:blip r:embed="rId5"/>
-          <a:srcRect l="0" r="0" t="0" b="0"/>
+          <a:srcRect/>
           <a:stretch/>
         </p:blipFill>
         <p:spPr>
@@ -4246,15 +5043,15 @@
       </p:pic>
       <p:pic>
         <p:nvPicPr>
-          <p:cNvPr id="9" name="Image 5" descr="connector">    </p:cNvPr>
+          <p:cNvPr id="9" name="Image 5" descr="connector"/>
           <p:cNvPicPr>
             <a:picLocks noChangeAspect="1"/>
           </p:cNvPicPr>
           <p:nvPr/>
         </p:nvPicPr>
         <p:blipFill>
-          <a:blip r:embed="rId6"/>
-          <a:srcRect l="0" r="0" t="0" b="0"/>
+          <a:blip r:embed="rId5"/>
+          <a:srcRect/>
           <a:stretch/>
         </p:blipFill>
         <p:spPr>
@@ -4269,15 +5066,15 @@
       </p:pic>
       <p:pic>
         <p:nvPicPr>
-          <p:cNvPr id="10" name="Image 6" descr="connector">    </p:cNvPr>
+          <p:cNvPr id="10" name="Image 6" descr="connector"/>
           <p:cNvPicPr>
             <a:picLocks noChangeAspect="1"/>
           </p:cNvPicPr>
           <p:nvPr/>
         </p:nvPicPr>
         <p:blipFill>
-          <a:blip r:embed="rId7"/>
-          <a:srcRect l="0" r="0" t="0" b="0"/>
+          <a:blip r:embed="rId6"/>
+          <a:srcRect/>
           <a:stretch/>
         </p:blipFill>
         <p:spPr>
@@ -4340,14 +5137,14 @@
           </a:bodyPr>
           <a:lstStyle/>
           <a:p>
-            <a:pPr algn="l" indent="0" marL="0">
+            <a:pPr marL="0" indent="0" algn="l">
               <a:lnSpc>
                 <a:spcPts val="1920"/>
               </a:lnSpc>
               <a:buNone/>
             </a:pPr>
             <a:r>
-              <a:rPr lang="en-US" sz="1600" b="1" dirty="0">
+              <a:rPr lang="en-US" sz="1600" b="1">
                 <a:solidFill>
                   <a:srgbClr val="14213D"/>
                 </a:solidFill>
@@ -4357,7 +5154,7 @@
               </a:rPr>
               <a:t>Rider app</a:t>
             </a:r>
-            <a:endParaRPr lang="en-US" sz="1600" dirty="0"/>
+            <a:endParaRPr lang="en-US" sz="1600"/>
           </a:p>
         </p:txBody>
       </p:sp>
@@ -4384,14 +5181,14 @@
           </a:bodyPr>
           <a:lstStyle/>
           <a:p>
-            <a:pPr algn="l" indent="0" marL="0">
+            <a:pPr marL="0" indent="0" algn="l">
               <a:lnSpc>
                 <a:spcPts val="1680"/>
               </a:lnSpc>
               <a:buNone/>
             </a:pPr>
             <a:r>
-              <a:rPr lang="en-US" sz="1200" dirty="0">
+              <a:rPr lang="en-US" sz="1200">
                 <a:solidFill>
                   <a:srgbClr val="4A5568"/>
                 </a:solidFill>
@@ -4401,7 +5198,7 @@
               </a:rPr>
               <a:t>all tickets, one account</a:t>
             </a:r>
-            <a:endParaRPr lang="en-US" sz="1200" dirty="0"/>
+            <a:endParaRPr lang="en-US" sz="1200"/>
           </a:p>
         </p:txBody>
       </p:sp>
@@ -4455,14 +5252,14 @@
           </a:bodyPr>
           <a:lstStyle/>
           <a:p>
-            <a:pPr algn="l" indent="0" marL="0">
+            <a:pPr marL="0" indent="0" algn="l">
               <a:lnSpc>
                 <a:spcPts val="1920"/>
               </a:lnSpc>
               <a:buNone/>
             </a:pPr>
             <a:r>
-              <a:rPr lang="en-US" sz="1600" b="1" dirty="0">
+              <a:rPr lang="en-US" sz="1600" b="1">
                 <a:solidFill>
                   <a:srgbClr val="14213D"/>
                 </a:solidFill>
@@ -4472,7 +5269,7 @@
               </a:rPr>
               <a:t>Bus validator</a:t>
             </a:r>
-            <a:endParaRPr lang="en-US" sz="1600" dirty="0"/>
+            <a:endParaRPr lang="en-US" sz="1600"/>
           </a:p>
         </p:txBody>
       </p:sp>
@@ -4499,14 +5296,14 @@
           </a:bodyPr>
           <a:lstStyle/>
           <a:p>
-            <a:pPr algn="l" indent="0" marL="0">
+            <a:pPr marL="0" indent="0" algn="l">
               <a:lnSpc>
                 <a:spcPts val="1680"/>
               </a:lnSpc>
               <a:buNone/>
             </a:pPr>
             <a:r>
-              <a:rPr lang="en-US" sz="1200" dirty="0">
+              <a:rPr lang="en-US" sz="1200">
                 <a:solidFill>
                   <a:srgbClr val="4A5568"/>
                 </a:solidFill>
@@ -4516,7 +5313,7 @@
               </a:rPr>
               <a:t>on board, any operator</a:t>
             </a:r>
-            <a:endParaRPr lang="en-US" sz="1200" dirty="0"/>
+            <a:endParaRPr lang="en-US" sz="1200"/>
           </a:p>
         </p:txBody>
       </p:sp>
@@ -4570,14 +5367,14 @@
           </a:bodyPr>
           <a:lstStyle/>
           <a:p>
-            <a:pPr algn="l" indent="0" marL="0">
+            <a:pPr marL="0" indent="0" algn="l">
               <a:lnSpc>
                 <a:spcPts val="1920"/>
               </a:lnSpc>
               <a:buNone/>
             </a:pPr>
             <a:r>
-              <a:rPr lang="en-US" sz="1600" b="1" dirty="0">
+              <a:rPr lang="en-US" sz="1600" b="1">
                 <a:solidFill>
                   <a:srgbClr val="14213D"/>
                 </a:solidFill>
@@ -4587,7 +5384,7 @@
               </a:rPr>
               <a:t>Conductor app</a:t>
             </a:r>
-            <a:endParaRPr lang="en-US" sz="1600" dirty="0"/>
+            <a:endParaRPr lang="en-US" sz="1600"/>
           </a:p>
         </p:txBody>
       </p:sp>
@@ -4614,14 +5411,14 @@
           </a:bodyPr>
           <a:lstStyle/>
           <a:p>
-            <a:pPr algn="l" indent="0" marL="0">
+            <a:pPr marL="0" indent="0" algn="l">
               <a:lnSpc>
                 <a:spcPts val="1680"/>
               </a:lnSpc>
               <a:buNone/>
             </a:pPr>
             <a:r>
-              <a:rPr lang="en-US" sz="1200" dirty="0">
+              <a:rPr lang="en-US" sz="1200">
                 <a:solidFill>
                   <a:srgbClr val="4A5568"/>
                 </a:solidFill>
@@ -4631,7 +5428,7 @@
               </a:rPr>
               <a:t>read-only checks</a:t>
             </a:r>
-            <a:endParaRPr lang="en-US" sz="1200" dirty="0"/>
+            <a:endParaRPr lang="en-US" sz="1200"/>
           </a:p>
         </p:txBody>
       </p:sp>
@@ -4680,14 +5477,14 @@
           </a:bodyPr>
           <a:lstStyle/>
           <a:p>
-            <a:pPr algn="l" indent="0" marL="0">
+            <a:pPr marL="0" indent="0" algn="l">
               <a:lnSpc>
                 <a:spcPts val="1680"/>
               </a:lnSpc>
               <a:buNone/>
             </a:pPr>
             <a:r>
-              <a:rPr lang="en-US" sz="1200" b="1" spc="100" kern="0" dirty="0">
+              <a:rPr lang="en-US" sz="1200" b="1" kern="0" spc="100">
                 <a:solidFill>
                   <a:srgbClr val="14213D"/>
                 </a:solidFill>
@@ -4697,7 +5494,7 @@
               </a:rPr>
               <a:t>COMMON INTERFACE</a:t>
             </a:r>
-            <a:endParaRPr lang="en-US" sz="1200" dirty="0"/>
+            <a:endParaRPr lang="en-US" sz="1200"/>
           </a:p>
         </p:txBody>
       </p:sp>
@@ -4724,14 +5521,14 @@
           </a:bodyPr>
           <a:lstStyle/>
           <a:p>
-            <a:pPr algn="l" indent="0" marL="0">
+            <a:pPr marL="0" indent="0" algn="l">
               <a:lnSpc>
                 <a:spcPts val="2640"/>
               </a:lnSpc>
               <a:buNone/>
             </a:pPr>
             <a:r>
-              <a:rPr lang="en-US" sz="2200" b="1" dirty="0">
+              <a:rPr lang="en-US" sz="2200" b="1">
                 <a:solidFill>
                   <a:srgbClr val="14213D"/>
                 </a:solidFill>
@@ -4741,7 +5538,7 @@
               </a:rPr>
               <a:t>One API / SDK</a:t>
             </a:r>
-            <a:endParaRPr lang="en-US" sz="2200" dirty="0"/>
+            <a:endParaRPr lang="en-US" sz="2200"/>
           </a:p>
         </p:txBody>
       </p:sp>
@@ -4768,14 +5565,14 @@
           </a:bodyPr>
           <a:lstStyle/>
           <a:p>
-            <a:pPr algn="l" indent="0" marL="0">
+            <a:pPr marL="0" indent="0" algn="l">
               <a:lnSpc>
                 <a:spcPts val="2240"/>
               </a:lnSpc>
               <a:buNone/>
             </a:pPr>
             <a:r>
-              <a:rPr lang="en-US" sz="1400" dirty="0">
+              <a:rPr lang="en-US" sz="1400">
                 <a:solidFill>
                   <a:srgbClr val="14213D"/>
                 </a:solidFill>
@@ -4785,17 +5582,17 @@
               </a:rPr>
               <a:t>issue(type, rider)</a:t>
             </a:r>
-            <a:endParaRPr lang="en-US" sz="1400" dirty="0"/>
-          </a:p>
-          <a:p>
-            <a:pPr algn="l" indent="0" marL="0">
+            <a:endParaRPr lang="en-US" sz="1400"/>
+          </a:p>
+          <a:p>
+            <a:pPr marL="0" indent="0" algn="l">
               <a:lnSpc>
                 <a:spcPts val="2240"/>
               </a:lnSpc>
               <a:buNone/>
             </a:pPr>
             <a:r>
-              <a:rPr lang="en-US" sz="1400" dirty="0">
+              <a:rPr lang="en-US" sz="1400">
                 <a:solidFill>
                   <a:srgbClr val="14213D"/>
                 </a:solidFill>
@@ -4805,17 +5602,17 @@
               </a:rPr>
               <a:t>validate(ticketId)</a:t>
             </a:r>
-            <a:endParaRPr lang="en-US" sz="1400" dirty="0"/>
-          </a:p>
-          <a:p>
-            <a:pPr algn="l" indent="0" marL="0">
+            <a:endParaRPr lang="en-US" sz="1400"/>
+          </a:p>
+          <a:p>
+            <a:pPr marL="0" indent="0" algn="l">
               <a:lnSpc>
                 <a:spcPts val="2240"/>
               </a:lnSpc>
               <a:buNone/>
             </a:pPr>
             <a:r>
-              <a:rPr lang="en-US" sz="1400" dirty="0">
+              <a:rPr lang="en-US" sz="1400">
                 <a:solidFill>
                   <a:srgbClr val="14213D"/>
                 </a:solidFill>
@@ -4825,7 +5622,7 @@
               </a:rPr>
               <a:t>check(ticketId, rider)</a:t>
             </a:r>
-            <a:endParaRPr lang="en-US" sz="1400" dirty="0"/>
+            <a:endParaRPr lang="en-US" sz="1400"/>
           </a:p>
         </p:txBody>
       </p:sp>
@@ -4879,14 +5676,14 @@
           </a:bodyPr>
           <a:lstStyle/>
           <a:p>
-            <a:pPr algn="l" indent="0" marL="0">
+            <a:pPr marL="0" indent="0" algn="l">
               <a:lnSpc>
                 <a:spcPts val="1920"/>
               </a:lnSpc>
               <a:buNone/>
             </a:pPr>
             <a:r>
-              <a:rPr lang="en-US" sz="1600" b="1" dirty="0">
+              <a:rPr lang="en-US" sz="1600" b="1">
                 <a:solidFill>
                   <a:srgbClr val="14213D"/>
                 </a:solidFill>
@@ -4896,7 +5693,7 @@
               </a:rPr>
               <a:t>Off-chain user store</a:t>
             </a:r>
-            <a:endParaRPr lang="en-US" sz="1600" dirty="0"/>
+            <a:endParaRPr lang="en-US" sz="1600"/>
           </a:p>
         </p:txBody>
       </p:sp>
@@ -4923,14 +5720,14 @@
           </a:bodyPr>
           <a:lstStyle/>
           <a:p>
-            <a:pPr algn="l" indent="0" marL="0">
+            <a:pPr marL="0" indent="0" algn="l">
               <a:lnSpc>
                 <a:spcPts val="1680"/>
               </a:lnSpc>
               <a:buNone/>
             </a:pPr>
             <a:r>
-              <a:rPr lang="en-US" sz="1200" dirty="0">
+              <a:rPr lang="en-US" sz="1200">
                 <a:solidFill>
                   <a:srgbClr val="4A5568"/>
                 </a:solidFill>
@@ -4940,7 +5737,7 @@
               </a:rPr>
               <a:t>Name, concessions, subscriptions; encrypted and erasable</a:t>
             </a:r>
-            <a:endParaRPr lang="en-US" sz="1200" dirty="0"/>
+            <a:endParaRPr lang="en-US" sz="1200"/>
           </a:p>
         </p:txBody>
       </p:sp>
@@ -4989,14 +5786,14 @@
           </a:bodyPr>
           <a:lstStyle/>
           <a:p>
-            <a:pPr algn="l" indent="0" marL="0">
+            <a:pPr marL="0" indent="0" algn="l">
               <a:lnSpc>
                 <a:spcPts val="1920"/>
               </a:lnSpc>
               <a:buNone/>
             </a:pPr>
             <a:r>
-              <a:rPr lang="en-US" sz="1600" b="1" dirty="0">
+              <a:rPr lang="en-US" sz="1600" b="1">
                 <a:solidFill>
                   <a:srgbClr val="F6F4EE"/>
                 </a:solidFill>
@@ -5006,7 +5803,7 @@
               </a:rPr>
               <a:t>Ticket registry</a:t>
             </a:r>
-            <a:endParaRPr lang="en-US" sz="1600" dirty="0"/>
+            <a:endParaRPr lang="en-US" sz="1600"/>
           </a:p>
         </p:txBody>
       </p:sp>
@@ -5033,14 +5830,14 @@
           </a:bodyPr>
           <a:lstStyle/>
           <a:p>
-            <a:pPr algn="l" indent="0" marL="0">
+            <a:pPr marL="0" indent="0" algn="l">
               <a:lnSpc>
                 <a:spcPts val="1680"/>
               </a:lnSpc>
               <a:buNone/>
             </a:pPr>
             <a:r>
-              <a:rPr lang="en-US" sz="1200" dirty="0">
+              <a:rPr lang="en-US" sz="1200">
                 <a:solidFill>
                   <a:srgbClr val="C9D3E3"/>
                 </a:solidFill>
@@ -5050,7 +5847,7 @@
               </a:rPr>
               <a:t>operators and ticket types</a:t>
             </a:r>
-            <a:endParaRPr lang="en-US" sz="1200" dirty="0"/>
+            <a:endParaRPr lang="en-US" sz="1200"/>
           </a:p>
         </p:txBody>
       </p:sp>
@@ -5099,14 +5896,14 @@
           </a:bodyPr>
           <a:lstStyle/>
           <a:p>
-            <a:pPr algn="l" indent="0" marL="0">
+            <a:pPr marL="0" indent="0" algn="l">
               <a:lnSpc>
                 <a:spcPts val="1920"/>
               </a:lnSpc>
               <a:buNone/>
             </a:pPr>
             <a:r>
-              <a:rPr lang="en-US" sz="1600" b="1" dirty="0">
+              <a:rPr lang="en-US" sz="1600" b="1">
                 <a:solidFill>
                   <a:srgbClr val="F6F4EE"/>
                 </a:solidFill>
@@ -5116,7 +5913,7 @@
               </a:rPr>
               <a:t>Operator contracts</a:t>
             </a:r>
-            <a:endParaRPr lang="en-US" sz="1600" dirty="0"/>
+            <a:endParaRPr lang="en-US" sz="1600"/>
           </a:p>
         </p:txBody>
       </p:sp>
@@ -5143,14 +5940,14 @@
           </a:bodyPr>
           <a:lstStyle/>
           <a:p>
-            <a:pPr algn="l" indent="0" marL="0">
+            <a:pPr marL="0" indent="0" algn="l">
               <a:lnSpc>
                 <a:spcPts val="1680"/>
               </a:lnSpc>
               <a:buNone/>
             </a:pPr>
             <a:r>
-              <a:rPr lang="en-US" sz="1200" dirty="0">
+              <a:rPr lang="en-US" sz="1200">
                 <a:solidFill>
                   <a:srgbClr val="C9D3E3"/>
                 </a:solidFill>
@@ -5160,7 +5957,7 @@
               </a:rPr>
               <a:t>singles, day passes, monthly</a:t>
             </a:r>
-            <a:endParaRPr lang="en-US" sz="1200" dirty="0"/>
+            <a:endParaRPr lang="en-US" sz="1200"/>
           </a:p>
         </p:txBody>
       </p:sp>
@@ -5209,14 +6006,14 @@
           </a:bodyPr>
           <a:lstStyle/>
           <a:p>
-            <a:pPr algn="l" indent="0" marL="0">
+            <a:pPr marL="0" indent="0" algn="l">
               <a:lnSpc>
                 <a:spcPts val="1920"/>
               </a:lnSpc>
               <a:buNone/>
             </a:pPr>
             <a:r>
-              <a:rPr lang="en-US" sz="1600" b="1" dirty="0">
+              <a:rPr lang="en-US" sz="1600" b="1">
                 <a:solidFill>
                   <a:srgbClr val="F6F4EE"/>
                 </a:solidFill>
@@ -5226,7 +6023,7 @@
               </a:rPr>
               <a:t>Euro stablecoin</a:t>
             </a:r>
-            <a:endParaRPr lang="en-US" sz="1600" dirty="0"/>
+            <a:endParaRPr lang="en-US" sz="1600"/>
           </a:p>
         </p:txBody>
       </p:sp>
@@ -5253,14 +6050,14 @@
           </a:bodyPr>
           <a:lstStyle/>
           <a:p>
-            <a:pPr algn="l" indent="0" marL="0">
+            <a:pPr marL="0" indent="0" algn="l">
               <a:lnSpc>
                 <a:spcPts val="1680"/>
               </a:lnSpc>
               <a:buNone/>
             </a:pPr>
             <a:r>
-              <a:rPr lang="en-US" sz="1200" dirty="0">
+              <a:rPr lang="en-US" sz="1200">
                 <a:solidFill>
                   <a:srgbClr val="C9D3E3"/>
                 </a:solidFill>
@@ -5270,7 +6067,7 @@
               </a:rPr>
               <a:t>settles every payment</a:t>
             </a:r>
-            <a:endParaRPr lang="en-US" sz="1200" dirty="0"/>
+            <a:endParaRPr lang="en-US" sz="1200"/>
           </a:p>
         </p:txBody>
       </p:sp>
@@ -5297,14 +6094,14 @@
           </a:bodyPr>
           <a:lstStyle/>
           <a:p>
-            <a:pPr algn="l" indent="0" marL="0">
+            <a:pPr marL="0" indent="0" algn="l">
               <a:lnSpc>
                 <a:spcPts val="1680"/>
               </a:lnSpc>
               <a:buNone/>
             </a:pPr>
             <a:r>
-              <a:rPr lang="en-US" sz="1200" dirty="0">
+              <a:rPr lang="en-US" sz="1200">
                 <a:solidFill>
                   <a:srgbClr val="4A5568"/>
                 </a:solidFill>
@@ -5314,7 +6111,7 @@
               </a:rPr>
               <a:t>only a hash on chain</a:t>
             </a:r>
-            <a:endParaRPr lang="en-US" sz="1200" dirty="0"/>
+            <a:endParaRPr lang="en-US" sz="1200"/>
           </a:p>
         </p:txBody>
       </p:sp>
@@ -5341,14 +6138,14 @@
           </a:bodyPr>
           <a:lstStyle/>
           <a:p>
-            <a:pPr algn="l" indent="0" marL="0">
+            <a:pPr marL="0" indent="0" algn="l">
               <a:lnSpc>
                 <a:spcPts val="1680"/>
               </a:lnSpc>
               <a:buNone/>
             </a:pPr>
             <a:r>
-              <a:rPr lang="en-US" sz="1200" b="1" dirty="0">
+              <a:rPr lang="en-US" sz="1200" b="1">
                 <a:solidFill>
                   <a:srgbClr val="14213D"/>
                 </a:solidFill>
@@ -5359,7 +6156,7 @@
               <a:t>Dark = on chain, dashed = off chain.</a:t>
             </a:r>
             <a:r>
-              <a:rPr lang="en-US" sz="1200" dirty="0">
+              <a:rPr lang="en-US" sz="1200">
                 <a:solidFill>
                   <a:srgbClr val="4A5568"/>
                 </a:solidFill>
@@ -5369,7 +6166,7 @@
               </a:rPr>
               <a:t> Personal data never leaves the off-chain store.</a:t>
             </a:r>
-            <a:endParaRPr lang="en-US" sz="1200" dirty="0"/>
+            <a:endParaRPr lang="en-US" sz="1200"/>
           </a:p>
         </p:txBody>
       </p:sp>
@@ -5381,7 +6178,7 @@
 </p:sld>
 </file>
 
-<file path=ppt/slides/slide13.xml><?xml version="1.0" encoding="utf-8"?>
+<file path=ppt/slides/slide15.xml><?xml version="1.0" encoding="utf-8"?>
 <p:sld xmlns:a="http://schemas.openxmlformats.org/drawingml/2006/main" xmlns:r="http://schemas.openxmlformats.org/officeDocument/2006/relationships" xmlns:p="http://schemas.openxmlformats.org/presentationml/2006/main">
   <p:cSld name="Slide 13">
     <p:bg>
@@ -5389,6 +6186,7 @@
         <a:solidFill>
           <a:srgbClr val="14213D"/>
         </a:solidFill>
+        <a:effectLst/>
       </p:bgPr>
     </p:bg>
     <p:spTree>
@@ -5428,14 +6226,14 @@
           </a:bodyPr>
           <a:lstStyle/>
           <a:p>
-            <a:pPr algn="l" indent="0" marL="0">
+            <a:pPr marL="0" indent="0" algn="l">
               <a:lnSpc>
                 <a:spcPts val="1680"/>
               </a:lnSpc>
               <a:buNone/>
             </a:pPr>
             <a:r>
-              <a:rPr lang="en-US" sz="1200" b="1" spc="150" kern="0" dirty="0">
+              <a:rPr lang="en-US" sz="1200" b="1" kern="0" spc="150">
                 <a:solidFill>
                   <a:srgbClr val="F2A541"/>
                 </a:solidFill>
@@ -5445,7 +6243,7 @@
               </a:rPr>
               <a:t>IN SHORT</a:t>
             </a:r>
-            <a:endParaRPr lang="en-US" sz="1200" dirty="0"/>
+            <a:endParaRPr lang="en-US" sz="1200"/>
           </a:p>
         </p:txBody>
       </p:sp>
@@ -5495,14 +6293,14 @@
           </a:bodyPr>
           <a:lstStyle/>
           <a:p>
-            <a:pPr algn="l" indent="0" marL="0">
+            <a:pPr marL="0" indent="0" algn="l">
               <a:lnSpc>
                 <a:spcPts val="2640"/>
               </a:lnSpc>
               <a:buNone/>
             </a:pPr>
             <a:r>
-              <a:rPr lang="en-US" sz="2200" b="1" dirty="0">
+              <a:rPr lang="en-US" sz="2200" b="1">
                 <a:solidFill>
                   <a:srgbClr val="F6F4EE"/>
                 </a:solidFill>
@@ -5512,7 +6310,7 @@
               </a:rPr>
               <a:t>A shared ledger no operator owns</a:t>
             </a:r>
-            <a:endParaRPr lang="en-US" sz="2200" dirty="0"/>
+            <a:endParaRPr lang="en-US" sz="2200"/>
           </a:p>
         </p:txBody>
       </p:sp>
@@ -5562,14 +6360,14 @@
           </a:bodyPr>
           <a:lstStyle/>
           <a:p>
-            <a:pPr algn="l" indent="0" marL="0">
+            <a:pPr marL="0" indent="0" algn="l">
               <a:lnSpc>
                 <a:spcPts val="2640"/>
               </a:lnSpc>
               <a:buNone/>
             </a:pPr>
             <a:r>
-              <a:rPr lang="en-US" sz="2200" b="1" dirty="0">
+              <a:rPr lang="en-US" sz="2200" b="1">
                 <a:solidFill>
                   <a:srgbClr val="F6F4EE"/>
                 </a:solidFill>
@@ -5579,7 +6377,7 @@
               </a:rPr>
               <a:t>Ticket rules enforced in code</a:t>
             </a:r>
-            <a:endParaRPr lang="en-US" sz="2200" dirty="0"/>
+            <a:endParaRPr lang="en-US" sz="2200"/>
           </a:p>
         </p:txBody>
       </p:sp>
@@ -5629,14 +6427,14 @@
           </a:bodyPr>
           <a:lstStyle/>
           <a:p>
-            <a:pPr algn="l" indent="0" marL="0">
+            <a:pPr marL="0" indent="0" algn="l">
               <a:lnSpc>
                 <a:spcPts val="2640"/>
               </a:lnSpc>
               <a:buNone/>
             </a:pPr>
             <a:r>
-              <a:rPr lang="en-US" sz="2200" b="1" dirty="0">
+              <a:rPr lang="en-US" sz="2200" b="1">
                 <a:solidFill>
                   <a:srgbClr val="F6F4EE"/>
                 </a:solidFill>
@@ -5646,7 +6444,7 @@
               </a:rPr>
               <a:t>Free checks for any conductor</a:t>
             </a:r>
-            <a:endParaRPr lang="en-US" sz="2200" dirty="0"/>
+            <a:endParaRPr lang="en-US" sz="2200"/>
           </a:p>
         </p:txBody>
       </p:sp>
@@ -5673,14 +6471,14 @@
           </a:bodyPr>
           <a:lstStyle/>
           <a:p>
-            <a:pPr algn="l" indent="0" marL="0">
+            <a:pPr marL="0" indent="0" algn="l">
               <a:lnSpc>
                 <a:spcPts val="6300"/>
               </a:lnSpc>
               <a:buNone/>
             </a:pPr>
             <a:r>
-              <a:rPr lang="en-US" sz="6000" b="1" dirty="0">
+              <a:rPr lang="en-US" sz="6000" b="1">
                 <a:solidFill>
                   <a:srgbClr val="F6F4EE"/>
                 </a:solidFill>
@@ -5691,7 +6489,7 @@
               <a:t>Thank you. </a:t>
             </a:r>
             <a:r>
-              <a:rPr lang="en-US" sz="6000" b="1" dirty="0">
+              <a:rPr lang="en-US" sz="6000" b="1">
                 <a:solidFill>
                   <a:srgbClr val="F2A541"/>
                 </a:solidFill>
@@ -5701,7 +6499,7 @@
               </a:rPr>
               <a:t>Questions?</a:t>
             </a:r>
-            <a:endParaRPr lang="en-US" sz="6000" dirty="0"/>
+            <a:endParaRPr lang="en-US" sz="6000"/>
           </a:p>
         </p:txBody>
       </p:sp>
@@ -5721,6 +6519,7 @@
         <a:solidFill>
           <a:srgbClr val="F6F4EE"/>
         </a:solidFill>
+        <a:effectLst/>
       </p:bgPr>
     </p:bg>
     <p:spTree>
@@ -5760,14 +6559,14 @@
           </a:bodyPr>
           <a:lstStyle/>
           <a:p>
-            <a:pPr algn="l" indent="0" marL="0">
+            <a:pPr marL="0" indent="0" algn="l">
               <a:lnSpc>
                 <a:spcPts val="1680"/>
               </a:lnSpc>
               <a:buNone/>
             </a:pPr>
             <a:r>
-              <a:rPr lang="en-US" sz="1200" b="1" spc="150" kern="0" dirty="0">
+              <a:rPr lang="en-US" sz="1200" b="1" kern="0" spc="150">
                 <a:solidFill>
                   <a:srgbClr val="B86E12"/>
                 </a:solidFill>
@@ -5777,7 +6576,7 @@
               </a:rPr>
               <a:t>THE PROBLEM</a:t>
             </a:r>
-            <a:endParaRPr lang="en-US" sz="1200" dirty="0"/>
+            <a:endParaRPr lang="en-US" sz="1200"/>
           </a:p>
         </p:txBody>
       </p:sp>
@@ -5804,14 +6603,14 @@
           </a:bodyPr>
           <a:lstStyle/>
           <a:p>
-            <a:pPr algn="l" indent="0" marL="0">
+            <a:pPr marL="0" indent="0" algn="l">
               <a:lnSpc>
                 <a:spcPts val="3960"/>
               </a:lnSpc>
               <a:buNone/>
             </a:pPr>
             <a:r>
-              <a:rPr lang="en-US" sz="3600" b="1" dirty="0">
+              <a:rPr lang="en-US" sz="3600" b="1">
                 <a:solidFill>
                   <a:srgbClr val="14213D"/>
                 </a:solidFill>
@@ -5821,7 +6620,7 @@
               </a:rPr>
               <a:t>Bus tickets are fragmented</a:t>
             </a:r>
-            <a:endParaRPr lang="en-US" sz="3600" dirty="0"/>
+            <a:endParaRPr lang="en-US" sz="3600"/>
           </a:p>
         </p:txBody>
       </p:sp>
@@ -5854,15 +6653,15 @@
       </p:sp>
       <p:pic>
         <p:nvPicPr>
-          <p:cNvPr id="5" name="Image 0" descr="Settings">    </p:cNvPr>
+          <p:cNvPr id="5" name="Image 0" descr="Settings"/>
           <p:cNvPicPr>
             <a:picLocks noChangeAspect="1"/>
           </p:cNvPicPr>
           <p:nvPr/>
         </p:nvPicPr>
         <p:blipFill>
-          <a:blip r:embed="rId1"/>
-          <a:srcRect l="0" r="0" t="0" b="0"/>
+          <a:blip r:embed="rId3"/>
+          <a:srcRect/>
           <a:stretch/>
         </p:blipFill>
         <p:spPr>
@@ -5898,14 +6697,14 @@
           </a:bodyPr>
           <a:lstStyle/>
           <a:p>
-            <a:pPr algn="l" indent="0" marL="0">
+            <a:pPr marL="0" indent="0" algn="l">
               <a:lnSpc>
                 <a:spcPts val="2530"/>
               </a:lnSpc>
               <a:buNone/>
             </a:pPr>
             <a:r>
-              <a:rPr lang="en-US" sz="2200" b="1" dirty="0">
+              <a:rPr lang="en-US" sz="2200" b="1">
                 <a:solidFill>
                   <a:srgbClr val="14213D"/>
                 </a:solidFill>
@@ -5915,7 +6714,7 @@
               </a:rPr>
               <a:t>Every operator, its own system</a:t>
             </a:r>
-            <a:endParaRPr lang="en-US" sz="2200" dirty="0"/>
+            <a:endParaRPr lang="en-US" sz="2200"/>
           </a:p>
         </p:txBody>
       </p:sp>
@@ -5942,14 +6741,14 @@
           </a:bodyPr>
           <a:lstStyle/>
           <a:p>
-            <a:pPr algn="l" indent="0" marL="0">
+            <a:pPr marL="0" indent="0" algn="l">
               <a:lnSpc>
                 <a:spcPts val="2240"/>
               </a:lnSpc>
               <a:buNone/>
             </a:pPr>
             <a:r>
-              <a:rPr lang="en-US" sz="1600" dirty="0">
+              <a:rPr lang="en-US" sz="1600">
                 <a:solidFill>
                   <a:srgbClr val="4A5568"/>
                 </a:solidFill>
@@ -5959,7 +6758,7 @@
               </a:rPr>
               <a:t>Paper tickets, separate apps and validators that don’t talk to each other.</a:t>
             </a:r>
-            <a:endParaRPr lang="en-US" sz="1600" dirty="0"/>
+            <a:endParaRPr lang="en-US" sz="1600"/>
           </a:p>
         </p:txBody>
       </p:sp>
@@ -5992,15 +6791,15 @@
       </p:sp>
       <p:pic>
         <p:nvPicPr>
-          <p:cNvPr id="9" name="Image 1" descr="Warning">    </p:cNvPr>
+          <p:cNvPr id="9" name="Image 1" descr="Warning"/>
           <p:cNvPicPr>
             <a:picLocks noChangeAspect="1"/>
           </p:cNvPicPr>
           <p:nvPr/>
         </p:nvPicPr>
         <p:blipFill>
-          <a:blip r:embed="rId2"/>
-          <a:srcRect l="0" r="0" t="0" b="0"/>
+          <a:blip r:embed="rId4"/>
+          <a:srcRect/>
           <a:stretch/>
         </p:blipFill>
         <p:spPr>
@@ -6036,14 +6835,14 @@
           </a:bodyPr>
           <a:lstStyle/>
           <a:p>
-            <a:pPr algn="l" indent="0" marL="0">
+            <a:pPr marL="0" indent="0" algn="l">
               <a:lnSpc>
                 <a:spcPts val="2530"/>
               </a:lnSpc>
               <a:buNone/>
             </a:pPr>
             <a:r>
-              <a:rPr lang="en-US" sz="2200" b="1" dirty="0">
+              <a:rPr lang="en-US" sz="2200" b="1">
                 <a:solidFill>
                   <a:srgbClr val="14213D"/>
                 </a:solidFill>
@@ -6053,7 +6852,7 @@
               </a:rPr>
               <a:t>Hard to verify</a:t>
             </a:r>
-            <a:endParaRPr lang="en-US" sz="2200" dirty="0"/>
+            <a:endParaRPr lang="en-US" sz="2200"/>
           </a:p>
         </p:txBody>
       </p:sp>
@@ -6080,14 +6879,14 @@
           </a:bodyPr>
           <a:lstStyle/>
           <a:p>
-            <a:pPr algn="l" indent="0" marL="0">
+            <a:pPr marL="0" indent="0" algn="l">
               <a:lnSpc>
                 <a:spcPts val="2240"/>
               </a:lnSpc>
               <a:buNone/>
             </a:pPr>
             <a:r>
-              <a:rPr lang="en-US" sz="1600" dirty="0">
+              <a:rPr lang="en-US" sz="1600">
                 <a:solidFill>
                   <a:srgbClr val="4A5568"/>
                 </a:solidFill>
@@ -6097,7 +6896,7 @@
               </a:rPr>
               <a:t>A conductor can only check their own operator’s tickets. Paper is easy to copy or reuse.</a:t>
             </a:r>
-            <a:endParaRPr lang="en-US" sz="1600" dirty="0"/>
+            <a:endParaRPr lang="en-US" sz="1600"/>
           </a:p>
         </p:txBody>
       </p:sp>
@@ -6130,15 +6929,15 @@
       </p:sp>
       <p:pic>
         <p:nvPicPr>
-          <p:cNvPr id="13" name="Image 2" descr="Database">    </p:cNvPr>
+          <p:cNvPr id="13" name="Image 2" descr="Database"/>
           <p:cNvPicPr>
             <a:picLocks noChangeAspect="1"/>
           </p:cNvPicPr>
           <p:nvPr/>
         </p:nvPicPr>
         <p:blipFill>
-          <a:blip r:embed="rId3"/>
-          <a:srcRect l="0" r="0" t="0" b="0"/>
+          <a:blip r:embed="rId5"/>
+          <a:srcRect/>
           <a:stretch/>
         </p:blipFill>
         <p:spPr>
@@ -6174,14 +6973,14 @@
           </a:bodyPr>
           <a:lstStyle/>
           <a:p>
-            <a:pPr algn="l" indent="0" marL="0">
+            <a:pPr marL="0" indent="0" algn="l">
               <a:lnSpc>
                 <a:spcPts val="2530"/>
               </a:lnSpc>
               <a:buNone/>
             </a:pPr>
             <a:r>
-              <a:rPr lang="en-US" sz="2200" b="1" dirty="0">
+              <a:rPr lang="en-US" sz="2200" b="1">
                 <a:solidFill>
                   <a:srgbClr val="14213D"/>
                 </a:solidFill>
@@ -6191,7 +6990,7 @@
               </a:rPr>
               <a:t>No shared source of truth</a:t>
             </a:r>
-            <a:endParaRPr lang="en-US" sz="2200" dirty="0"/>
+            <a:endParaRPr lang="en-US" sz="2200"/>
           </a:p>
         </p:txBody>
       </p:sp>
@@ -6218,14 +7017,14 @@
           </a:bodyPr>
           <a:lstStyle/>
           <a:p>
-            <a:pPr algn="l" indent="0" marL="0">
+            <a:pPr marL="0" indent="0" algn="l">
               <a:lnSpc>
                 <a:spcPts val="2240"/>
               </a:lnSpc>
               <a:buNone/>
             </a:pPr>
             <a:r>
-              <a:rPr lang="en-US" sz="1600" dirty="0">
+              <a:rPr lang="en-US" sz="1600">
                 <a:solidFill>
                   <a:srgbClr val="4A5568"/>
                 </a:solidFill>
@@ -6235,7 +7034,7 @@
               </a:rPr>
               <a:t>Sales and validations sit in private databases that nobody can audit independently.</a:t>
             </a:r>
-            <a:endParaRPr lang="en-US" sz="1600" dirty="0"/>
+            <a:endParaRPr lang="en-US" sz="1600"/>
           </a:p>
         </p:txBody>
       </p:sp>
@@ -6262,14 +7061,14 @@
           </a:bodyPr>
           <a:lstStyle/>
           <a:p>
-            <a:pPr algn="l" indent="0" marL="0">
+            <a:pPr marL="0" indent="0" algn="l">
               <a:lnSpc>
                 <a:spcPts val="2240"/>
               </a:lnSpc>
               <a:buNone/>
             </a:pPr>
             <a:r>
-              <a:rPr lang="en-US" sz="1600" dirty="0">
+              <a:rPr lang="en-US" sz="1600">
                 <a:solidFill>
                   <a:srgbClr val="14213D"/>
                 </a:solidFill>
@@ -6280,7 +7079,7 @@
               <a:t>For a rider: </a:t>
             </a:r>
             <a:r>
-              <a:rPr lang="en-US" sz="1600" b="1" dirty="0">
+              <a:rPr lang="en-US" sz="1600" b="1">
                 <a:solidFill>
                   <a:srgbClr val="14213D"/>
                 </a:solidFill>
@@ -6290,7 +7089,7 @@
               </a:rPr>
               <a:t>a different ticket, app and payment method for every bus.</a:t>
             </a:r>
-            <a:endParaRPr lang="en-US" sz="1600" dirty="0"/>
+            <a:endParaRPr lang="en-US" sz="1600"/>
           </a:p>
         </p:txBody>
       </p:sp>
@@ -6310,6 +7109,7 @@
         <a:solidFill>
           <a:srgbClr val="F2A541"/>
         </a:solidFill>
+        <a:effectLst/>
       </p:bgPr>
     </p:bg>
     <p:spTree>
@@ -6349,14 +7149,14 @@
           </a:bodyPr>
           <a:lstStyle/>
           <a:p>
-            <a:pPr algn="l" indent="0" marL="0">
+            <a:pPr marL="0" indent="0" algn="l">
               <a:lnSpc>
                 <a:spcPts val="1680"/>
               </a:lnSpc>
               <a:buNone/>
             </a:pPr>
             <a:r>
-              <a:rPr lang="en-US" sz="1200" b="1" spc="150" kern="0" dirty="0">
+              <a:rPr lang="en-US" sz="1200" b="1" kern="0" spc="150">
                 <a:solidFill>
                   <a:srgbClr val="14213D"/>
                 </a:solidFill>
@@ -6366,7 +7166,7 @@
               </a:rPr>
               <a:t>THE GOAL</a:t>
             </a:r>
-            <a:endParaRPr lang="en-US" sz="1200" dirty="0"/>
+            <a:endParaRPr lang="en-US" sz="1200"/>
           </a:p>
         </p:txBody>
       </p:sp>
@@ -6393,14 +7193,14 @@
           </a:bodyPr>
           <a:lstStyle/>
           <a:p>
-            <a:pPr algn="l" indent="0" marL="0">
+            <a:pPr marL="0" indent="0" algn="l">
               <a:lnSpc>
                 <a:spcPts val="6300"/>
               </a:lnSpc>
               <a:buNone/>
             </a:pPr>
             <a:r>
-              <a:rPr lang="en-US" sz="6000" b="1" dirty="0">
+              <a:rPr lang="en-US" sz="6000" b="1">
                 <a:solidFill>
                   <a:srgbClr val="14213D"/>
                 </a:solidFill>
@@ -6410,7 +7210,7 @@
               </a:rPr>
               <a:t>One common platform for all bus tickets</a:t>
             </a:r>
-            <a:endParaRPr lang="en-US" sz="6000" dirty="0"/>
+            <a:endParaRPr lang="en-US" sz="6000"/>
           </a:p>
         </p:txBody>
       </p:sp>
@@ -6460,14 +7260,14 @@
           </a:bodyPr>
           <a:lstStyle/>
           <a:p>
-            <a:pPr algn="l" indent="0" marL="0">
+            <a:pPr marL="0" indent="0" algn="l">
               <a:lnSpc>
                 <a:spcPts val="2240"/>
               </a:lnSpc>
               <a:buNone/>
             </a:pPr>
             <a:r>
-              <a:rPr lang="en-US" sz="1600" dirty="0">
+              <a:rPr lang="en-US" sz="1600">
                 <a:solidFill>
                   <a:srgbClr val="14213D"/>
                 </a:solidFill>
@@ -6478,7 +7278,7 @@
               <a:t>Any </a:t>
             </a:r>
             <a:r>
-              <a:rPr lang="en-US" sz="1600" b="1" dirty="0">
+              <a:rPr lang="en-US" sz="1600" b="1">
                 <a:solidFill>
                   <a:srgbClr val="14213D"/>
                 </a:solidFill>
@@ -6489,7 +7289,7 @@
               <a:t>operator</a:t>
             </a:r>
             <a:r>
-              <a:rPr lang="en-US" sz="1600" dirty="0">
+              <a:rPr lang="en-US" sz="1600">
                 <a:solidFill>
                   <a:srgbClr val="14213D"/>
                 </a:solidFill>
@@ -6499,7 +7299,7 @@
               </a:rPr>
               <a:t> issues tickets on it</a:t>
             </a:r>
-            <a:endParaRPr lang="en-US" sz="1600" dirty="0"/>
+            <a:endParaRPr lang="en-US" sz="1600"/>
           </a:p>
         </p:txBody>
       </p:sp>
@@ -6549,14 +7349,14 @@
           </a:bodyPr>
           <a:lstStyle/>
           <a:p>
-            <a:pPr algn="l" indent="0" marL="0">
+            <a:pPr marL="0" indent="0" algn="l">
               <a:lnSpc>
                 <a:spcPts val="2240"/>
               </a:lnSpc>
               <a:buNone/>
             </a:pPr>
             <a:r>
-              <a:rPr lang="en-US" sz="1600" dirty="0">
+              <a:rPr lang="en-US" sz="1600">
                 <a:solidFill>
                   <a:srgbClr val="14213D"/>
                 </a:solidFill>
@@ -6567,7 +7367,7 @@
               <a:t>Any </a:t>
             </a:r>
             <a:r>
-              <a:rPr lang="en-US" sz="1600" b="1" dirty="0">
+              <a:rPr lang="en-US" sz="1600" b="1">
                 <a:solidFill>
                   <a:srgbClr val="14213D"/>
                 </a:solidFill>
@@ -6578,7 +7378,7 @@
               <a:t>rider</a:t>
             </a:r>
             <a:r>
-              <a:rPr lang="en-US" sz="1600" dirty="0">
+              <a:rPr lang="en-US" sz="1600">
                 <a:solidFill>
                   <a:srgbClr val="14213D"/>
                 </a:solidFill>
@@ -6588,7 +7388,7 @@
               </a:rPr>
               <a:t> keeps them in one wallet</a:t>
             </a:r>
-            <a:endParaRPr lang="en-US" sz="1600" dirty="0"/>
+            <a:endParaRPr lang="en-US" sz="1600"/>
           </a:p>
         </p:txBody>
       </p:sp>
@@ -6638,14 +7438,14 @@
           </a:bodyPr>
           <a:lstStyle/>
           <a:p>
-            <a:pPr algn="l" indent="0" marL="0">
+            <a:pPr marL="0" indent="0" algn="l">
               <a:lnSpc>
                 <a:spcPts val="2240"/>
               </a:lnSpc>
               <a:buNone/>
             </a:pPr>
             <a:r>
-              <a:rPr lang="en-US" sz="1600" dirty="0">
+              <a:rPr lang="en-US" sz="1600">
                 <a:solidFill>
                   <a:srgbClr val="14213D"/>
                 </a:solidFill>
@@ -6656,7 +7456,7 @@
               <a:t>Any </a:t>
             </a:r>
             <a:r>
-              <a:rPr lang="en-US" sz="1600" b="1" dirty="0">
+              <a:rPr lang="en-US" sz="1600" b="1">
                 <a:solidFill>
                   <a:srgbClr val="14213D"/>
                 </a:solidFill>
@@ -6667,7 +7467,7 @@
               <a:t>conductor</a:t>
             </a:r>
             <a:r>
-              <a:rPr lang="en-US" sz="1600" dirty="0">
+              <a:rPr lang="en-US" sz="1600">
                 <a:solidFill>
                   <a:srgbClr val="14213D"/>
                 </a:solidFill>
@@ -6677,7 +7477,7 @@
               </a:rPr>
               <a:t> can check them</a:t>
             </a:r>
-            <a:endParaRPr lang="en-US" sz="1600" dirty="0"/>
+            <a:endParaRPr lang="en-US" sz="1600"/>
           </a:p>
         </p:txBody>
       </p:sp>
@@ -6697,6 +7497,7 @@
         <a:solidFill>
           <a:srgbClr val="F6F4EE"/>
         </a:solidFill>
+        <a:effectLst/>
       </p:bgPr>
     </p:bg>
     <p:spTree>
@@ -6736,14 +7537,14 @@
           </a:bodyPr>
           <a:lstStyle/>
           <a:p>
-            <a:pPr algn="l" indent="0" marL="0">
+            <a:pPr marL="0" indent="0" algn="l">
               <a:lnSpc>
                 <a:spcPts val="1680"/>
               </a:lnSpc>
               <a:buNone/>
             </a:pPr>
             <a:r>
-              <a:rPr lang="en-US" sz="1200" b="1" spc="150" kern="0" dirty="0">
+              <a:rPr lang="en-US" sz="1200" b="1" kern="0" spc="150">
                 <a:solidFill>
                   <a:srgbClr val="B86E12"/>
                 </a:solidFill>
@@ -6753,7 +7554,7 @@
               </a:rPr>
               <a:t>WHY A BLOCKCHAIN</a:t>
             </a:r>
-            <a:endParaRPr lang="en-US" sz="1200" dirty="0"/>
+            <a:endParaRPr lang="en-US" sz="1200"/>
           </a:p>
         </p:txBody>
       </p:sp>
@@ -6780,14 +7581,14 @@
           </a:bodyPr>
           <a:lstStyle/>
           <a:p>
-            <a:pPr algn="l" indent="0" marL="0">
+            <a:pPr marL="0" indent="0" algn="l">
               <a:lnSpc>
                 <a:spcPts val="3960"/>
               </a:lnSpc>
               <a:buNone/>
             </a:pPr>
             <a:r>
-              <a:rPr lang="en-US" sz="3600" b="1" dirty="0">
+              <a:rPr lang="en-US" sz="3600" b="1">
                 <a:solidFill>
                   <a:srgbClr val="14213D"/>
                 </a:solidFill>
@@ -6797,7 +7598,7 @@
               </a:rPr>
               <a:t>A ledger no single operator owns</a:t>
             </a:r>
-            <a:endParaRPr lang="en-US" sz="3600" dirty="0"/>
+            <a:endParaRPr lang="en-US" sz="3600"/>
           </a:p>
         </p:txBody>
       </p:sp>
@@ -6830,15 +7631,15 @@
       </p:sp>
       <p:pic>
         <p:nvPicPr>
-          <p:cNvPr id="5" name="Image 0" descr="Trust">    </p:cNvPr>
+          <p:cNvPr id="5" name="Image 0" descr="Trust"/>
           <p:cNvPicPr>
             <a:picLocks noChangeAspect="1"/>
           </p:cNvPicPr>
           <p:nvPr/>
         </p:nvPicPr>
         <p:blipFill>
-          <a:blip r:embed="rId1"/>
-          <a:srcRect l="0" r="0" t="0" b="0"/>
+          <a:blip r:embed="rId3"/>
+          <a:srcRect/>
           <a:stretch/>
         </p:blipFill>
         <p:spPr>
@@ -6874,14 +7675,14 @@
           </a:bodyPr>
           <a:lstStyle/>
           <a:p>
-            <a:pPr algn="l" indent="0" marL="0">
+            <a:pPr marL="0" indent="0" algn="l">
               <a:lnSpc>
                 <a:spcPts val="2640"/>
               </a:lnSpc>
               <a:buNone/>
             </a:pPr>
             <a:r>
-              <a:rPr lang="en-US" sz="2200" b="1" dirty="0">
+              <a:rPr lang="en-US" sz="2200" b="1">
                 <a:solidFill>
                   <a:srgbClr val="14213D"/>
                 </a:solidFill>
@@ -6891,7 +7692,7 @@
               </a:rPr>
               <a:t>Neutral and shared</a:t>
             </a:r>
-            <a:endParaRPr lang="en-US" sz="2200" dirty="0"/>
+            <a:endParaRPr lang="en-US" sz="2200"/>
           </a:p>
         </p:txBody>
       </p:sp>
@@ -6918,14 +7719,14 @@
           </a:bodyPr>
           <a:lstStyle/>
           <a:p>
-            <a:pPr algn="l" indent="0" marL="0">
+            <a:pPr marL="0" indent="0" algn="l">
               <a:lnSpc>
                 <a:spcPts val="2240"/>
               </a:lnSpc>
               <a:buNone/>
             </a:pPr>
             <a:r>
-              <a:rPr lang="en-US" sz="1600" dirty="0">
+              <a:rPr lang="en-US" sz="1600">
                 <a:solidFill>
                   <a:srgbClr val="4A5568"/>
                 </a:solidFill>
@@ -6935,7 +7736,7 @@
               </a:rPr>
               <a:t>All operators and conductors read the same state.</a:t>
             </a:r>
-            <a:endParaRPr lang="en-US" sz="1600" dirty="0"/>
+            <a:endParaRPr lang="en-US" sz="1600"/>
           </a:p>
         </p:txBody>
       </p:sp>
@@ -6968,15 +7769,15 @@
       </p:sp>
       <p:pic>
         <p:nvPicPr>
-          <p:cNvPr id="9" name="Image 1" descr="Lock">    </p:cNvPr>
+          <p:cNvPr id="9" name="Image 1" descr="Lock"/>
           <p:cNvPicPr>
             <a:picLocks noChangeAspect="1"/>
           </p:cNvPicPr>
           <p:nvPr/>
         </p:nvPicPr>
         <p:blipFill>
-          <a:blip r:embed="rId2"/>
-          <a:srcRect l="0" r="0" t="0" b="0"/>
+          <a:blip r:embed="rId4"/>
+          <a:srcRect/>
           <a:stretch/>
         </p:blipFill>
         <p:spPr>
@@ -7012,14 +7813,14 @@
           </a:bodyPr>
           <a:lstStyle/>
           <a:p>
-            <a:pPr algn="l" indent="0" marL="0">
+            <a:pPr marL="0" indent="0" algn="l">
               <a:lnSpc>
                 <a:spcPts val="2640"/>
               </a:lnSpc>
               <a:buNone/>
             </a:pPr>
             <a:r>
-              <a:rPr lang="en-US" sz="2200" b="1" dirty="0">
+              <a:rPr lang="en-US" sz="2200" b="1">
                 <a:solidFill>
                   <a:srgbClr val="14213D"/>
                 </a:solidFill>
@@ -7029,7 +7830,7 @@
               </a:rPr>
               <a:t>Tamper-evident</a:t>
             </a:r>
-            <a:endParaRPr lang="en-US" sz="2200" dirty="0"/>
+            <a:endParaRPr lang="en-US" sz="2200"/>
           </a:p>
         </p:txBody>
       </p:sp>
@@ -7056,14 +7857,14 @@
           </a:bodyPr>
           <a:lstStyle/>
           <a:p>
-            <a:pPr algn="l" indent="0" marL="0">
+            <a:pPr marL="0" indent="0" algn="l">
               <a:lnSpc>
                 <a:spcPts val="2240"/>
               </a:lnSpc>
               <a:buNone/>
             </a:pPr>
             <a:r>
-              <a:rPr lang="en-US" sz="1600" dirty="0">
+              <a:rPr lang="en-US" sz="1600">
                 <a:solidFill>
                   <a:srgbClr val="4A5568"/>
                 </a:solidFill>
@@ -7073,7 +7874,7 @@
               </a:rPr>
               <a:t>A recorded validation can’t be edited or deleted.</a:t>
             </a:r>
-            <a:endParaRPr lang="en-US" sz="1600" dirty="0"/>
+            <a:endParaRPr lang="en-US" sz="1600"/>
           </a:p>
         </p:txBody>
       </p:sp>
@@ -7106,15 +7907,15 @@
       </p:sp>
       <p:pic>
         <p:nvPicPr>
-          <p:cNvPr id="13" name="Image 2" descr="Code">    </p:cNvPr>
+          <p:cNvPr id="13" name="Image 2" descr="Code"/>
           <p:cNvPicPr>
             <a:picLocks noChangeAspect="1"/>
           </p:cNvPicPr>
           <p:nvPr/>
         </p:nvPicPr>
         <p:blipFill>
-          <a:blip r:embed="rId3"/>
-          <a:srcRect l="0" r="0" t="0" b="0"/>
+          <a:blip r:embed="rId5"/>
+          <a:srcRect/>
           <a:stretch/>
         </p:blipFill>
         <p:spPr>
@@ -7150,14 +7951,14 @@
           </a:bodyPr>
           <a:lstStyle/>
           <a:p>
-            <a:pPr algn="l" indent="0" marL="0">
+            <a:pPr marL="0" indent="0" algn="l">
               <a:lnSpc>
                 <a:spcPts val="2640"/>
               </a:lnSpc>
               <a:buNone/>
             </a:pPr>
             <a:r>
-              <a:rPr lang="en-US" sz="2200" b="1" dirty="0">
+              <a:rPr lang="en-US" sz="2200" b="1">
                 <a:solidFill>
                   <a:srgbClr val="14213D"/>
                 </a:solidFill>
@@ -7167,7 +7968,7 @@
               </a:rPr>
               <a:t>Rules as code</a:t>
             </a:r>
-            <a:endParaRPr lang="en-US" sz="2200" dirty="0"/>
+            <a:endParaRPr lang="en-US" sz="2200"/>
           </a:p>
         </p:txBody>
       </p:sp>
@@ -7194,14 +7995,14 @@
           </a:bodyPr>
           <a:lstStyle/>
           <a:p>
-            <a:pPr algn="l" indent="0" marL="0">
+            <a:pPr marL="0" indent="0" algn="l">
               <a:lnSpc>
                 <a:spcPts val="2240"/>
               </a:lnSpc>
               <a:buNone/>
             </a:pPr>
             <a:r>
-              <a:rPr lang="en-US" sz="1600" dirty="0">
+              <a:rPr lang="en-US" sz="1600">
                 <a:solidFill>
                   <a:srgbClr val="4A5568"/>
                 </a:solidFill>
@@ -7211,7 +8012,7 @@
               </a:rPr>
               <a:t>The smart contract applies ticket rules the same way for everyone.</a:t>
             </a:r>
-            <a:endParaRPr lang="en-US" sz="1600" dirty="0"/>
+            <a:endParaRPr lang="en-US" sz="1600"/>
           </a:p>
         </p:txBody>
       </p:sp>
@@ -7244,15 +8045,15 @@
       </p:sp>
       <p:pic>
         <p:nvPicPr>
-          <p:cNvPr id="17" name="Image 3" descr="Search">    </p:cNvPr>
+          <p:cNvPr id="17" name="Image 3" descr="Search"/>
           <p:cNvPicPr>
             <a:picLocks noChangeAspect="1"/>
           </p:cNvPicPr>
           <p:nvPr/>
         </p:nvPicPr>
         <p:blipFill>
-          <a:blip r:embed="rId4"/>
-          <a:srcRect l="0" r="0" t="0" b="0"/>
+          <a:blip r:embed="rId6"/>
+          <a:srcRect/>
           <a:stretch/>
         </p:blipFill>
         <p:spPr>
@@ -7288,14 +8089,14 @@
           </a:bodyPr>
           <a:lstStyle/>
           <a:p>
-            <a:pPr algn="l" indent="0" marL="0">
+            <a:pPr marL="0" indent="0" algn="l">
               <a:lnSpc>
                 <a:spcPts val="2640"/>
               </a:lnSpc>
               <a:buNone/>
             </a:pPr>
             <a:r>
-              <a:rPr lang="en-US" sz="2200" b="1" dirty="0">
+              <a:rPr lang="en-US" sz="2200" b="1">
                 <a:solidFill>
                   <a:srgbClr val="14213D"/>
                 </a:solidFill>
@@ -7305,7 +8106,7 @@
               </a:rPr>
               <a:t>Free to verify</a:t>
             </a:r>
-            <a:endParaRPr lang="en-US" sz="2200" dirty="0"/>
+            <a:endParaRPr lang="en-US" sz="2200"/>
           </a:p>
         </p:txBody>
       </p:sp>
@@ -7332,14 +8133,14 @@
           </a:bodyPr>
           <a:lstStyle/>
           <a:p>
-            <a:pPr algn="l" indent="0" marL="0">
+            <a:pPr marL="0" indent="0" algn="l">
               <a:lnSpc>
                 <a:spcPts val="2240"/>
               </a:lnSpc>
               <a:buNone/>
             </a:pPr>
             <a:r>
-              <a:rPr lang="en-US" sz="1600" dirty="0">
+              <a:rPr lang="en-US" sz="1600">
                 <a:solidFill>
                   <a:srgbClr val="4A5568"/>
                 </a:solidFill>
@@ -7349,7 +8150,7 @@
               </a:rPr>
               <a:t>Checking a ticket is a read-only call: no wallet, no fee.</a:t>
             </a:r>
-            <a:endParaRPr lang="en-US" sz="1600" dirty="0"/>
+            <a:endParaRPr lang="en-US" sz="1600"/>
           </a:p>
         </p:txBody>
       </p:sp>
@@ -7376,14 +8177,14 @@
           </a:bodyPr>
           <a:lstStyle/>
           <a:p>
-            <a:pPr algn="l" indent="0" marL="0">
+            <a:pPr marL="0" indent="0" algn="l">
               <a:lnSpc>
                 <a:spcPts val="1960"/>
               </a:lnSpc>
               <a:buNone/>
             </a:pPr>
             <a:r>
-              <a:rPr lang="en-US" sz="1400" b="1" dirty="0">
+              <a:rPr lang="en-US" sz="1400" b="1">
                 <a:solidFill>
                   <a:srgbClr val="4A5568"/>
                 </a:solidFill>
@@ -7394,7 +8195,7 @@
               <a:t>How:</a:t>
             </a:r>
             <a:r>
-              <a:rPr lang="en-US" sz="1400" dirty="0">
+              <a:rPr lang="en-US" sz="1400">
                 <a:solidFill>
                   <a:srgbClr val="4A5568"/>
                 </a:solidFill>
@@ -7404,7 +8205,7 @@
               </a:rPr>
               <a:t> ticket = ERC-721 NFT · payment = ERC-20 euro stablecoin · logic = Solidity smart contract on an EVM chain</a:t>
             </a:r>
-            <a:endParaRPr lang="en-US" sz="1400" dirty="0"/>
+            <a:endParaRPr lang="en-US" sz="1400"/>
           </a:p>
         </p:txBody>
       </p:sp>
@@ -7424,6 +8225,7 @@
         <a:solidFill>
           <a:srgbClr val="14213D"/>
         </a:solidFill>
+        <a:effectLst/>
       </p:bgPr>
     </p:bg>
     <p:spTree>
@@ -7463,14 +8265,14 @@
           </a:bodyPr>
           <a:lstStyle/>
           <a:p>
-            <a:pPr algn="l" indent="0" marL="0">
+            <a:pPr marL="0" indent="0" algn="l">
               <a:lnSpc>
                 <a:spcPts val="1680"/>
               </a:lnSpc>
               <a:buNone/>
             </a:pPr>
             <a:r>
-              <a:rPr lang="en-US" sz="1200" b="1" spc="150" kern="0" dirty="0">
+              <a:rPr lang="en-US" sz="1200" b="1" kern="0" spc="150">
                 <a:solidFill>
                   <a:srgbClr val="F2A541"/>
                 </a:solidFill>
@@ -7480,7 +8282,7 @@
               </a:rPr>
               <a:t>HOW IT WORKS</a:t>
             </a:r>
-            <a:endParaRPr lang="en-US" sz="1200" dirty="0"/>
+            <a:endParaRPr lang="en-US" sz="1200"/>
           </a:p>
         </p:txBody>
       </p:sp>
@@ -7507,14 +8309,14 @@
           </a:bodyPr>
           <a:lstStyle/>
           <a:p>
-            <a:pPr algn="l" indent="0" marL="0">
+            <a:pPr marL="0" indent="0" algn="l">
               <a:lnSpc>
                 <a:spcPts val="3960"/>
               </a:lnSpc>
               <a:buNone/>
             </a:pPr>
             <a:r>
-              <a:rPr lang="en-US" sz="3600" b="1" dirty="0">
+              <a:rPr lang="en-US" sz="3600" b="1">
                 <a:solidFill>
                   <a:srgbClr val="F6F4EE"/>
                 </a:solidFill>
@@ -7524,7 +8326,7 @@
               </a:rPr>
               <a:t>The life of a ticket on chain</a:t>
             </a:r>
-            <a:endParaRPr lang="en-US" sz="3600" dirty="0"/>
+            <a:endParaRPr lang="en-US" sz="3600"/>
           </a:p>
         </p:txBody>
       </p:sp>
@@ -7578,14 +8380,14 @@
           </a:bodyPr>
           <a:lstStyle/>
           <a:p>
-            <a:pPr algn="l" indent="0" marL="0">
+            <a:pPr marL="0" indent="0" algn="l">
               <a:lnSpc>
                 <a:spcPts val="1680"/>
               </a:lnSpc>
               <a:buNone/>
             </a:pPr>
             <a:r>
-              <a:rPr lang="en-US" sz="1200" b="1" dirty="0">
+              <a:rPr lang="en-US" sz="1200" b="1">
                 <a:solidFill>
                   <a:srgbClr val="F2A541"/>
                 </a:solidFill>
@@ -7595,7 +8397,7 @@
               </a:rPr>
               <a:t>01 · Buy</a:t>
             </a:r>
-            <a:endParaRPr lang="en-US" sz="1200" dirty="0"/>
+            <a:endParaRPr lang="en-US" sz="1200"/>
           </a:p>
         </p:txBody>
       </p:sp>
@@ -7622,14 +8424,14 @@
           </a:bodyPr>
           <a:lstStyle/>
           <a:p>
-            <a:pPr algn="l" indent="0" marL="0">
+            <a:pPr marL="0" indent="0" algn="l">
               <a:lnSpc>
                 <a:spcPts val="2240"/>
               </a:lnSpc>
               <a:buNone/>
             </a:pPr>
             <a:r>
-              <a:rPr lang="en-US" sz="1600" dirty="0">
+              <a:rPr lang="en-US" sz="1600">
                 <a:solidFill>
                   <a:srgbClr val="F6F4EE"/>
                 </a:solidFill>
@@ -7639,7 +8441,7 @@
               </a:rPr>
               <a:t>buy()</a:t>
             </a:r>
-            <a:endParaRPr lang="en-US" sz="1600" dirty="0"/>
+            <a:endParaRPr lang="en-US" sz="1600"/>
           </a:p>
         </p:txBody>
       </p:sp>
@@ -7666,14 +8468,14 @@
           </a:bodyPr>
           <a:lstStyle/>
           <a:p>
-            <a:pPr algn="l" indent="0" marL="0">
+            <a:pPr marL="0" indent="0" algn="l">
               <a:lnSpc>
                 <a:spcPts val="1680"/>
               </a:lnSpc>
               <a:buNone/>
             </a:pPr>
             <a:r>
-              <a:rPr lang="en-US" sz="1200" dirty="0">
+              <a:rPr lang="en-US" sz="1200">
                 <a:solidFill>
                   <a:srgbClr val="C9D3E3"/>
                 </a:solidFill>
@@ -7683,7 +8485,7 @@
               </a:rPr>
               <a:t>Rider pays 1.30 EURC; the contract mints an ERC-721 ticket.</a:t>
             </a:r>
-            <a:endParaRPr lang="en-US" sz="1200" dirty="0"/>
+            <a:endParaRPr lang="en-US" sz="1200"/>
           </a:p>
         </p:txBody>
       </p:sp>
@@ -7710,14 +8512,14 @@
           </a:bodyPr>
           <a:lstStyle/>
           <a:p>
-            <a:pPr algn="l" indent="0" marL="0">
+            <a:pPr marL="0" indent="0" algn="l">
               <a:lnSpc>
                 <a:spcPts val="1680"/>
               </a:lnSpc>
               <a:buNone/>
             </a:pPr>
             <a:r>
-              <a:rPr lang="en-US" sz="1200" b="1" spc="100" kern="0" dirty="0">
+              <a:rPr lang="en-US" sz="1200" b="1" kern="0" spc="100">
                 <a:solidFill>
                   <a:srgbClr val="C9D3E3"/>
                 </a:solidFill>
@@ -7727,21 +8529,21 @@
               </a:rPr>
               <a:t>→ UNUSED</a:t>
             </a:r>
-            <a:endParaRPr lang="en-US" sz="1200" dirty="0"/>
+            <a:endParaRPr lang="en-US" sz="1200"/>
           </a:p>
         </p:txBody>
       </p:sp>
       <p:pic>
         <p:nvPicPr>
-          <p:cNvPr id="9" name="Image 0" descr="connector">    </p:cNvPr>
+          <p:cNvPr id="9" name="Image 0" descr="connector"/>
           <p:cNvPicPr>
             <a:picLocks noChangeAspect="1"/>
           </p:cNvPicPr>
           <p:nvPr/>
         </p:nvPicPr>
         <p:blipFill>
-          <a:blip r:embed="rId1"/>
-          <a:srcRect l="0" r="0" t="0" b="0"/>
+          <a:blip r:embed="rId3"/>
+          <a:srcRect/>
           <a:stretch/>
         </p:blipFill>
         <p:spPr>
@@ -7804,14 +8606,14 @@
           </a:bodyPr>
           <a:lstStyle/>
           <a:p>
-            <a:pPr algn="l" indent="0" marL="0">
+            <a:pPr marL="0" indent="0" algn="l">
               <a:lnSpc>
                 <a:spcPts val="1680"/>
               </a:lnSpc>
               <a:buNone/>
             </a:pPr>
             <a:r>
-              <a:rPr lang="en-US" sz="1200" b="1" dirty="0">
+              <a:rPr lang="en-US" sz="1200" b="1">
                 <a:solidFill>
                   <a:srgbClr val="F2A541"/>
                 </a:solidFill>
@@ -7821,7 +8623,7 @@
               </a:rPr>
               <a:t>02 · Validate</a:t>
             </a:r>
-            <a:endParaRPr lang="en-US" sz="1200" dirty="0"/>
+            <a:endParaRPr lang="en-US" sz="1200"/>
           </a:p>
         </p:txBody>
       </p:sp>
@@ -7848,14 +8650,14 @@
           </a:bodyPr>
           <a:lstStyle/>
           <a:p>
-            <a:pPr algn="l" indent="0" marL="0">
+            <a:pPr marL="0" indent="0" algn="l">
               <a:lnSpc>
                 <a:spcPts val="2240"/>
               </a:lnSpc>
               <a:buNone/>
             </a:pPr>
             <a:r>
-              <a:rPr lang="en-US" sz="1600" dirty="0">
+              <a:rPr lang="en-US" sz="1600">
                 <a:solidFill>
                   <a:srgbClr val="F6F4EE"/>
                 </a:solidFill>
@@ -7865,7 +8667,7 @@
               </a:rPr>
               <a:t>validate(id)</a:t>
             </a:r>
-            <a:endParaRPr lang="en-US" sz="1600" dirty="0"/>
+            <a:endParaRPr lang="en-US" sz="1600"/>
           </a:p>
         </p:txBody>
       </p:sp>
@@ -7892,14 +8694,14 @@
           </a:bodyPr>
           <a:lstStyle/>
           <a:p>
-            <a:pPr algn="l" indent="0" marL="0">
+            <a:pPr marL="0" indent="0" algn="l">
               <a:lnSpc>
                 <a:spcPts val="1680"/>
               </a:lnSpc>
               <a:buNone/>
             </a:pPr>
             <a:r>
-              <a:rPr lang="en-US" sz="1200" dirty="0">
+              <a:rPr lang="en-US" sz="1200">
                 <a:solidFill>
                   <a:srgbClr val="C9D3E3"/>
                 </a:solidFill>
@@ -7909,7 +8711,7 @@
               </a:rPr>
               <a:t>On boarding. Stores the block timestamp, and works only once.</a:t>
             </a:r>
-            <a:endParaRPr lang="en-US" sz="1200" dirty="0"/>
+            <a:endParaRPr lang="en-US" sz="1200"/>
           </a:p>
         </p:txBody>
       </p:sp>
@@ -7936,14 +8738,14 @@
           </a:bodyPr>
           <a:lstStyle/>
           <a:p>
-            <a:pPr algn="l" indent="0" marL="0">
+            <a:pPr marL="0" indent="0" algn="l">
               <a:lnSpc>
                 <a:spcPts val="1680"/>
               </a:lnSpc>
               <a:buNone/>
             </a:pPr>
             <a:r>
-              <a:rPr lang="en-US" sz="1200" b="1" spc="100" kern="0" dirty="0">
+              <a:rPr lang="en-US" sz="1200" b="1" kern="0" spc="100">
                 <a:solidFill>
                   <a:srgbClr val="F2A541"/>
                 </a:solidFill>
@@ -7953,21 +8755,21 @@
               </a:rPr>
               <a:t>→ ACTIVE</a:t>
             </a:r>
-            <a:endParaRPr lang="en-US" sz="1200" dirty="0"/>
+            <a:endParaRPr lang="en-US" sz="1200"/>
           </a:p>
         </p:txBody>
       </p:sp>
       <p:pic>
         <p:nvPicPr>
-          <p:cNvPr id="15" name="Image 1" descr="connector">    </p:cNvPr>
+          <p:cNvPr id="15" name="Image 1" descr="connector"/>
           <p:cNvPicPr>
             <a:picLocks noChangeAspect="1"/>
           </p:cNvPicPr>
           <p:nvPr/>
         </p:nvPicPr>
         <p:blipFill>
-          <a:blip r:embed="rId2"/>
-          <a:srcRect l="0" r="0" t="0" b="0"/>
+          <a:blip r:embed="rId3"/>
+          <a:srcRect/>
           <a:stretch/>
         </p:blipFill>
         <p:spPr>
@@ -8030,14 +8832,14 @@
           </a:bodyPr>
           <a:lstStyle/>
           <a:p>
-            <a:pPr algn="l" indent="0" marL="0">
+            <a:pPr marL="0" indent="0" algn="l">
               <a:lnSpc>
                 <a:spcPts val="1680"/>
               </a:lnSpc>
               <a:buNone/>
             </a:pPr>
             <a:r>
-              <a:rPr lang="en-US" sz="1200" b="1" dirty="0">
+              <a:rPr lang="en-US" sz="1200" b="1">
                 <a:solidFill>
                   <a:srgbClr val="F2A541"/>
                 </a:solidFill>
@@ -8047,7 +8849,7 @@
               </a:rPr>
               <a:t>03 · Ride</a:t>
             </a:r>
-            <a:endParaRPr lang="en-US" sz="1200" dirty="0"/>
+            <a:endParaRPr lang="en-US" sz="1200"/>
           </a:p>
         </p:txBody>
       </p:sp>
@@ -8074,14 +8876,14 @@
           </a:bodyPr>
           <a:lstStyle/>
           <a:p>
-            <a:pPr algn="l" indent="0" marL="0">
+            <a:pPr marL="0" indent="0" algn="l">
               <a:lnSpc>
                 <a:spcPts val="2240"/>
               </a:lnSpc>
               <a:buNone/>
             </a:pPr>
             <a:r>
-              <a:rPr lang="en-US" sz="1600" dirty="0">
+              <a:rPr lang="en-US" sz="1600">
                 <a:solidFill>
                   <a:srgbClr val="F6F4EE"/>
                 </a:solidFill>
@@ -8091,7 +8893,7 @@
               </a:rPr>
               <a:t>isValid(id)</a:t>
             </a:r>
-            <a:endParaRPr lang="en-US" sz="1600" dirty="0"/>
+            <a:endParaRPr lang="en-US" sz="1600"/>
           </a:p>
         </p:txBody>
       </p:sp>
@@ -8118,14 +8920,14 @@
           </a:bodyPr>
           <a:lstStyle/>
           <a:p>
-            <a:pPr algn="l" indent="0" marL="0">
+            <a:pPr marL="0" indent="0" algn="l">
               <a:lnSpc>
                 <a:spcPts val="1680"/>
               </a:lnSpc>
               <a:buNone/>
             </a:pPr>
             <a:r>
-              <a:rPr lang="en-US" sz="1200" dirty="0">
+              <a:rPr lang="en-US" sz="1200">
                 <a:solidFill>
                   <a:srgbClr val="C9D3E3"/>
                 </a:solidFill>
@@ -8135,7 +8937,7 @@
               </a:rPr>
               <a:t>Returns true for 90 minutes. The ticket can no longer be transferred.</a:t>
             </a:r>
-            <a:endParaRPr lang="en-US" sz="1200" dirty="0"/>
+            <a:endParaRPr lang="en-US" sz="1200"/>
           </a:p>
         </p:txBody>
       </p:sp>
@@ -8162,14 +8964,14 @@
           </a:bodyPr>
           <a:lstStyle/>
           <a:p>
-            <a:pPr algn="l" indent="0" marL="0">
+            <a:pPr marL="0" indent="0" algn="l">
               <a:lnSpc>
                 <a:spcPts val="1680"/>
               </a:lnSpc>
               <a:buNone/>
             </a:pPr>
             <a:r>
-              <a:rPr lang="en-US" sz="1200" b="1" spc="100" kern="0" dirty="0">
+              <a:rPr lang="en-US" sz="1200" b="1" kern="0" spc="100">
                 <a:solidFill>
                   <a:srgbClr val="F2A541"/>
                 </a:solidFill>
@@ -8179,13 +8981,13 @@
               </a:rPr>
               <a:t>ACTIVE · 90 MIN</a:t>
             </a:r>
-            <a:endParaRPr lang="en-US" sz="1200" dirty="0"/>
+            <a:endParaRPr lang="en-US" sz="1200"/>
           </a:p>
         </p:txBody>
       </p:sp>
       <p:pic>
         <p:nvPicPr>
-          <p:cNvPr id="21" name="Image 2" descr="connector">    </p:cNvPr>
+          <p:cNvPr id="21" name="Image 2" descr="connector"/>
           <p:cNvPicPr>
             <a:picLocks noChangeAspect="1"/>
           </p:cNvPicPr>
@@ -8193,7 +8995,7 @@
         </p:nvPicPr>
         <p:blipFill>
           <a:blip r:embed="rId3"/>
-          <a:srcRect l="0" r="0" t="0" b="0"/>
+          <a:srcRect/>
           <a:stretch/>
         </p:blipFill>
         <p:spPr>
@@ -8256,14 +9058,14 @@
           </a:bodyPr>
           <a:lstStyle/>
           <a:p>
-            <a:pPr algn="l" indent="0" marL="0">
+            <a:pPr marL="0" indent="0" algn="l">
               <a:lnSpc>
                 <a:spcPts val="1680"/>
               </a:lnSpc>
               <a:buNone/>
             </a:pPr>
             <a:r>
-              <a:rPr lang="en-US" sz="1200" b="1" dirty="0">
+              <a:rPr lang="en-US" sz="1200" b="1">
                 <a:solidFill>
                   <a:srgbClr val="F2A541"/>
                 </a:solidFill>
@@ -8273,7 +9075,7 @@
               </a:rPr>
               <a:t>04 · Expire</a:t>
             </a:r>
-            <a:endParaRPr lang="en-US" sz="1200" dirty="0"/>
+            <a:endParaRPr lang="en-US" sz="1200"/>
           </a:p>
         </p:txBody>
       </p:sp>
@@ -8300,14 +9102,14 @@
           </a:bodyPr>
           <a:lstStyle/>
           <a:p>
-            <a:pPr algn="l" indent="0" marL="0">
+            <a:pPr marL="0" indent="0" algn="l">
               <a:lnSpc>
                 <a:spcPts val="2240"/>
               </a:lnSpc>
               <a:buNone/>
             </a:pPr>
             <a:r>
-              <a:rPr lang="en-US" sz="1600" dirty="0">
+              <a:rPr lang="en-US" sz="1600">
                 <a:solidFill>
                   <a:srgbClr val="F6F4EE"/>
                 </a:solidFill>
@@ -8317,7 +9119,7 @@
               </a:rPr>
               <a:t>status(id)</a:t>
             </a:r>
-            <a:endParaRPr lang="en-US" sz="1600" dirty="0"/>
+            <a:endParaRPr lang="en-US" sz="1600"/>
           </a:p>
         </p:txBody>
       </p:sp>
@@ -8344,14 +9146,14 @@
           </a:bodyPr>
           <a:lstStyle/>
           <a:p>
-            <a:pPr algn="l" indent="0" marL="0">
+            <a:pPr marL="0" indent="0" algn="l">
               <a:lnSpc>
                 <a:spcPts val="1680"/>
               </a:lnSpc>
               <a:buNone/>
             </a:pPr>
             <a:r>
-              <a:rPr lang="en-US" sz="1200" dirty="0">
+              <a:rPr lang="en-US" sz="1200">
                 <a:solidFill>
                   <a:srgbClr val="C9D3E3"/>
                 </a:solidFill>
@@ -8361,7 +9163,7 @@
               </a:rPr>
               <a:t>After 90 minutes the ticket expires and can never be validated again.</a:t>
             </a:r>
-            <a:endParaRPr lang="en-US" sz="1200" dirty="0"/>
+            <a:endParaRPr lang="en-US" sz="1200"/>
           </a:p>
         </p:txBody>
       </p:sp>
@@ -8388,14 +9190,14 @@
           </a:bodyPr>
           <a:lstStyle/>
           <a:p>
-            <a:pPr algn="l" indent="0" marL="0">
+            <a:pPr marL="0" indent="0" algn="l">
               <a:lnSpc>
                 <a:spcPts val="1680"/>
               </a:lnSpc>
               <a:buNone/>
             </a:pPr>
             <a:r>
-              <a:rPr lang="en-US" sz="1200" b="1" spc="100" kern="0" dirty="0">
+              <a:rPr lang="en-US" sz="1200" b="1" kern="0" spc="100">
                 <a:solidFill>
                   <a:srgbClr val="C9D3E3"/>
                 </a:solidFill>
@@ -8405,7 +9207,7 @@
               </a:rPr>
               <a:t>→ EXPIRED</a:t>
             </a:r>
-            <a:endParaRPr lang="en-US" sz="1200" dirty="0"/>
+            <a:endParaRPr lang="en-US" sz="1200"/>
           </a:p>
         </p:txBody>
       </p:sp>
@@ -8433,7 +9235,7 @@
       </p:sp>
       <p:pic>
         <p:nvPicPr>
-          <p:cNvPr id="28" name="Image 3" descr="Verified">    </p:cNvPr>
+          <p:cNvPr id="28" name="Image 3" descr="Verified"/>
           <p:cNvPicPr>
             <a:picLocks noChangeAspect="1"/>
           </p:cNvPicPr>
@@ -8441,7 +9243,7 @@
         </p:nvPicPr>
         <p:blipFill>
           <a:blip r:embed="rId4"/>
-          <a:srcRect l="0" r="0" t="0" b="0"/>
+          <a:srcRect/>
           <a:stretch/>
         </p:blipFill>
         <p:spPr>
@@ -8477,14 +9279,14 @@
           </a:bodyPr>
           <a:lstStyle/>
           <a:p>
-            <a:pPr algn="l" indent="0" marL="0">
+            <a:pPr marL="0" indent="0" algn="l">
               <a:lnSpc>
                 <a:spcPts val="2240"/>
               </a:lnSpc>
               <a:buNone/>
             </a:pPr>
             <a:r>
-              <a:rPr lang="en-US" sz="1600" b="1" dirty="0">
+              <a:rPr lang="en-US" sz="1600" b="1">
                 <a:solidFill>
                   <a:srgbClr val="14213D"/>
                 </a:solidFill>
@@ -8494,7 +9296,7 @@
               </a:rPr>
               <a:t>isValid(id) &amp;&amp; ownerOf(id) == rider</a:t>
             </a:r>
-            <a:endParaRPr lang="en-US" sz="1600" dirty="0"/>
+            <a:endParaRPr lang="en-US" sz="1600"/>
           </a:p>
         </p:txBody>
       </p:sp>
@@ -8521,14 +9323,14 @@
           </a:bodyPr>
           <a:lstStyle/>
           <a:p>
-            <a:pPr algn="l" indent="0" marL="0">
+            <a:pPr marL="0" indent="0" algn="l">
               <a:lnSpc>
                 <a:spcPts val="1680"/>
               </a:lnSpc>
               <a:buNone/>
             </a:pPr>
             <a:r>
-              <a:rPr lang="en-US" sz="1200" dirty="0">
+              <a:rPr lang="en-US" sz="1200">
                 <a:solidFill>
                   <a:srgbClr val="4A5568"/>
                 </a:solidFill>
@@ -8538,7 +9340,7 @@
               </a:rPr>
               <a:t>The conductor’s check: view calls only, so no wallet and no gas.</a:t>
             </a:r>
-            <a:endParaRPr lang="en-US" sz="1200" dirty="0"/>
+            <a:endParaRPr lang="en-US" sz="1200"/>
           </a:p>
         </p:txBody>
       </p:sp>
@@ -8558,6 +9360,7 @@
         <a:solidFill>
           <a:srgbClr val="F6F4EE"/>
         </a:solidFill>
+        <a:effectLst/>
       </p:bgPr>
     </p:bg>
     <p:spTree>
@@ -8597,14 +9400,14 @@
           </a:bodyPr>
           <a:lstStyle/>
           <a:p>
-            <a:pPr algn="l" indent="0" marL="0">
+            <a:pPr marL="0" indent="0" algn="l">
               <a:lnSpc>
                 <a:spcPts val="1680"/>
               </a:lnSpc>
               <a:buNone/>
             </a:pPr>
             <a:r>
-              <a:rPr lang="en-US" sz="1200" b="1" spc="150" kern="0" dirty="0">
+              <a:rPr lang="en-US" sz="1200" b="1" kern="0" spc="150">
                 <a:solidFill>
                   <a:srgbClr val="B86E12"/>
                 </a:solidFill>
@@ -8614,7 +9417,7 @@
               </a:rPr>
               <a:t>ARCHITECTURE</a:t>
             </a:r>
-            <a:endParaRPr lang="en-US" sz="1200" dirty="0"/>
+            <a:endParaRPr lang="en-US" sz="1200"/>
           </a:p>
         </p:txBody>
       </p:sp>
@@ -8641,14 +9444,14 @@
           </a:bodyPr>
           <a:lstStyle/>
           <a:p>
-            <a:pPr algn="l" indent="0" marL="0">
+            <a:pPr marL="0" indent="0" algn="l">
               <a:lnSpc>
                 <a:spcPts val="3960"/>
               </a:lnSpc>
               <a:buNone/>
             </a:pPr>
             <a:r>
-              <a:rPr lang="en-US" sz="3600" b="1" dirty="0">
+              <a:rPr lang="en-US" sz="3600" b="1">
                 <a:solidFill>
                   <a:srgbClr val="14213D"/>
                 </a:solidFill>
@@ -8658,21 +9461,21 @@
               </a:rPr>
               <a:t>Who talks to the contract</a:t>
             </a:r>
-            <a:endParaRPr lang="en-US" sz="3600" dirty="0"/>
+            <a:endParaRPr lang="en-US" sz="3600"/>
           </a:p>
         </p:txBody>
       </p:sp>
       <p:pic>
         <p:nvPicPr>
-          <p:cNvPr id="4" name="Image 0" descr="connector">    </p:cNvPr>
+          <p:cNvPr id="4" name="Image 0" descr="connector"/>
           <p:cNvPicPr>
             <a:picLocks noChangeAspect="1"/>
           </p:cNvPicPr>
           <p:nvPr/>
         </p:nvPicPr>
         <p:blipFill>
-          <a:blip r:embed="rId1"/>
-          <a:srcRect l="0" r="0" t="0" b="0"/>
+          <a:blip r:embed="rId3"/>
+          <a:srcRect/>
           <a:stretch/>
         </p:blipFill>
         <p:spPr>
@@ -8687,15 +9490,15 @@
       </p:pic>
       <p:pic>
         <p:nvPicPr>
-          <p:cNvPr id="5" name="Image 1" descr="connector">    </p:cNvPr>
+          <p:cNvPr id="5" name="Image 1" descr="connector"/>
           <p:cNvPicPr>
             <a:picLocks noChangeAspect="1"/>
           </p:cNvPicPr>
           <p:nvPr/>
         </p:nvPicPr>
         <p:blipFill>
-          <a:blip r:embed="rId2"/>
-          <a:srcRect l="0" r="0" t="0" b="0"/>
+          <a:blip r:embed="rId4"/>
+          <a:srcRect/>
           <a:stretch/>
         </p:blipFill>
         <p:spPr>
@@ -8710,15 +9513,15 @@
       </p:pic>
       <p:pic>
         <p:nvPicPr>
-          <p:cNvPr id="6" name="Image 2" descr="connector">    </p:cNvPr>
+          <p:cNvPr id="6" name="Image 2" descr="connector"/>
           <p:cNvPicPr>
             <a:picLocks noChangeAspect="1"/>
           </p:cNvPicPr>
           <p:nvPr/>
         </p:nvPicPr>
         <p:blipFill>
-          <a:blip r:embed="rId3"/>
-          <a:srcRect l="0" r="0" t="0" b="0"/>
+          <a:blip r:embed="rId5"/>
+          <a:srcRect/>
           <a:stretch/>
         </p:blipFill>
         <p:spPr>
@@ -8733,15 +9536,15 @@
       </p:pic>
       <p:pic>
         <p:nvPicPr>
-          <p:cNvPr id="7" name="Image 3" descr="connector">    </p:cNvPr>
+          <p:cNvPr id="7" name="Image 3" descr="connector"/>
           <p:cNvPicPr>
             <a:picLocks noChangeAspect="1"/>
           </p:cNvPicPr>
           <p:nvPr/>
         </p:nvPicPr>
         <p:blipFill>
-          <a:blip r:embed="rId4"/>
-          <a:srcRect l="0" r="0" t="0" b="0"/>
+          <a:blip r:embed="rId6"/>
+          <a:srcRect/>
           <a:stretch/>
         </p:blipFill>
         <p:spPr>
@@ -8804,14 +9607,14 @@
           </a:bodyPr>
           <a:lstStyle/>
           <a:p>
-            <a:pPr algn="l" indent="0" marL="0">
+            <a:pPr marL="0" indent="0" algn="l">
               <a:lnSpc>
                 <a:spcPts val="2640"/>
               </a:lnSpc>
               <a:buNone/>
             </a:pPr>
             <a:r>
-              <a:rPr lang="en-US" sz="2200" b="1" dirty="0">
+              <a:rPr lang="en-US" sz="2200" b="1">
                 <a:solidFill>
                   <a:srgbClr val="14213D"/>
                 </a:solidFill>
@@ -8821,7 +9624,7 @@
               </a:rPr>
               <a:t>Rider app</a:t>
             </a:r>
-            <a:endParaRPr lang="en-US" sz="2200" dirty="0"/>
+            <a:endParaRPr lang="en-US" sz="2200"/>
           </a:p>
         </p:txBody>
       </p:sp>
@@ -8848,14 +9651,14 @@
           </a:bodyPr>
           <a:lstStyle/>
           <a:p>
-            <a:pPr algn="l" indent="0" marL="0">
+            <a:pPr marL="0" indent="0" algn="l">
               <a:lnSpc>
                 <a:spcPts val="1680"/>
               </a:lnSpc>
               <a:buNone/>
             </a:pPr>
             <a:r>
-              <a:rPr lang="en-US" sz="1200" dirty="0">
+              <a:rPr lang="en-US" sz="1200">
                 <a:solidFill>
                   <a:srgbClr val="4A5568"/>
                 </a:solidFill>
@@ -8865,7 +9668,7 @@
               </a:rPr>
               <a:t>Browser + MetaMask wallet: buys and validates tickets</a:t>
             </a:r>
-            <a:endParaRPr lang="en-US" sz="1200" dirty="0"/>
+            <a:endParaRPr lang="en-US" sz="1200"/>
           </a:p>
         </p:txBody>
       </p:sp>
@@ -8919,14 +9722,14 @@
           </a:bodyPr>
           <a:lstStyle/>
           <a:p>
-            <a:pPr algn="l" indent="0" marL="0">
+            <a:pPr marL="0" indent="0" algn="l">
               <a:lnSpc>
                 <a:spcPts val="2640"/>
               </a:lnSpc>
               <a:buNone/>
             </a:pPr>
             <a:r>
-              <a:rPr lang="en-US" sz="2200" b="1" dirty="0">
+              <a:rPr lang="en-US" sz="2200" b="1">
                 <a:solidFill>
                   <a:srgbClr val="14213D"/>
                 </a:solidFill>
@@ -8936,7 +9739,7 @@
               </a:rPr>
               <a:t>Conductor view</a:t>
             </a:r>
-            <a:endParaRPr lang="en-US" sz="2200" dirty="0"/>
+            <a:endParaRPr lang="en-US" sz="2200"/>
           </a:p>
         </p:txBody>
       </p:sp>
@@ -8963,14 +9766,14 @@
           </a:bodyPr>
           <a:lstStyle/>
           <a:p>
-            <a:pPr algn="l" indent="0" marL="0">
+            <a:pPr marL="0" indent="0" algn="l">
               <a:lnSpc>
                 <a:spcPts val="1680"/>
               </a:lnSpc>
               <a:buNone/>
             </a:pPr>
             <a:r>
-              <a:rPr lang="en-US" sz="1200" dirty="0">
+              <a:rPr lang="en-US" sz="1200">
                 <a:solidFill>
                   <a:srgbClr val="4A5568"/>
                 </a:solidFill>
@@ -8980,7 +9783,7 @@
               </a:rPr>
               <a:t>No wallet needed: checks a ticket ID against the rider’s address</a:t>
             </a:r>
-            <a:endParaRPr lang="en-US" sz="1200" dirty="0"/>
+            <a:endParaRPr lang="en-US" sz="1200"/>
           </a:p>
         </p:txBody>
       </p:sp>
@@ -9029,14 +9832,14 @@
           </a:bodyPr>
           <a:lstStyle/>
           <a:p>
-            <a:pPr algn="l" indent="0" marL="0">
+            <a:pPr marL="0" indent="0" algn="l">
               <a:lnSpc>
                 <a:spcPts val="1622"/>
               </a:lnSpc>
               <a:buNone/>
             </a:pPr>
             <a:r>
-              <a:rPr lang="en-US" sz="1159" b="1" spc="100" kern="0" dirty="0">
+              <a:rPr lang="en-US" sz="1159" b="1" kern="0" spc="100">
                 <a:solidFill>
                   <a:srgbClr val="F2A541"/>
                 </a:solidFill>
@@ -9046,7 +9849,7 @@
               </a:rPr>
               <a:t>SMART CONTRACT</a:t>
             </a:r>
-            <a:endParaRPr lang="en-US" sz="1159" dirty="0"/>
+            <a:endParaRPr lang="en-US" sz="1159"/>
           </a:p>
         </p:txBody>
       </p:sp>
@@ -9073,14 +9876,14 @@
           </a:bodyPr>
           <a:lstStyle/>
           <a:p>
-            <a:pPr algn="l" indent="0" marL="0">
+            <a:pPr marL="0" indent="0" algn="l">
               <a:lnSpc>
                 <a:spcPts val="2524"/>
               </a:lnSpc>
               <a:buNone/>
             </a:pPr>
             <a:r>
-              <a:rPr lang="en-US" sz="2104" b="1" dirty="0">
+              <a:rPr lang="en-US" sz="2104" b="1">
                 <a:solidFill>
                   <a:srgbClr val="F6F4EE"/>
                 </a:solidFill>
@@ -9090,7 +9893,7 @@
               </a:rPr>
               <a:t>BusTicket</a:t>
             </a:r>
-            <a:endParaRPr lang="en-US" sz="2104" dirty="0"/>
+            <a:endParaRPr lang="en-US" sz="2104"/>
           </a:p>
         </p:txBody>
       </p:sp>
@@ -9117,14 +9920,14 @@
           </a:bodyPr>
           <a:lstStyle/>
           <a:p>
-            <a:pPr algn="l" indent="0" marL="0">
+            <a:pPr marL="0" indent="0" algn="l">
               <a:lnSpc>
                 <a:spcPts val="1612"/>
               </a:lnSpc>
               <a:buNone/>
             </a:pPr>
             <a:r>
-              <a:rPr lang="en-US" sz="1151" dirty="0">
+              <a:rPr lang="en-US" sz="1151">
                 <a:solidFill>
                   <a:srgbClr val="C9D3E3"/>
                 </a:solidFill>
@@ -9134,21 +9937,21 @@
               </a:rPr>
               <a:t>ERC-721 + Ownable (OpenZeppelin)</a:t>
             </a:r>
-            <a:endParaRPr lang="en-US" sz="1151" dirty="0"/>
+            <a:endParaRPr lang="en-US" sz="1151"/>
           </a:p>
         </p:txBody>
       </p:sp>
       <p:pic>
         <p:nvPicPr>
-          <p:cNvPr id="18" name="Image 4" descr="line">    </p:cNvPr>
+          <p:cNvPr id="18" name="Image 4" descr="line"/>
           <p:cNvPicPr>
             <a:picLocks noChangeAspect="1"/>
           </p:cNvPicPr>
           <p:nvPr/>
         </p:nvPicPr>
         <p:blipFill>
-          <a:blip r:embed="rId5"/>
-          <a:srcRect l="0" r="0" t="0" b="0"/>
+          <a:blip r:embed="rId7"/>
+          <a:srcRect/>
           <a:stretch/>
         </p:blipFill>
         <p:spPr>
@@ -9184,14 +9987,14 @@
           </a:bodyPr>
           <a:lstStyle/>
           <a:p>
-            <a:pPr algn="l" indent="0" marL="0">
+            <a:pPr marL="0" indent="0" algn="l">
               <a:lnSpc>
                 <a:spcPts val="1824"/>
               </a:lnSpc>
               <a:buNone/>
             </a:pPr>
             <a:r>
-              <a:rPr lang="en-US" sz="1140" dirty="0">
+              <a:rPr lang="en-US" sz="1140">
                 <a:solidFill>
                   <a:srgbClr val="F6F4EE"/>
                 </a:solidFill>
@@ -9201,17 +10004,17 @@
               </a:rPr>
               <a:t>price = 1.30 EURC</a:t>
             </a:r>
-            <a:endParaRPr lang="en-US" sz="1140" dirty="0"/>
-          </a:p>
-          <a:p>
-            <a:pPr algn="l" indent="0" marL="0">
+            <a:endParaRPr lang="en-US" sz="1140"/>
+          </a:p>
+          <a:p>
+            <a:pPr marL="0" indent="0" algn="l">
               <a:lnSpc>
                 <a:spcPts val="1824"/>
               </a:lnSpc>
               <a:buNone/>
             </a:pPr>
             <a:r>
-              <a:rPr lang="en-US" sz="1140" dirty="0">
+              <a:rPr lang="en-US" sz="1140">
                 <a:solidFill>
                   <a:srgbClr val="F6F4EE"/>
                 </a:solidFill>
@@ -9221,17 +10024,17 @@
               </a:rPr>
               <a:t>DURATION = 90 min</a:t>
             </a:r>
-            <a:endParaRPr lang="en-US" sz="1140" dirty="0"/>
-          </a:p>
-          <a:p>
-            <a:pPr algn="l" indent="0" marL="0">
+            <a:endParaRPr lang="en-US" sz="1140"/>
+          </a:p>
+          <a:p>
+            <a:pPr marL="0" indent="0" algn="l">
               <a:lnSpc>
                 <a:spcPts val="1824"/>
               </a:lnSpc>
               <a:buNone/>
             </a:pPr>
             <a:r>
-              <a:rPr lang="en-US" sz="1140" dirty="0">
+              <a:rPr lang="en-US" sz="1140">
                 <a:solidFill>
                   <a:srgbClr val="F6F4EE"/>
                 </a:solidFill>
@@ -9241,7 +10044,7 @@
               </a:rPr>
               <a:t>validatedAt[id]</a:t>
             </a:r>
-            <a:endParaRPr lang="en-US" sz="1140" dirty="0"/>
+            <a:endParaRPr lang="en-US" sz="1140"/>
           </a:p>
         </p:txBody>
       </p:sp>
@@ -9295,14 +10098,14 @@
           </a:bodyPr>
           <a:lstStyle/>
           <a:p>
-            <a:pPr algn="l" indent="0" marL="0">
+            <a:pPr marL="0" indent="0" algn="l">
               <a:lnSpc>
                 <a:spcPts val="2640"/>
               </a:lnSpc>
               <a:buNone/>
             </a:pPr>
             <a:r>
-              <a:rPr lang="en-US" sz="2200" b="1" dirty="0">
+              <a:rPr lang="en-US" sz="2200" b="1">
                 <a:solidFill>
                   <a:srgbClr val="14213D"/>
                 </a:solidFill>
@@ -9312,7 +10115,7 @@
               </a:rPr>
               <a:t>Euro stablecoin</a:t>
             </a:r>
-            <a:endParaRPr lang="en-US" sz="2200" dirty="0"/>
+            <a:endParaRPr lang="en-US" sz="2200"/>
           </a:p>
         </p:txBody>
       </p:sp>
@@ -9339,14 +10142,14 @@
           </a:bodyPr>
           <a:lstStyle/>
           <a:p>
-            <a:pPr algn="l" indent="0" marL="0">
+            <a:pPr marL="0" indent="0" algn="l">
               <a:lnSpc>
                 <a:spcPts val="1680"/>
               </a:lnSpc>
               <a:buNone/>
             </a:pPr>
             <a:r>
-              <a:rPr lang="en-US" sz="1200" dirty="0">
+              <a:rPr lang="en-US" sz="1200">
                 <a:solidFill>
                   <a:srgbClr val="4A5568"/>
                 </a:solidFill>
@@ -9356,7 +10159,7 @@
               </a:rPr>
               <a:t>ERC-20 with 6 decimals; MockEURC stands in for EURC</a:t>
             </a:r>
-            <a:endParaRPr lang="en-US" sz="1200" dirty="0"/>
+            <a:endParaRPr lang="en-US" sz="1200"/>
           </a:p>
         </p:txBody>
       </p:sp>
@@ -9410,14 +10213,14 @@
           </a:bodyPr>
           <a:lstStyle/>
           <a:p>
-            <a:pPr algn="l" indent="0" marL="0">
+            <a:pPr marL="0" indent="0" algn="l">
               <a:lnSpc>
                 <a:spcPts val="2640"/>
               </a:lnSpc>
               <a:buNone/>
             </a:pPr>
             <a:r>
-              <a:rPr lang="en-US" sz="2200" b="1" dirty="0">
+              <a:rPr lang="en-US" sz="2200" b="1">
                 <a:solidFill>
                   <a:srgbClr val="14213D"/>
                 </a:solidFill>
@@ -9427,7 +10230,7 @@
               </a:rPr>
               <a:t>Operator</a:t>
             </a:r>
-            <a:endParaRPr lang="en-US" sz="2200" dirty="0"/>
+            <a:endParaRPr lang="en-US" sz="2200"/>
           </a:p>
         </p:txBody>
       </p:sp>
@@ -9454,14 +10257,14 @@
           </a:bodyPr>
           <a:lstStyle/>
           <a:p>
-            <a:pPr algn="l" indent="0" marL="0">
+            <a:pPr marL="0" indent="0" algn="l">
               <a:lnSpc>
                 <a:spcPts val="1680"/>
               </a:lnSpc>
               <a:buNone/>
             </a:pPr>
             <a:r>
-              <a:rPr lang="en-US" sz="1200" dirty="0">
+              <a:rPr lang="en-US" sz="1200">
                 <a:solidFill>
                   <a:srgbClr val="4A5568"/>
                 </a:solidFill>
@@ -9471,7 +10274,7 @@
               </a:rPr>
               <a:t>Contract owner: collects revenue with withdraw()</a:t>
             </a:r>
-            <a:endParaRPr lang="en-US" sz="1200" dirty="0"/>
+            <a:endParaRPr lang="en-US" sz="1200"/>
           </a:p>
         </p:txBody>
       </p:sp>
@@ -9498,14 +10301,14 @@
           </a:bodyPr>
           <a:lstStyle/>
           <a:p>
-            <a:pPr algn="ctr" indent="0" marL="0">
+            <a:pPr marL="0" indent="0" algn="ctr">
               <a:lnSpc>
                 <a:spcPts val="1680"/>
               </a:lnSpc>
               <a:buNone/>
             </a:pPr>
             <a:r>
-              <a:rPr lang="en-US" sz="1200" dirty="0">
+              <a:rPr lang="en-US" sz="1200">
                 <a:solidFill>
                   <a:srgbClr val="4A5568"/>
                 </a:solidFill>
@@ -9515,7 +10318,7 @@
               </a:rPr>
               <a:t>transactions</a:t>
             </a:r>
-            <a:endParaRPr lang="en-US" sz="1200" dirty="0"/>
+            <a:endParaRPr lang="en-US" sz="1200"/>
           </a:p>
         </p:txBody>
       </p:sp>
@@ -9542,14 +10345,14 @@
           </a:bodyPr>
           <a:lstStyle/>
           <a:p>
-            <a:pPr algn="ctr" indent="0" marL="0">
+            <a:pPr marL="0" indent="0" algn="ctr">
               <a:lnSpc>
                 <a:spcPts val="1680"/>
               </a:lnSpc>
               <a:buNone/>
             </a:pPr>
             <a:r>
-              <a:rPr lang="en-US" sz="1200" dirty="0">
+              <a:rPr lang="en-US" sz="1200">
                 <a:solidFill>
                   <a:srgbClr val="4A5568"/>
                 </a:solidFill>
@@ -9559,7 +10362,7 @@
               </a:rPr>
               <a:t>view calls</a:t>
             </a:r>
-            <a:endParaRPr lang="en-US" sz="1200" dirty="0"/>
+            <a:endParaRPr lang="en-US" sz="1200"/>
           </a:p>
         </p:txBody>
       </p:sp>
@@ -9586,14 +10389,14 @@
           </a:bodyPr>
           <a:lstStyle/>
           <a:p>
-            <a:pPr algn="ctr" indent="0" marL="0">
+            <a:pPr marL="0" indent="0" algn="ctr">
               <a:lnSpc>
                 <a:spcPts val="1680"/>
               </a:lnSpc>
               <a:buNone/>
             </a:pPr>
             <a:r>
-              <a:rPr lang="en-US" sz="1200" dirty="0">
+              <a:rPr lang="en-US" sz="1200">
                 <a:solidFill>
                   <a:srgbClr val="4A5568"/>
                 </a:solidFill>
@@ -9603,7 +10406,7 @@
               </a:rPr>
               <a:t>payment</a:t>
             </a:r>
-            <a:endParaRPr lang="en-US" sz="1200" dirty="0"/>
+            <a:endParaRPr lang="en-US" sz="1200"/>
           </a:p>
         </p:txBody>
       </p:sp>
@@ -9630,14 +10433,14 @@
           </a:bodyPr>
           <a:lstStyle/>
           <a:p>
-            <a:pPr algn="ctr" indent="0" marL="0">
+            <a:pPr marL="0" indent="0" algn="ctr">
               <a:lnSpc>
                 <a:spcPts val="1680"/>
               </a:lnSpc>
               <a:buNone/>
             </a:pPr>
             <a:r>
-              <a:rPr lang="en-US" sz="1200" dirty="0">
+              <a:rPr lang="en-US" sz="1200">
                 <a:solidFill>
                   <a:srgbClr val="4A5568"/>
                 </a:solidFill>
@@ -9647,7 +10450,7 @@
               </a:rPr>
               <a:t>revenue</a:t>
             </a:r>
-            <a:endParaRPr lang="en-US" sz="1200" dirty="0"/>
+            <a:endParaRPr lang="en-US" sz="1200"/>
           </a:p>
         </p:txBody>
       </p:sp>
@@ -9674,14 +10477,14 @@
           </a:bodyPr>
           <a:lstStyle/>
           <a:p>
-            <a:pPr algn="l" indent="0" marL="0">
+            <a:pPr marL="0" indent="0" algn="l">
               <a:lnSpc>
                 <a:spcPts val="1680"/>
               </a:lnSpc>
               <a:buNone/>
             </a:pPr>
             <a:r>
-              <a:rPr lang="en-US" sz="1200" dirty="0">
+              <a:rPr lang="en-US" sz="1200">
                 <a:solidFill>
                   <a:srgbClr val="4A5568"/>
                 </a:solidFill>
@@ -9691,7 +10494,7 @@
               </a:rPr>
               <a:t>Built with Hardhat 3 · Solidity · OpenZeppelin · ethers.js + Vite + TypeScript frontend</a:t>
             </a:r>
-            <a:endParaRPr lang="en-US" sz="1200" dirty="0"/>
+            <a:endParaRPr lang="en-US" sz="1200"/>
           </a:p>
         </p:txBody>
       </p:sp>
@@ -9711,6 +10514,7 @@
         <a:solidFill>
           <a:srgbClr val="14213D"/>
         </a:solidFill>
+        <a:effectLst/>
       </p:bgPr>
     </p:bg>
     <p:spTree>
@@ -9750,14 +10554,14 @@
           </a:bodyPr>
           <a:lstStyle/>
           <a:p>
-            <a:pPr algn="l" indent="0" marL="0">
+            <a:pPr marL="0" indent="0" algn="l">
               <a:lnSpc>
                 <a:spcPts val="1680"/>
               </a:lnSpc>
               <a:buNone/>
             </a:pPr>
             <a:r>
-              <a:rPr lang="en-US" sz="1200" b="1" spc="150" kern="0" dirty="0">
+              <a:rPr lang="en-US" sz="1200" b="1" kern="0" spc="150">
                 <a:solidFill>
                   <a:srgbClr val="F2A541"/>
                 </a:solidFill>
@@ -9767,7 +10571,7 @@
               </a:rPr>
               <a:t>INTEGRITY</a:t>
             </a:r>
-            <a:endParaRPr lang="en-US" sz="1200" dirty="0"/>
+            <a:endParaRPr lang="en-US" sz="1200"/>
           </a:p>
         </p:txBody>
       </p:sp>
@@ -9794,14 +10598,14 @@
           </a:bodyPr>
           <a:lstStyle/>
           <a:p>
-            <a:pPr algn="l" indent="0" marL="0">
+            <a:pPr marL="0" indent="0" algn="l">
               <a:lnSpc>
                 <a:spcPts val="3960"/>
               </a:lnSpc>
               <a:buNone/>
             </a:pPr>
             <a:r>
-              <a:rPr lang="en-US" sz="3600" b="1" dirty="0">
+              <a:rPr lang="en-US" sz="3600" b="1">
                 <a:solidFill>
                   <a:srgbClr val="F6F4EE"/>
                 </a:solidFill>
@@ -9811,7 +10615,7 @@
               </a:rPr>
               <a:t>Every attack meets a rule in the contract</a:t>
             </a:r>
-            <a:endParaRPr lang="en-US" sz="3600" dirty="0"/>
+            <a:endParaRPr lang="en-US" sz="3600"/>
           </a:p>
         </p:txBody>
       </p:sp>
@@ -9838,9 +10642,27 @@
             <a:tbl>
               <a:tblPr/>
               <a:tblGrid>
-                <a:gridCol w="2955747"/>
-                <a:gridCol w="4222496"/>
-                <a:gridCol w="3377997"/>
+                <a:gridCol w="2955747">
+                  <a:extLst>
+                    <a:ext uri="{9D8B030D-6E8A-4147-A177-3AD203B41FA5}">
+                      <a16:colId xmlns:a16="http://schemas.microsoft.com/office/drawing/2014/main" val="20000"/>
+                    </a:ext>
+                  </a:extLst>
+                </a:gridCol>
+                <a:gridCol w="4222496">
+                  <a:extLst>
+                    <a:ext uri="{9D8B030D-6E8A-4147-A177-3AD203B41FA5}">
+                      <a16:colId xmlns:a16="http://schemas.microsoft.com/office/drawing/2014/main" val="20001"/>
+                    </a:ext>
+                  </a:extLst>
+                </a:gridCol>
+                <a:gridCol w="3377997">
+                  <a:extLst>
+                    <a:ext uri="{9D8B030D-6E8A-4147-A177-3AD203B41FA5}">
+                      <a16:colId xmlns:a16="http://schemas.microsoft.com/office/drawing/2014/main" val="20002"/>
+                    </a:ext>
+                  </a:extLst>
+                </a:gridCol>
               </a:tblGrid>
               <a:tr h="383540">
                 <a:tc>
@@ -9848,14 +10670,14 @@
                     <a:bodyPr/>
                     <a:lstStyle/>
                     <a:p>
-                      <a:pPr indent="0" marL="0">
+                      <a:pPr marL="0" indent="0">
                         <a:lnSpc>
                           <a:spcPts val="1960"/>
                         </a:lnSpc>
                         <a:buNone/>
                       </a:pPr>
                       <a:r>
-                        <a:rPr lang="en-US" sz="1400" b="1" dirty="0">
+                        <a:rPr lang="en-US" sz="1400" b="1">
                           <a:solidFill>
                             <a:srgbClr val="14213D"/>
                           </a:solidFill>
@@ -9865,14 +10687,14 @@
                         </a:rPr>
                         <a:t>Attempt</a:t>
                       </a:r>
-                      <a:endParaRPr lang="en-US" sz="1400" dirty="0">
+                      <a:endParaRPr lang="en-US" sz="1400">
                         <a:latin typeface="Arial" charset="0"/>
                         <a:ea typeface="Arial" charset="0"/>
                         <a:cs typeface="Arial" charset="0"/>
                       </a:endParaRPr>
                     </a:p>
                   </a:txBody>
-                  <a:tcPr marL="62230" marR="62230" marT="62230" marB="62230" anchor="t">
+                  <a:tcPr marL="62230" marR="62230" marT="62230" marB="62230">
                     <a:lnL w="12700" cap="flat" cmpd="sng" algn="ctr">
                       <a:solidFill>
                         <a:srgbClr val="475165"/>
@@ -9919,14 +10741,14 @@
                     <a:bodyPr/>
                     <a:lstStyle/>
                     <a:p>
-                      <a:pPr indent="0" marL="0">
+                      <a:pPr marL="0" indent="0">
                         <a:lnSpc>
                           <a:spcPts val="1960"/>
                         </a:lnSpc>
                         <a:buNone/>
                       </a:pPr>
                       <a:r>
-                        <a:rPr lang="en-US" sz="1400" b="1" dirty="0">
+                        <a:rPr lang="en-US" sz="1400" b="1">
                           <a:solidFill>
                             <a:srgbClr val="14213D"/>
                           </a:solidFill>
@@ -9936,14 +10758,14 @@
                         </a:rPr>
                         <a:t>Rule in BusTicket</a:t>
                       </a:r>
-                      <a:endParaRPr lang="en-US" sz="1400" dirty="0">
+                      <a:endParaRPr lang="en-US" sz="1400">
                         <a:latin typeface="Arial" charset="0"/>
                         <a:ea typeface="Arial" charset="0"/>
                         <a:cs typeface="Arial" charset="0"/>
                       </a:endParaRPr>
                     </a:p>
                   </a:txBody>
-                  <a:tcPr marL="62230" marR="62230" marT="62230" marB="62230" anchor="t">
+                  <a:tcPr marL="62230" marR="62230" marT="62230" marB="62230">
                     <a:lnL w="12700" cap="flat" cmpd="sng" algn="ctr">
                       <a:solidFill>
                         <a:srgbClr val="F4B769"/>
@@ -9990,14 +10812,14 @@
                     <a:bodyPr/>
                     <a:lstStyle/>
                     <a:p>
-                      <a:pPr indent="0" marL="0">
+                      <a:pPr marL="0" indent="0">
                         <a:lnSpc>
                           <a:spcPts val="1960"/>
                         </a:lnSpc>
                         <a:buNone/>
                       </a:pPr>
                       <a:r>
-                        <a:rPr lang="en-US" sz="1400" b="1" dirty="0">
+                        <a:rPr lang="en-US" sz="1400" b="1">
                           <a:solidFill>
                             <a:srgbClr val="14213D"/>
                           </a:solidFill>
@@ -10007,14 +10829,14 @@
                         </a:rPr>
                         <a:t>Result</a:t>
                       </a:r>
-                      <a:endParaRPr lang="en-US" sz="1400" dirty="0">
+                      <a:endParaRPr lang="en-US" sz="1400">
                         <a:latin typeface="Arial" charset="0"/>
                         <a:ea typeface="Arial" charset="0"/>
                         <a:cs typeface="Arial" charset="0"/>
                       </a:endParaRPr>
                     </a:p>
                   </a:txBody>
-                  <a:tcPr marL="62230" marR="62230" marT="62230" marB="62230" anchor="t">
+                  <a:tcPr marL="62230" marR="62230" marT="62230" marB="62230">
                     <a:lnL w="12700" cap="flat" cmpd="sng" algn="ctr">
                       <a:solidFill>
                         <a:srgbClr val="F4B769"/>
@@ -10056,6 +10878,11 @@
                     </a:solidFill>
                   </a:tcPr>
                 </a:tc>
+                <a:extLst>
+                  <a:ext uri="{0D108BD9-81ED-4DB2-BD59-A6C34878D82A}">
+                    <a16:rowId xmlns:a16="http://schemas.microsoft.com/office/drawing/2014/main" val="10000"/>
+                  </a:ext>
+                </a:extLst>
               </a:tr>
               <a:tr h="383540">
                 <a:tc>
@@ -10063,14 +10890,14 @@
                     <a:bodyPr/>
                     <a:lstStyle/>
                     <a:p>
-                      <a:pPr indent="0" marL="0">
+                      <a:pPr marL="0" indent="0">
                         <a:lnSpc>
                           <a:spcPts val="1960"/>
                         </a:lnSpc>
                         <a:buNone/>
                       </a:pPr>
                       <a:r>
-                        <a:rPr lang="en-US" sz="1400" dirty="0">
+                        <a:rPr lang="en-US" sz="1400">
                           <a:solidFill>
                             <a:srgbClr val="F6F4EE"/>
                           </a:solidFill>
@@ -10080,14 +10907,14 @@
                         </a:rPr>
                         <a:t>Reuse a ticket</a:t>
                       </a:r>
-                      <a:endParaRPr lang="en-US" sz="1400" dirty="0">
+                      <a:endParaRPr lang="en-US" sz="1400">
                         <a:latin typeface="Arial" charset="0"/>
                         <a:ea typeface="Arial" charset="0"/>
                         <a:cs typeface="Arial" charset="0"/>
                       </a:endParaRPr>
                     </a:p>
                   </a:txBody>
-                  <a:tcPr marL="62230" marR="62230" marT="62230" marB="62230" anchor="t">
+                  <a:tcPr marL="62230" marR="62230" marT="62230" marB="62230">
                     <a:lnL w="12700" cap="flat" cmpd="sng" algn="ctr">
                       <a:solidFill>
                         <a:srgbClr val="475165"/>
@@ -10134,14 +10961,14 @@
                     <a:bodyPr/>
                     <a:lstStyle/>
                     <a:p>
-                      <a:pPr indent="0" marL="0">
+                      <a:pPr marL="0" indent="0">
                         <a:lnSpc>
                           <a:spcPts val="1960"/>
                         </a:lnSpc>
                         <a:buNone/>
                       </a:pPr>
                       <a:r>
-                        <a:rPr lang="en-US" sz="1400" dirty="0">
+                        <a:rPr lang="en-US" sz="1400">
                           <a:solidFill>
                             <a:srgbClr val="F6F4EE"/>
                           </a:solidFill>
@@ -10151,14 +10978,14 @@
                         </a:rPr>
                         <a:t>validatedAt[id] ≠ 0 → AlreadyValidated</a:t>
                       </a:r>
-                      <a:endParaRPr lang="en-US" sz="1400" dirty="0">
+                      <a:endParaRPr lang="en-US" sz="1400">
                         <a:latin typeface="Arial" charset="0"/>
                         <a:ea typeface="Arial" charset="0"/>
                         <a:cs typeface="Arial" charset="0"/>
                       </a:endParaRPr>
                     </a:p>
                   </a:txBody>
-                  <a:tcPr marL="62230" marR="62230" marT="62230" marB="62230" anchor="t">
+                  <a:tcPr marL="62230" marR="62230" marT="62230" marB="62230">
                     <a:lnL w="12700" cap="flat" cmpd="sng" algn="ctr">
                       <a:solidFill>
                         <a:srgbClr val="4E5A74"/>
@@ -10205,14 +11032,14 @@
                     <a:bodyPr/>
                     <a:lstStyle/>
                     <a:p>
-                      <a:pPr indent="0" marL="0">
+                      <a:pPr marL="0" indent="0">
                         <a:lnSpc>
                           <a:spcPts val="1960"/>
                         </a:lnSpc>
                         <a:buNone/>
                       </a:pPr>
                       <a:r>
-                        <a:rPr lang="en-US" sz="1400" dirty="0">
+                        <a:rPr lang="en-US" sz="1400">
                           <a:solidFill>
                             <a:srgbClr val="F6F4EE"/>
                           </a:solidFill>
@@ -10222,14 +11049,14 @@
                         </a:rPr>
                         <a:t>One validation per ticket, ever</a:t>
                       </a:r>
-                      <a:endParaRPr lang="en-US" sz="1400" dirty="0">
+                      <a:endParaRPr lang="en-US" sz="1400">
                         <a:latin typeface="Arial" charset="0"/>
                         <a:ea typeface="Arial" charset="0"/>
                         <a:cs typeface="Arial" charset="0"/>
                       </a:endParaRPr>
                     </a:p>
                   </a:txBody>
-                  <a:tcPr marL="62230" marR="62230" marT="62230" marB="62230" anchor="t">
+                  <a:tcPr marL="62230" marR="62230" marT="62230" marB="62230">
                     <a:lnL w="12700" cap="flat" cmpd="sng" algn="ctr">
                       <a:solidFill>
                         <a:srgbClr val="4E5A74"/>
@@ -10271,6 +11098,11 @@
                     </a:solidFill>
                   </a:tcPr>
                 </a:tc>
+                <a:extLst>
+                  <a:ext uri="{0D108BD9-81ED-4DB2-BD59-A6C34878D82A}">
+                    <a16:rowId xmlns:a16="http://schemas.microsoft.com/office/drawing/2014/main" val="10001"/>
+                  </a:ext>
+                </a:extLst>
               </a:tr>
               <a:tr h="383540">
                 <a:tc>
@@ -10278,14 +11110,14 @@
                     <a:bodyPr/>
                     <a:lstStyle/>
                     <a:p>
-                      <a:pPr indent="0" marL="0">
+                      <a:pPr marL="0" indent="0">
                         <a:lnSpc>
                           <a:spcPts val="1960"/>
                         </a:lnSpc>
                         <a:buNone/>
                       </a:pPr>
                       <a:r>
-                        <a:rPr lang="en-US" sz="1400" dirty="0">
+                        <a:rPr lang="en-US" sz="1400">
                           <a:solidFill>
                             <a:srgbClr val="F6F4EE"/>
                           </a:solidFill>
@@ -10295,14 +11127,14 @@
                         </a:rPr>
                         <a:t>Use someone else’s ticket</a:t>
                       </a:r>
-                      <a:endParaRPr lang="en-US" sz="1400" dirty="0">
+                      <a:endParaRPr lang="en-US" sz="1400">
                         <a:latin typeface="Arial" charset="0"/>
                         <a:ea typeface="Arial" charset="0"/>
                         <a:cs typeface="Arial" charset="0"/>
                       </a:endParaRPr>
                     </a:p>
                   </a:txBody>
-                  <a:tcPr marL="62230" marR="62230" marT="62230" marB="62230" anchor="t">
+                  <a:tcPr marL="62230" marR="62230" marT="62230" marB="62230">
                     <a:lnL w="12700" cap="flat" cmpd="sng" algn="ctr">
                       <a:solidFill>
                         <a:srgbClr val="475165"/>
@@ -10349,14 +11181,14 @@
                     <a:bodyPr/>
                     <a:lstStyle/>
                     <a:p>
-                      <a:pPr indent="0" marL="0">
+                      <a:pPr marL="0" indent="0">
                         <a:lnSpc>
                           <a:spcPts val="1960"/>
                         </a:lnSpc>
                         <a:buNone/>
                       </a:pPr>
                       <a:r>
-                        <a:rPr lang="en-US" sz="1400" dirty="0">
+                        <a:rPr lang="en-US" sz="1400">
                           <a:solidFill>
                             <a:srgbClr val="F6F4EE"/>
                           </a:solidFill>
@@ -10366,14 +11198,14 @@
                         </a:rPr>
                         <a:t>ownerOf(id) ≠ sender → NotTicketOwner</a:t>
                       </a:r>
-                      <a:endParaRPr lang="en-US" sz="1400" dirty="0">
+                      <a:endParaRPr lang="en-US" sz="1400">
                         <a:latin typeface="Arial" charset="0"/>
                         <a:ea typeface="Arial" charset="0"/>
                         <a:cs typeface="Arial" charset="0"/>
                       </a:endParaRPr>
                     </a:p>
                   </a:txBody>
-                  <a:tcPr marL="62230" marR="62230" marT="62230" marB="62230" anchor="t">
+                  <a:tcPr marL="62230" marR="62230" marT="62230" marB="62230">
                     <a:lnL w="12700" cap="flat" cmpd="sng" algn="ctr">
                       <a:solidFill>
                         <a:srgbClr val="475165"/>
@@ -10420,14 +11252,14 @@
                     <a:bodyPr/>
                     <a:lstStyle/>
                     <a:p>
-                      <a:pPr indent="0" marL="0">
+                      <a:pPr marL="0" indent="0">
                         <a:lnSpc>
                           <a:spcPts val="1960"/>
                         </a:lnSpc>
                         <a:buNone/>
                       </a:pPr>
                       <a:r>
-                        <a:rPr lang="en-US" sz="1400" dirty="0">
+                        <a:rPr lang="en-US" sz="1400">
                           <a:solidFill>
                             <a:srgbClr val="F6F4EE"/>
                           </a:solidFill>
@@ -10437,14 +11269,14 @@
                         </a:rPr>
                         <a:t>Only the holder can validate</a:t>
                       </a:r>
-                      <a:endParaRPr lang="en-US" sz="1400" dirty="0">
+                      <a:endParaRPr lang="en-US" sz="1400">
                         <a:latin typeface="Arial" charset="0"/>
                         <a:ea typeface="Arial" charset="0"/>
                         <a:cs typeface="Arial" charset="0"/>
                       </a:endParaRPr>
                     </a:p>
                   </a:txBody>
-                  <a:tcPr marL="62230" marR="62230" marT="62230" marB="62230" anchor="t">
+                  <a:tcPr marL="62230" marR="62230" marT="62230" marB="62230">
                     <a:lnL w="12700" cap="flat" cmpd="sng" algn="ctr">
                       <a:solidFill>
                         <a:srgbClr val="475165"/>
@@ -10486,6 +11318,11 @@
                     </a:solidFill>
                   </a:tcPr>
                 </a:tc>
+                <a:extLst>
+                  <a:ext uri="{0D108BD9-81ED-4DB2-BD59-A6C34878D82A}">
+                    <a16:rowId xmlns:a16="http://schemas.microsoft.com/office/drawing/2014/main" val="10002"/>
+                  </a:ext>
+                </a:extLst>
               </a:tr>
               <a:tr h="383540">
                 <a:tc>
@@ -10493,14 +11330,14 @@
                     <a:bodyPr/>
                     <a:lstStyle/>
                     <a:p>
-                      <a:pPr indent="0" marL="0">
+                      <a:pPr marL="0" indent="0">
                         <a:lnSpc>
                           <a:spcPts val="1960"/>
                         </a:lnSpc>
                         <a:buNone/>
                       </a:pPr>
                       <a:r>
-                        <a:rPr lang="en-US" sz="1400" dirty="0">
+                        <a:rPr lang="en-US" sz="1400">
                           <a:solidFill>
                             <a:srgbClr val="F6F4EE"/>
                           </a:solidFill>
@@ -10510,14 +11347,14 @@
                         </a:rPr>
                         <a:t>Hand an active ticket on</a:t>
                       </a:r>
-                      <a:endParaRPr lang="en-US" sz="1400" dirty="0">
+                      <a:endParaRPr lang="en-US" sz="1400">
                         <a:latin typeface="Arial" charset="0"/>
                         <a:ea typeface="Arial" charset="0"/>
                         <a:cs typeface="Arial" charset="0"/>
                       </a:endParaRPr>
                     </a:p>
                   </a:txBody>
-                  <a:tcPr marL="62230" marR="62230" marT="62230" marB="62230" anchor="t">
+                  <a:tcPr marL="62230" marR="62230" marT="62230" marB="62230">
                     <a:lnL w="12700" cap="flat" cmpd="sng" algn="ctr">
                       <a:solidFill>
                         <a:srgbClr val="475165"/>
@@ -10564,14 +11401,14 @@
                     <a:bodyPr/>
                     <a:lstStyle/>
                     <a:p>
-                      <a:pPr indent="0" marL="0">
+                      <a:pPr marL="0" indent="0">
                         <a:lnSpc>
                           <a:spcPts val="1960"/>
                         </a:lnSpc>
                         <a:buNone/>
                       </a:pPr>
                       <a:r>
-                        <a:rPr lang="en-US" sz="1400" dirty="0">
+                        <a:rPr lang="en-US" sz="1400">
                           <a:solidFill>
                             <a:srgbClr val="F6F4EE"/>
                           </a:solidFill>
@@ -10581,14 +11418,14 @@
                         </a:rPr>
                         <a:t>_update hook → TransferAfterValidation</a:t>
                       </a:r>
-                      <a:endParaRPr lang="en-US" sz="1400" dirty="0">
+                      <a:endParaRPr lang="en-US" sz="1400">
                         <a:latin typeface="Arial" charset="0"/>
                         <a:ea typeface="Arial" charset="0"/>
                         <a:cs typeface="Arial" charset="0"/>
                       </a:endParaRPr>
                     </a:p>
                   </a:txBody>
-                  <a:tcPr marL="62230" marR="62230" marT="62230" marB="62230" anchor="t">
+                  <a:tcPr marL="62230" marR="62230" marT="62230" marB="62230">
                     <a:lnL w="12700" cap="flat" cmpd="sng" algn="ctr">
                       <a:solidFill>
                         <a:srgbClr val="4E5A74"/>
@@ -10635,14 +11472,14 @@
                     <a:bodyPr/>
                     <a:lstStyle/>
                     <a:p>
-                      <a:pPr indent="0" marL="0">
+                      <a:pPr marL="0" indent="0">
                         <a:lnSpc>
                           <a:spcPts val="1960"/>
                         </a:lnSpc>
                         <a:buNone/>
                       </a:pPr>
                       <a:r>
-                        <a:rPr lang="en-US" sz="1400" dirty="0">
+                        <a:rPr lang="en-US" sz="1400">
                           <a:solidFill>
                             <a:srgbClr val="F6F4EE"/>
                           </a:solidFill>
@@ -10652,14 +11489,14 @@
                         </a:rPr>
                         <a:t>Validated tickets stay with the rider</a:t>
                       </a:r>
-                      <a:endParaRPr lang="en-US" sz="1400" dirty="0">
+                      <a:endParaRPr lang="en-US" sz="1400">
                         <a:latin typeface="Arial" charset="0"/>
                         <a:ea typeface="Arial" charset="0"/>
                         <a:cs typeface="Arial" charset="0"/>
                       </a:endParaRPr>
                     </a:p>
                   </a:txBody>
-                  <a:tcPr marL="62230" marR="62230" marT="62230" marB="62230" anchor="t">
+                  <a:tcPr marL="62230" marR="62230" marT="62230" marB="62230">
                     <a:lnL w="12700" cap="flat" cmpd="sng" algn="ctr">
                       <a:solidFill>
                         <a:srgbClr val="4E5A74"/>
@@ -10701,6 +11538,11 @@
                     </a:solidFill>
                   </a:tcPr>
                 </a:tc>
+                <a:extLst>
+                  <a:ext uri="{0D108BD9-81ED-4DB2-BD59-A6C34878D82A}">
+                    <a16:rowId xmlns:a16="http://schemas.microsoft.com/office/drawing/2014/main" val="10003"/>
+                  </a:ext>
+                </a:extLst>
               </a:tr>
               <a:tr h="383540">
                 <a:tc>
@@ -10708,14 +11550,14 @@
                     <a:bodyPr/>
                     <a:lstStyle/>
                     <a:p>
-                      <a:pPr indent="0" marL="0">
+                      <a:pPr marL="0" indent="0">
                         <a:lnSpc>
                           <a:spcPts val="1960"/>
                         </a:lnSpc>
                         <a:buNone/>
                       </a:pPr>
                       <a:r>
-                        <a:rPr lang="en-US" sz="1400" dirty="0">
+                        <a:rPr lang="en-US" sz="1400">
                           <a:solidFill>
                             <a:srgbClr val="F6F4EE"/>
                           </a:solidFill>
@@ -10725,14 +11567,14 @@
                         </a:rPr>
                         <a:t>Forge or edit a ticket</a:t>
                       </a:r>
-                      <a:endParaRPr lang="en-US" sz="1400" dirty="0">
+                      <a:endParaRPr lang="en-US" sz="1400">
                         <a:latin typeface="Arial" charset="0"/>
                         <a:ea typeface="Arial" charset="0"/>
                         <a:cs typeface="Arial" charset="0"/>
                       </a:endParaRPr>
                     </a:p>
                   </a:txBody>
-                  <a:tcPr marL="62230" marR="62230" marT="62230" marB="62230" anchor="t">
+                  <a:tcPr marL="62230" marR="62230" marT="62230" marB="62230">
                     <a:lnL w="12700" cap="flat" cmpd="sng" algn="ctr">
                       <a:solidFill>
                         <a:srgbClr val="475165"/>
@@ -10779,14 +11621,14 @@
                     <a:bodyPr/>
                     <a:lstStyle/>
                     <a:p>
-                      <a:pPr indent="0" marL="0">
+                      <a:pPr marL="0" indent="0">
                         <a:lnSpc>
                           <a:spcPts val="1960"/>
                         </a:lnSpc>
                         <a:buNone/>
                       </a:pPr>
                       <a:r>
-                        <a:rPr lang="en-US" sz="1400" dirty="0">
+                        <a:rPr lang="en-US" sz="1400">
                           <a:solidFill>
                             <a:srgbClr val="F6F4EE"/>
                           </a:solidFill>
@@ -10796,14 +11638,14 @@
                         </a:rPr>
                         <a:t>State lives only on chain, readable by all</a:t>
                       </a:r>
-                      <a:endParaRPr lang="en-US" sz="1400" dirty="0">
+                      <a:endParaRPr lang="en-US" sz="1400">
                         <a:latin typeface="Arial" charset="0"/>
                         <a:ea typeface="Arial" charset="0"/>
                         <a:cs typeface="Arial" charset="0"/>
                       </a:endParaRPr>
                     </a:p>
                   </a:txBody>
-                  <a:tcPr marL="62230" marR="62230" marT="62230" marB="62230" anchor="t">
+                  <a:tcPr marL="62230" marR="62230" marT="62230" marB="62230">
                     <a:lnL w="12700" cap="flat" cmpd="sng" algn="ctr">
                       <a:solidFill>
                         <a:srgbClr val="475165"/>
@@ -10850,14 +11692,14 @@
                     <a:bodyPr/>
                     <a:lstStyle/>
                     <a:p>
-                      <a:pPr indent="0" marL="0">
+                      <a:pPr marL="0" indent="0">
                         <a:lnSpc>
                           <a:spcPts val="1960"/>
                         </a:lnSpc>
                         <a:buNone/>
                       </a:pPr>
                       <a:r>
-                        <a:rPr lang="en-US" sz="1400" dirty="0">
+                        <a:rPr lang="en-US" sz="1400">
                           <a:solidFill>
                             <a:srgbClr val="F6F4EE"/>
                           </a:solidFill>
@@ -10867,14 +11709,14 @@
                         </a:rPr>
                         <a:t>A copy can’t pass isValid()</a:t>
                       </a:r>
-                      <a:endParaRPr lang="en-US" sz="1400" dirty="0">
+                      <a:endParaRPr lang="en-US" sz="1400">
                         <a:latin typeface="Arial" charset="0"/>
                         <a:ea typeface="Arial" charset="0"/>
                         <a:cs typeface="Arial" charset="0"/>
                       </a:endParaRPr>
                     </a:p>
                   </a:txBody>
-                  <a:tcPr marL="62230" marR="62230" marT="62230" marB="62230" anchor="t">
+                  <a:tcPr marL="62230" marR="62230" marT="62230" marB="62230">
                     <a:lnL w="12700" cap="flat" cmpd="sng" algn="ctr">
                       <a:solidFill>
                         <a:srgbClr val="475165"/>
@@ -10916,6 +11758,11 @@
                     </a:solidFill>
                   </a:tcPr>
                 </a:tc>
+                <a:extLst>
+                  <a:ext uri="{0D108BD9-81ED-4DB2-BD59-A6C34878D82A}">
+                    <a16:rowId xmlns:a16="http://schemas.microsoft.com/office/drawing/2014/main" val="10004"/>
+                  </a:ext>
+                </a:extLst>
               </a:tr>
               <a:tr h="383540">
                 <a:tc>
@@ -10923,14 +11770,14 @@
                     <a:bodyPr/>
                     <a:lstStyle/>
                     <a:p>
-                      <a:pPr indent="0" marL="0">
+                      <a:pPr marL="0" indent="0">
                         <a:lnSpc>
                           <a:spcPts val="1960"/>
                         </a:lnSpc>
                         <a:buNone/>
                       </a:pPr>
                       <a:r>
-                        <a:rPr lang="en-US" sz="1400" dirty="0">
+                        <a:rPr lang="en-US" sz="1400">
                           <a:solidFill>
                             <a:srgbClr val="F6F4EE"/>
                           </a:solidFill>
@@ -10940,14 +11787,14 @@
                         </a:rPr>
                         <a:t>Ride without paying</a:t>
                       </a:r>
-                      <a:endParaRPr lang="en-US" sz="1400" dirty="0">
+                      <a:endParaRPr lang="en-US" sz="1400">
                         <a:latin typeface="Arial" charset="0"/>
                         <a:ea typeface="Arial" charset="0"/>
                         <a:cs typeface="Arial" charset="0"/>
                       </a:endParaRPr>
                     </a:p>
                   </a:txBody>
-                  <a:tcPr marL="62230" marR="62230" marT="62230" marB="62230" anchor="t">
+                  <a:tcPr marL="62230" marR="62230" marT="62230" marB="62230">
                     <a:lnL w="12700" cap="flat" cmpd="sng" algn="ctr">
                       <a:solidFill>
                         <a:srgbClr val="475165"/>
@@ -10994,14 +11841,14 @@
                     <a:bodyPr/>
                     <a:lstStyle/>
                     <a:p>
-                      <a:pPr indent="0" marL="0">
+                      <a:pPr marL="0" indent="0">
                         <a:lnSpc>
                           <a:spcPts val="1960"/>
                         </a:lnSpc>
                         <a:buNone/>
                       </a:pPr>
                       <a:r>
-                        <a:rPr lang="en-US" sz="1400" dirty="0">
+                        <a:rPr lang="en-US" sz="1400">
                           <a:solidFill>
                             <a:srgbClr val="F6F4EE"/>
                           </a:solidFill>
@@ -11011,14 +11858,14 @@
                         </a:rPr>
                         <a:t>safeTransferFrom before _mint (SafeERC20)</a:t>
                       </a:r>
-                      <a:endParaRPr lang="en-US" sz="1400" dirty="0">
+                      <a:endParaRPr lang="en-US" sz="1400">
                         <a:latin typeface="Arial" charset="0"/>
                         <a:ea typeface="Arial" charset="0"/>
                         <a:cs typeface="Arial" charset="0"/>
                       </a:endParaRPr>
                     </a:p>
                   </a:txBody>
-                  <a:tcPr marL="62230" marR="62230" marT="62230" marB="62230" anchor="t">
+                  <a:tcPr marL="62230" marR="62230" marT="62230" marB="62230">
                     <a:lnL w="12700" cap="flat" cmpd="sng" algn="ctr">
                       <a:solidFill>
                         <a:srgbClr val="4E5A74"/>
@@ -11065,14 +11912,14 @@
                     <a:bodyPr/>
                     <a:lstStyle/>
                     <a:p>
-                      <a:pPr indent="0" marL="0">
+                      <a:pPr marL="0" indent="0">
                         <a:lnSpc>
                           <a:spcPts val="1960"/>
                         </a:lnSpc>
                         <a:buNone/>
                       </a:pPr>
                       <a:r>
-                        <a:rPr lang="en-US" sz="1400" dirty="0">
+                        <a:rPr lang="en-US" sz="1400">
                           <a:solidFill>
                             <a:srgbClr val="F6F4EE"/>
                           </a:solidFill>
@@ -11082,14 +11929,14 @@
                         </a:rPr>
                         <a:t>No payment, no ticket</a:t>
                       </a:r>
-                      <a:endParaRPr lang="en-US" sz="1400" dirty="0">
+                      <a:endParaRPr lang="en-US" sz="1400">
                         <a:latin typeface="Arial" charset="0"/>
                         <a:ea typeface="Arial" charset="0"/>
                         <a:cs typeface="Arial" charset="0"/>
                       </a:endParaRPr>
                     </a:p>
                   </a:txBody>
-                  <a:tcPr marL="62230" marR="62230" marT="62230" marB="62230" anchor="t">
+                  <a:tcPr marL="62230" marR="62230" marT="62230" marB="62230">
                     <a:lnL w="12700" cap="flat" cmpd="sng" algn="ctr">
                       <a:solidFill>
                         <a:srgbClr val="4E5A74"/>
@@ -11131,6 +11978,11 @@
                     </a:solidFill>
                   </a:tcPr>
                 </a:tc>
+                <a:extLst>
+                  <a:ext uri="{0D108BD9-81ED-4DB2-BD59-A6C34878D82A}">
+                    <a16:rowId xmlns:a16="http://schemas.microsoft.com/office/drawing/2014/main" val="10005"/>
+                  </a:ext>
+                </a:extLst>
               </a:tr>
               <a:tr h="383540">
                 <a:tc>
@@ -11138,14 +11990,14 @@
                     <a:bodyPr/>
                     <a:lstStyle/>
                     <a:p>
-                      <a:pPr indent="0" marL="0">
+                      <a:pPr marL="0" indent="0">
                         <a:lnSpc>
                           <a:spcPts val="1960"/>
                         </a:lnSpc>
                         <a:buNone/>
                       </a:pPr>
                       <a:r>
-                        <a:rPr lang="en-US" sz="1400" dirty="0">
+                        <a:rPr lang="en-US" sz="1400">
                           <a:solidFill>
                             <a:srgbClr val="F6F4EE"/>
                           </a:solidFill>
@@ -11155,14 +12007,14 @@
                         </a:rPr>
                         <a:t>Take the revenue</a:t>
                       </a:r>
-                      <a:endParaRPr lang="en-US" sz="1400" dirty="0">
+                      <a:endParaRPr lang="en-US" sz="1400">
                         <a:latin typeface="Arial" charset="0"/>
                         <a:ea typeface="Arial" charset="0"/>
                         <a:cs typeface="Arial" charset="0"/>
                       </a:endParaRPr>
                     </a:p>
                   </a:txBody>
-                  <a:tcPr marL="62230" marR="62230" marT="62230" marB="62230" anchor="t">
+                  <a:tcPr marL="62230" marR="62230" marT="62230" marB="62230">
                     <a:lnL w="12700" cap="flat" cmpd="sng" algn="ctr">
                       <a:solidFill>
                         <a:srgbClr val="475165"/>
@@ -11209,14 +12061,14 @@
                     <a:bodyPr/>
                     <a:lstStyle/>
                     <a:p>
-                      <a:pPr indent="0" marL="0">
+                      <a:pPr marL="0" indent="0">
                         <a:lnSpc>
                           <a:spcPts val="1960"/>
                         </a:lnSpc>
                         <a:buNone/>
                       </a:pPr>
                       <a:r>
-                        <a:rPr lang="en-US" sz="1400" dirty="0">
+                        <a:rPr lang="en-US" sz="1400">
                           <a:solidFill>
                             <a:srgbClr val="F6F4EE"/>
                           </a:solidFill>
@@ -11226,14 +12078,14 @@
                         </a:rPr>
                         <a:t>withdraw() is onlyOwner</a:t>
                       </a:r>
-                      <a:endParaRPr lang="en-US" sz="1400" dirty="0">
+                      <a:endParaRPr lang="en-US" sz="1400">
                         <a:latin typeface="Arial" charset="0"/>
                         <a:ea typeface="Arial" charset="0"/>
                         <a:cs typeface="Arial" charset="0"/>
                       </a:endParaRPr>
                     </a:p>
                   </a:txBody>
-                  <a:tcPr marL="62230" marR="62230" marT="62230" marB="62230" anchor="t">
+                  <a:tcPr marL="62230" marR="62230" marT="62230" marB="62230">
                     <a:lnL w="12700" cap="flat" cmpd="sng" algn="ctr">
                       <a:solidFill>
                         <a:srgbClr val="475165"/>
@@ -11280,14 +12132,14 @@
                     <a:bodyPr/>
                     <a:lstStyle/>
                     <a:p>
-                      <a:pPr indent="0" marL="0">
+                      <a:pPr marL="0" indent="0">
                         <a:lnSpc>
                           <a:spcPts val="1960"/>
                         </a:lnSpc>
                         <a:buNone/>
                       </a:pPr>
                       <a:r>
-                        <a:rPr lang="en-US" sz="1400" dirty="0">
+                        <a:rPr lang="en-US" sz="1400">
                           <a:solidFill>
                             <a:srgbClr val="F6F4EE"/>
                           </a:solidFill>
@@ -11297,14 +12149,14 @@
                         </a:rPr>
                         <a:t>Only the operator collects</a:t>
                       </a:r>
-                      <a:endParaRPr lang="en-US" sz="1400" dirty="0">
+                      <a:endParaRPr lang="en-US" sz="1400">
                         <a:latin typeface="Arial" charset="0"/>
                         <a:ea typeface="Arial" charset="0"/>
                         <a:cs typeface="Arial" charset="0"/>
                       </a:endParaRPr>
                     </a:p>
                   </a:txBody>
-                  <a:tcPr marL="62230" marR="62230" marT="62230" marB="62230" anchor="t">
+                  <a:tcPr marL="62230" marR="62230" marT="62230" marB="62230">
                     <a:lnL w="12700" cap="flat" cmpd="sng" algn="ctr">
                       <a:solidFill>
                         <a:srgbClr val="475165"/>
@@ -11346,6 +12198,11 @@
                     </a:solidFill>
                   </a:tcPr>
                 </a:tc>
+                <a:extLst>
+                  <a:ext uri="{0D108BD9-81ED-4DB2-BD59-A6C34878D82A}">
+                    <a16:rowId xmlns:a16="http://schemas.microsoft.com/office/drawing/2014/main" val="10006"/>
+                  </a:ext>
+                </a:extLst>
               </a:tr>
             </a:tbl>
           </a:graphicData>
@@ -11374,14 +12231,14 @@
           </a:bodyPr>
           <a:lstStyle/>
           <a:p>
-            <a:pPr algn="l" indent="0" marL="0">
+            <a:pPr marL="0" indent="0" algn="l">
               <a:lnSpc>
                 <a:spcPts val="1680"/>
               </a:lnSpc>
               <a:buNone/>
             </a:pPr>
             <a:r>
-              <a:rPr lang="en-US" sz="1200" dirty="0">
+              <a:rPr lang="en-US" sz="1200">
                 <a:solidFill>
                   <a:srgbClr val="C9D3E3"/>
                 </a:solidFill>
@@ -11391,7 +12248,7 @@
               </a:rPr>
               <a:t>These rules are exercised by the 14 Solidity unit tests in BusTicket.t.sol.</a:t>
             </a:r>
-            <a:endParaRPr lang="en-US" sz="1200" dirty="0"/>
+            <a:endParaRPr lang="en-US" sz="1200"/>
           </a:p>
         </p:txBody>
       </p:sp>
@@ -11411,6 +12268,7 @@
         <a:solidFill>
           <a:srgbClr val="F6F4EE"/>
         </a:solidFill>
+        <a:effectLst/>
       </p:bgPr>
     </p:bg>
     <p:spTree>
@@ -11450,14 +12308,14 @@
           </a:bodyPr>
           <a:lstStyle/>
           <a:p>
-            <a:pPr algn="l" indent="0" marL="0">
+            <a:pPr marL="0" indent="0" algn="l">
               <a:lnSpc>
                 <a:spcPts val="1680"/>
               </a:lnSpc>
               <a:buNone/>
             </a:pPr>
             <a:r>
-              <a:rPr lang="en-US" sz="1200" b="1" spc="150" kern="0" dirty="0">
+              <a:rPr lang="en-US" sz="1200" b="1" kern="0" spc="150">
                 <a:solidFill>
                   <a:srgbClr val="B86E12"/>
                 </a:solidFill>
@@ -11467,7 +12325,7 @@
               </a:rPr>
               <a:t>DATA MINIMISATION</a:t>
             </a:r>
-            <a:endParaRPr lang="en-US" sz="1200" dirty="0"/>
+            <a:endParaRPr lang="en-US" sz="1200"/>
           </a:p>
         </p:txBody>
       </p:sp>
@@ -11494,14 +12352,14 @@
           </a:bodyPr>
           <a:lstStyle/>
           <a:p>
-            <a:pPr algn="l" indent="0" marL="0">
+            <a:pPr marL="0" indent="0" algn="l">
               <a:lnSpc>
                 <a:spcPts val="3960"/>
               </a:lnSpc>
               <a:buNone/>
             </a:pPr>
             <a:r>
-              <a:rPr lang="en-US" sz="3600" b="1" dirty="0">
+              <a:rPr lang="en-US" sz="3600" b="1">
                 <a:solidFill>
                   <a:srgbClr val="14213D"/>
                 </a:solidFill>
@@ -11511,7 +12369,7 @@
               </a:rPr>
               <a:t>What the chain knows about a rider</a:t>
             </a:r>
-            <a:endParaRPr lang="en-US" sz="3600" dirty="0"/>
+            <a:endParaRPr lang="en-US" sz="3600"/>
           </a:p>
         </p:txBody>
       </p:sp>
@@ -11544,15 +12402,15 @@
       </p:sp>
       <p:pic>
         <p:nvPicPr>
-          <p:cNvPr id="5" name="Image 0" descr="CheckCircle">    </p:cNvPr>
+          <p:cNvPr id="5" name="Image 0" descr="CheckCircle"/>
           <p:cNvPicPr>
             <a:picLocks noChangeAspect="1"/>
           </p:cNvPicPr>
           <p:nvPr/>
         </p:nvPicPr>
         <p:blipFill>
-          <a:blip r:embed="rId1"/>
-          <a:srcRect l="0" r="0" t="0" b="0"/>
+          <a:blip r:embed="rId3"/>
+          <a:srcRect/>
           <a:stretch/>
         </p:blipFill>
         <p:spPr>
@@ -11588,14 +12446,14 @@
           </a:bodyPr>
           <a:lstStyle/>
           <a:p>
-            <a:pPr algn="l" indent="0" marL="0">
+            <a:pPr marL="0" indent="0" algn="l">
               <a:lnSpc>
                 <a:spcPts val="2640"/>
               </a:lnSpc>
               <a:buNone/>
             </a:pPr>
             <a:r>
-              <a:rPr lang="en-US" sz="2200" b="1" dirty="0">
+              <a:rPr lang="en-US" sz="2200" b="1">
                 <a:solidFill>
                   <a:srgbClr val="14213D"/>
                 </a:solidFill>
@@ -11605,7 +12463,7 @@
               </a:rPr>
               <a:t>Stored by our contract</a:t>
             </a:r>
-            <a:endParaRPr lang="en-US" sz="2200" dirty="0"/>
+            <a:endParaRPr lang="en-US" sz="2200"/>
           </a:p>
         </p:txBody>
       </p:sp>
@@ -11632,7 +12490,7 @@
           </a:bodyPr>
           <a:lstStyle/>
           <a:p>
-            <a:pPr algn="l" marL="177292" indent="-177292">
+            <a:pPr marL="177292" indent="-177292" algn="l">
               <a:lnSpc>
                 <a:spcPts val="2400"/>
               </a:lnSpc>
@@ -11640,7 +12498,7 @@
               <a:buChar char="•"/>
             </a:pPr>
             <a:r>
-              <a:rPr lang="en-US" sz="1600" dirty="0">
+              <a:rPr lang="en-US" sz="1600">
                 <a:solidFill>
                   <a:srgbClr val="4A5568"/>
                 </a:solidFill>
@@ -11650,10 +12508,10 @@
               </a:rPr>
               <a:t>One timestamp per ticket: when it was validated</a:t>
             </a:r>
-            <a:endParaRPr lang="en-US" sz="1600" dirty="0"/>
-          </a:p>
-          <a:p>
-            <a:pPr algn="l" marL="177292" indent="-177292">
+            <a:endParaRPr lang="en-US" sz="1600"/>
+          </a:p>
+          <a:p>
+            <a:pPr marL="177292" indent="-177292" algn="l">
               <a:lnSpc>
                 <a:spcPts val="2400"/>
               </a:lnSpc>
@@ -11661,7 +12519,7 @@
               <a:buChar char="•"/>
             </a:pPr>
             <a:r>
-              <a:rPr lang="en-US" sz="1600" dirty="0">
+              <a:rPr lang="en-US" sz="1600">
                 <a:solidFill>
                   <a:srgbClr val="4A5568"/>
                 </a:solidFill>
@@ -11671,7 +12529,7 @@
               </a:rPr>
               <a:t>Events with ticket IDs only, no addresses</a:t>
             </a:r>
-            <a:endParaRPr lang="en-US" sz="1600" dirty="0"/>
+            <a:endParaRPr lang="en-US" sz="1600"/>
           </a:p>
         </p:txBody>
       </p:sp>
@@ -11704,15 +12562,15 @@
       </p:sp>
       <p:pic>
         <p:nvPicPr>
-          <p:cNvPr id="9" name="Image 1" descr="Globe">    </p:cNvPr>
+          <p:cNvPr id="9" name="Image 1" descr="Globe"/>
           <p:cNvPicPr>
             <a:picLocks noChangeAspect="1"/>
           </p:cNvPicPr>
           <p:nvPr/>
         </p:nvPicPr>
         <p:blipFill>
-          <a:blip r:embed="rId2"/>
-          <a:srcRect l="0" r="0" t="0" b="0"/>
+          <a:blip r:embed="rId4"/>
+          <a:srcRect/>
           <a:stretch/>
         </p:blipFill>
         <p:spPr>
@@ -11748,14 +12606,14 @@
           </a:bodyPr>
           <a:lstStyle/>
           <a:p>
-            <a:pPr algn="l" indent="0" marL="0">
+            <a:pPr marL="0" indent="0" algn="l">
               <a:lnSpc>
                 <a:spcPts val="2640"/>
               </a:lnSpc>
               <a:buNone/>
             </a:pPr>
             <a:r>
-              <a:rPr lang="en-US" sz="2200" b="1" dirty="0">
+              <a:rPr lang="en-US" sz="2200" b="1">
                 <a:solidFill>
                   <a:srgbClr val="14213D"/>
                 </a:solidFill>
@@ -11765,7 +12623,7 @@
               </a:rPr>
               <a:t>Public by design</a:t>
             </a:r>
-            <a:endParaRPr lang="en-US" sz="2200" dirty="0"/>
+            <a:endParaRPr lang="en-US" sz="2200"/>
           </a:p>
         </p:txBody>
       </p:sp>
@@ -11792,7 +12650,7 @@
           </a:bodyPr>
           <a:lstStyle/>
           <a:p>
-            <a:pPr algn="l" marL="177292" indent="-177292">
+            <a:pPr marL="177292" indent="-177292" algn="l">
               <a:lnSpc>
                 <a:spcPts val="2400"/>
               </a:lnSpc>
@@ -11800,7 +12658,7 @@
               <a:buChar char="•"/>
             </a:pPr>
             <a:r>
-              <a:rPr lang="en-US" sz="1600" dirty="0">
+              <a:rPr lang="en-US" sz="1600">
                 <a:solidFill>
                   <a:srgbClr val="4A5568"/>
                 </a:solidFill>
@@ -11810,10 +12668,10 @@
               </a:rPr>
               <a:t>Which address owns a ticket (ERC-721)</a:t>
             </a:r>
-            <a:endParaRPr lang="en-US" sz="1600" dirty="0"/>
-          </a:p>
-          <a:p>
-            <a:pPr algn="l" marL="177292" indent="-177292">
+            <a:endParaRPr lang="en-US" sz="1600"/>
+          </a:p>
+          <a:p>
+            <a:pPr marL="177292" indent="-177292" algn="l">
               <a:lnSpc>
                 <a:spcPts val="2400"/>
               </a:lnSpc>
@@ -11821,7 +12679,7 @@
               <a:buChar char="•"/>
             </a:pPr>
             <a:r>
-              <a:rPr lang="en-US" sz="1600" dirty="0">
+              <a:rPr lang="en-US" sz="1600">
                 <a:solidFill>
                   <a:srgbClr val="4A5568"/>
                 </a:solidFill>
@@ -11831,10 +12689,10 @@
               </a:rPr>
               <a:t>Payments between addresses (ERC-20)</a:t>
             </a:r>
-            <a:endParaRPr lang="en-US" sz="1600" dirty="0"/>
-          </a:p>
-          <a:p>
-            <a:pPr algn="l" marL="177292" indent="-177292">
+            <a:endParaRPr lang="en-US" sz="1600"/>
+          </a:p>
+          <a:p>
+            <a:pPr marL="177292" indent="-177292" algn="l">
               <a:lnSpc>
                 <a:spcPts val="2400"/>
               </a:lnSpc>
@@ -11842,7 +12700,7 @@
               <a:buChar char="•"/>
             </a:pPr>
             <a:r>
-              <a:rPr lang="en-US" sz="1600" dirty="0">
+              <a:rPr lang="en-US" sz="1600">
                 <a:solidFill>
                   <a:srgbClr val="4A5568"/>
                 </a:solidFill>
@@ -11852,85 +12710,7 @@
               </a:rPr>
               <a:t>Who sent each transaction</a:t>
             </a:r>
-            <a:endParaRPr lang="en-US" sz="1600" dirty="0"/>
-          </a:p>
-        </p:txBody>
-      </p:sp>
-      <p:sp>
-        <p:nvSpPr>
-          <p:cNvPr id="12" name="Shape 8"/>
-          <p:cNvSpPr/>
-          <p:nvPr/>
-        </p:nvSpPr>
-        <p:spPr>
-          <a:xfrm>
-            <a:off x="831850" y="5659121"/>
-            <a:ext cx="0" cy="386080"/>
-          </a:xfrm>
-          <a:prstGeom prst="line">
-            <a:avLst/>
-          </a:prstGeom>
-          <a:noFill/>
-          <a:ln w="38100">
-            <a:solidFill>
-              <a:srgbClr val="F2A541"/>
-            </a:solidFill>
-            <a:prstDash val="solid"/>
-          </a:ln>
-        </p:spPr>
-      </p:sp>
-      <p:sp>
-        <p:nvSpPr>
-          <p:cNvPr id="13" name="Text 9"/>
-          <p:cNvSpPr/>
-          <p:nvPr/>
-        </p:nvSpPr>
-        <p:spPr>
-          <a:xfrm>
-            <a:off x="1051560" y="5709921"/>
-            <a:ext cx="8890747" cy="309880"/>
-          </a:xfrm>
-          <a:prstGeom prst="rect">
-            <a:avLst/>
-          </a:prstGeom>
-          <a:noFill/>
-          <a:ln/>
-        </p:spPr>
-        <p:txBody>
-          <a:bodyPr wrap="square" lIns="0" tIns="0" rIns="0" bIns="0" rtlCol="0" anchor="t">
-            <a:normAutofit/>
-          </a:bodyPr>
-          <a:lstStyle/>
-          <a:p>
-            <a:pPr algn="l" indent="0" marL="0">
-              <a:lnSpc>
-                <a:spcPts val="2240"/>
-              </a:lnSpc>
-              <a:buNone/>
-            </a:pPr>
-            <a:r>
-              <a:rPr lang="en-US" sz="1600" b="1" dirty="0">
-                <a:solidFill>
-                  <a:srgbClr val="14213D"/>
-                </a:solidFill>
-                <a:latin typeface="Arial" pitchFamily="34" charset="0"/>
-                <a:ea typeface="Arial" pitchFamily="34" charset="-122"/>
-                <a:cs typeface="Arial" pitchFamily="34" charset="-120"/>
-              </a:rPr>
-              <a:t>No personal data goes on chain.</a:t>
-            </a:r>
-            <a:r>
-              <a:rPr lang="en-US" sz="1600" dirty="0">
-                <a:solidFill>
-                  <a:srgbClr val="14213D"/>
-                </a:solidFill>
-                <a:latin typeface="Arial" pitchFamily="34" charset="0"/>
-                <a:ea typeface="Arial" pitchFamily="34" charset="-122"/>
-                <a:cs typeface="Arial" pitchFamily="34" charset="-120"/>
-              </a:rPr>
-              <a:t> Today’s mitigation: riders use a fresh address for each ticket.</a:t>
-            </a:r>
-            <a:endParaRPr lang="en-US" sz="1600" dirty="0"/>
+            <a:endParaRPr lang="en-US" sz="1600"/>
           </a:p>
         </p:txBody>
       </p:sp>
@@ -11950,6 +12730,7 @@
         <a:solidFill>
           <a:srgbClr val="14213D"/>
         </a:solidFill>
+        <a:effectLst/>
       </p:bgPr>
     </p:bg>
     <p:spTree>
@@ -11989,14 +12770,14 @@
           </a:bodyPr>
           <a:lstStyle/>
           <a:p>
-            <a:pPr algn="l" indent="0" marL="0">
+            <a:pPr marL="0" indent="0" algn="l">
               <a:lnSpc>
                 <a:spcPts val="1680"/>
               </a:lnSpc>
               <a:buNone/>
             </a:pPr>
             <a:r>
-              <a:rPr lang="en-US" sz="1200" b="1" spc="150" kern="0" dirty="0">
+              <a:rPr lang="en-US" sz="1200" b="1" kern="0" spc="150">
                 <a:solidFill>
                   <a:srgbClr val="F2A541"/>
                 </a:solidFill>
@@ -12006,7 +12787,7 @@
               </a:rPr>
               <a:t>THE PROTOTYPE</a:t>
             </a:r>
-            <a:endParaRPr lang="en-US" sz="1200" dirty="0"/>
+            <a:endParaRPr lang="en-US" sz="1200"/>
           </a:p>
         </p:txBody>
       </p:sp>
@@ -12033,14 +12814,14 @@
           </a:bodyPr>
           <a:lstStyle/>
           <a:p>
-            <a:pPr algn="l" indent="0" marL="0">
+            <a:pPr marL="0" indent="0" algn="l">
               <a:lnSpc>
                 <a:spcPts val="3960"/>
               </a:lnSpc>
               <a:buNone/>
             </a:pPr>
             <a:r>
-              <a:rPr lang="en-US" sz="3600" b="1" dirty="0">
+              <a:rPr lang="en-US" sz="3600" b="1">
                 <a:solidFill>
                   <a:srgbClr val="F6F4EE"/>
                 </a:solidFill>
@@ -12050,7 +12831,7 @@
               </a:rPr>
               <a:t>What we built</a:t>
             </a:r>
-            <a:endParaRPr lang="en-US" sz="3600" dirty="0"/>
+            <a:endParaRPr lang="en-US" sz="3600"/>
           </a:p>
         </p:txBody>
       </p:sp>
@@ -12077,14 +12858,14 @@
           </a:bodyPr>
           <a:lstStyle/>
           <a:p>
-            <a:pPr algn="l" indent="0" marL="0">
+            <a:pPr marL="0" indent="0" algn="l">
               <a:lnSpc>
                 <a:spcPts val="12000"/>
               </a:lnSpc>
               <a:buNone/>
             </a:pPr>
             <a:r>
-              <a:rPr lang="en-US" sz="12000" b="1" dirty="0">
+              <a:rPr lang="en-US" sz="12000" b="1">
                 <a:solidFill>
                   <a:srgbClr val="F2A541"/>
                 </a:solidFill>
@@ -12094,7 +12875,7 @@
               </a:rPr>
               <a:t>14</a:t>
             </a:r>
-            <a:endParaRPr lang="en-US" sz="12000" dirty="0"/>
+            <a:endParaRPr lang="en-US" sz="12000"/>
           </a:p>
         </p:txBody>
       </p:sp>
@@ -12121,14 +12902,14 @@
           </a:bodyPr>
           <a:lstStyle/>
           <a:p>
-            <a:pPr algn="l" indent="0" marL="0">
+            <a:pPr marL="0" indent="0" algn="l">
               <a:lnSpc>
                 <a:spcPts val="2240"/>
               </a:lnSpc>
               <a:buNone/>
             </a:pPr>
             <a:r>
-              <a:rPr lang="en-US" sz="1600" dirty="0">
+              <a:rPr lang="en-US" sz="1600">
                 <a:solidFill>
                   <a:srgbClr val="C9D3E3"/>
                 </a:solidFill>
@@ -12138,7 +12919,7 @@
               </a:rPr>
               <a:t>Solidity unit tests: buying, validation, expiry, transfers and withdrawal</a:t>
             </a:r>
-            <a:endParaRPr lang="en-US" sz="1600" dirty="0"/>
+            <a:endParaRPr lang="en-US" sz="1600"/>
           </a:p>
         </p:txBody>
       </p:sp>
@@ -12188,14 +12969,14 @@
           </a:bodyPr>
           <a:lstStyle/>
           <a:p>
-            <a:pPr algn="l" indent="0" marL="0">
+            <a:pPr marL="0" indent="0" algn="l">
               <a:lnSpc>
                 <a:spcPts val="2240"/>
               </a:lnSpc>
               <a:buNone/>
             </a:pPr>
             <a:r>
-              <a:rPr lang="en-US" sz="1600" b="1" dirty="0">
+              <a:rPr lang="en-US" sz="1600" b="1">
                 <a:solidFill>
                   <a:srgbClr val="F6F4EE"/>
                 </a:solidFill>
@@ -12205,7 +12986,7 @@
               </a:rPr>
               <a:t>Contracts</a:t>
             </a:r>
-            <a:endParaRPr lang="en-US" sz="1600" dirty="0"/>
+            <a:endParaRPr lang="en-US" sz="1600"/>
           </a:p>
         </p:txBody>
       </p:sp>
@@ -12232,14 +13013,14 @@
           </a:bodyPr>
           <a:lstStyle/>
           <a:p>
-            <a:pPr algn="l" indent="0" marL="0">
+            <a:pPr marL="0" indent="0" algn="l">
               <a:lnSpc>
                 <a:spcPts val="2240"/>
               </a:lnSpc>
               <a:buNone/>
             </a:pPr>
             <a:r>
-              <a:rPr lang="en-US" sz="1600" dirty="0">
+              <a:rPr lang="en-US" sz="1600">
                 <a:solidFill>
                   <a:srgbClr val="C9D3E3"/>
                 </a:solidFill>
@@ -12249,7 +13030,7 @@
               </a:rPr>
               <a:t>BusTicket.sol and MockEURC.sol</a:t>
             </a:r>
-            <a:endParaRPr lang="en-US" sz="1600" dirty="0"/>
+            <a:endParaRPr lang="en-US" sz="1600"/>
           </a:p>
         </p:txBody>
       </p:sp>
@@ -12299,14 +13080,14 @@
           </a:bodyPr>
           <a:lstStyle/>
           <a:p>
-            <a:pPr algn="l" indent="0" marL="0">
+            <a:pPr marL="0" indent="0" algn="l">
               <a:lnSpc>
                 <a:spcPts val="2240"/>
               </a:lnSpc>
               <a:buNone/>
             </a:pPr>
             <a:r>
-              <a:rPr lang="en-US" sz="1600" b="1" dirty="0">
+              <a:rPr lang="en-US" sz="1600" b="1">
                 <a:solidFill>
                   <a:srgbClr val="F6F4EE"/>
                 </a:solidFill>
@@ -12316,7 +13097,7 @@
               </a:rPr>
               <a:t>Deployment</a:t>
             </a:r>
-            <a:endParaRPr lang="en-US" sz="1600" dirty="0"/>
+            <a:endParaRPr lang="en-US" sz="1600"/>
           </a:p>
         </p:txBody>
       </p:sp>
@@ -12343,14 +13124,14 @@
           </a:bodyPr>
           <a:lstStyle/>
           <a:p>
-            <a:pPr algn="l" indent="0" marL="0">
+            <a:pPr marL="0" indent="0" algn="l">
               <a:lnSpc>
                 <a:spcPts val="2240"/>
               </a:lnSpc>
               <a:buNone/>
             </a:pPr>
             <a:r>
-              <a:rPr lang="en-US" sz="1600" dirty="0">
+              <a:rPr lang="en-US" sz="1600">
                 <a:solidFill>
                   <a:srgbClr val="C9D3E3"/>
                 </a:solidFill>
@@ -12360,7 +13141,7 @@
               </a:rPr>
               <a:t>Hardhat Ignition module, ticket price as a parameter</a:t>
             </a:r>
-            <a:endParaRPr lang="en-US" sz="1600" dirty="0"/>
+            <a:endParaRPr lang="en-US" sz="1600"/>
           </a:p>
         </p:txBody>
       </p:sp>
@@ -12410,14 +13191,14 @@
           </a:bodyPr>
           <a:lstStyle/>
           <a:p>
-            <a:pPr algn="l" indent="0" marL="0">
+            <a:pPr marL="0" indent="0" algn="l">
               <a:lnSpc>
                 <a:spcPts val="2240"/>
               </a:lnSpc>
               <a:buNone/>
             </a:pPr>
             <a:r>
-              <a:rPr lang="en-US" sz="1600" b="1" dirty="0">
+              <a:rPr lang="en-US" sz="1600" b="1">
                 <a:solidFill>
                   <a:srgbClr val="F6F4EE"/>
                 </a:solidFill>
@@ -12427,7 +13208,7 @@
               </a:rPr>
               <a:t>Demo script</a:t>
             </a:r>
-            <a:endParaRPr lang="en-US" sz="1600" dirty="0"/>
+            <a:endParaRPr lang="en-US" sz="1600"/>
           </a:p>
         </p:txBody>
       </p:sp>
@@ -12454,14 +13235,14 @@
           </a:bodyPr>
           <a:lstStyle/>
           <a:p>
-            <a:pPr algn="l" indent="0" marL="0">
+            <a:pPr marL="0" indent="0" algn="l">
               <a:lnSpc>
                 <a:spcPts val="2240"/>
               </a:lnSpc>
               <a:buNone/>
             </a:pPr>
             <a:r>
-              <a:rPr lang="en-US" sz="1600" dirty="0">
+              <a:rPr lang="en-US" sz="1600">
                 <a:solidFill>
                   <a:srgbClr val="C9D3E3"/>
                 </a:solidFill>
@@ -12471,7 +13252,7 @@
               </a:rPr>
               <a:t>Buy, validate, conductor check, expiry and withdraw in one run</a:t>
             </a:r>
-            <a:endParaRPr lang="en-US" sz="1600" dirty="0"/>
+            <a:endParaRPr lang="en-US" sz="1600"/>
           </a:p>
         </p:txBody>
       </p:sp>
@@ -12544,14 +13325,14 @@
           </a:bodyPr>
           <a:lstStyle/>
           <a:p>
-            <a:pPr algn="l" indent="0" marL="0">
+            <a:pPr marL="0" indent="0" algn="l">
               <a:lnSpc>
                 <a:spcPts val="2240"/>
               </a:lnSpc>
               <a:buNone/>
             </a:pPr>
             <a:r>
-              <a:rPr lang="en-US" sz="1600" b="1" dirty="0">
+              <a:rPr lang="en-US" sz="1600" b="1">
                 <a:solidFill>
                   <a:srgbClr val="F6F4EE"/>
                 </a:solidFill>
@@ -12561,7 +13342,7 @@
               </a:rPr>
               <a:t>Web app</a:t>
             </a:r>
-            <a:endParaRPr lang="en-US" sz="1600" dirty="0"/>
+            <a:endParaRPr lang="en-US" sz="1600"/>
           </a:p>
         </p:txBody>
       </p:sp>
@@ -12588,14 +13369,14 @@
           </a:bodyPr>
           <a:lstStyle/>
           <a:p>
-            <a:pPr algn="l" indent="0" marL="0">
+            <a:pPr marL="0" indent="0" algn="l">
               <a:lnSpc>
                 <a:spcPts val="2240"/>
               </a:lnSpc>
               <a:buNone/>
             </a:pPr>
             <a:r>
-              <a:rPr lang="en-US" sz="1600" dirty="0">
+              <a:rPr lang="en-US" sz="1600">
                 <a:solidFill>
                   <a:srgbClr val="C9D3E3"/>
                 </a:solidFill>
@@ -12605,7 +13386,7 @@
               </a:rPr>
               <a:t>Rider and conductor views; “Skip 91 min” fast-forwards the chain clock</a:t>
             </a:r>
-            <a:endParaRPr lang="en-US" sz="1600" dirty="0"/>
+            <a:endParaRPr lang="en-US" sz="1600"/>
           </a:p>
         </p:txBody>
       </p:sp>
@@ -12910,4 +13691,299 @@
     </a:ext>
   </a:extLst>
 </a:theme>
+</file>
+
+<file path=ppt/theme/theme2.xml><?xml version="1.0" encoding="utf-8"?>
+<a:theme xmlns:a="http://schemas.openxmlformats.org/drawingml/2006/main" name="Office Theme">
+  <a:themeElements>
+    <a:clrScheme name="Office">
+      <a:dk1>
+        <a:sysClr val="windowText" lastClr="000000"/>
+      </a:dk1>
+      <a:lt1>
+        <a:sysClr val="window" lastClr="FFFFFF"/>
+      </a:lt1>
+      <a:dk2>
+        <a:srgbClr val="44546A"/>
+      </a:dk2>
+      <a:lt2>
+        <a:srgbClr val="E7E6E6"/>
+      </a:lt2>
+      <a:accent1>
+        <a:srgbClr val="4472C4"/>
+      </a:accent1>
+      <a:accent2>
+        <a:srgbClr val="ED7D31"/>
+      </a:accent2>
+      <a:accent3>
+        <a:srgbClr val="A5A5A5"/>
+      </a:accent3>
+      <a:accent4>
+        <a:srgbClr val="FFC000"/>
+      </a:accent4>
+      <a:accent5>
+        <a:srgbClr val="5B9BD5"/>
+      </a:accent5>
+      <a:accent6>
+        <a:srgbClr val="70AD47"/>
+      </a:accent6>
+      <a:hlink>
+        <a:srgbClr val="0563C1"/>
+      </a:hlink>
+      <a:folHlink>
+        <a:srgbClr val="954F72"/>
+      </a:folHlink>
+    </a:clrScheme>
+    <a:fontScheme name="Office">
+      <a:majorFont>
+        <a:latin typeface="Calibri Light" panose="020F0302020204030204"/>
+        <a:ea typeface=""/>
+        <a:cs typeface=""/>
+        <a:font script="Jpan" typeface="游ゴシック Light"/>
+        <a:font script="Hang" typeface="맑은 고딕"/>
+        <a:font script="Hans" typeface="等线 Light"/>
+        <a:font script="Hant" typeface="新細明體"/>
+        <a:font script="Arab" typeface="Times New Roman"/>
+        <a:font script="Hebr" typeface="Times New Roman"/>
+        <a:font script="Thai" typeface="Angsana New"/>
+        <a:font script="Ethi" typeface="Nyala"/>
+        <a:font script="Beng" typeface="Vrinda"/>
+        <a:font script="Gujr" typeface="Shruti"/>
+        <a:font script="Khmr" typeface="MoolBoran"/>
+        <a:font script="Knda" typeface="Tunga"/>
+        <a:font script="Guru" typeface="Raavi"/>
+        <a:font script="Cans" typeface="Euphemia"/>
+        <a:font script="Cher" typeface="Plantagenet Cherokee"/>
+        <a:font script="Yiii" typeface="Microsoft Yi Baiti"/>
+        <a:font script="Tibt" typeface="Microsoft Himalaya"/>
+        <a:font script="Thaa" typeface="MV Boli"/>
+        <a:font script="Deva" typeface="Mangal"/>
+        <a:font script="Telu" typeface="Gautami"/>
+        <a:font script="Taml" typeface="Latha"/>
+        <a:font script="Syrc" typeface="Estrangelo Edessa"/>
+        <a:font script="Orya" typeface="Kalinga"/>
+        <a:font script="Mlym" typeface="Kartika"/>
+        <a:font script="Laoo" typeface="DokChampa"/>
+        <a:font script="Sinh" typeface="Iskoola Pota"/>
+        <a:font script="Mong" typeface="Mongolian Baiti"/>
+        <a:font script="Viet" typeface="Times New Roman"/>
+        <a:font script="Uigh" typeface="Microsoft Uighur"/>
+        <a:font script="Geor" typeface="Sylfaen"/>
+        <a:font script="Armn" typeface="Arial"/>
+        <a:font script="Bugi" typeface="Leelawadee UI"/>
+        <a:font script="Bopo" typeface="Microsoft JhengHei"/>
+        <a:font script="Java" typeface="Javanese Text"/>
+        <a:font script="Lisu" typeface="Segoe UI"/>
+        <a:font script="Mymr" typeface="Myanmar Text"/>
+        <a:font script="Nkoo" typeface="Ebrima"/>
+        <a:font script="Olck" typeface="Nirmala UI"/>
+        <a:font script="Osma" typeface="Ebrima"/>
+        <a:font script="Phag" typeface="Phagspa"/>
+        <a:font script="Syrn" typeface="Estrangelo Edessa"/>
+        <a:font script="Syrj" typeface="Estrangelo Edessa"/>
+        <a:font script="Syre" typeface="Estrangelo Edessa"/>
+        <a:font script="Sora" typeface="Nirmala UI"/>
+        <a:font script="Tale" typeface="Microsoft Tai Le"/>
+        <a:font script="Talu" typeface="Microsoft New Tai Lue"/>
+        <a:font script="Tfng" typeface="Ebrima"/>
+      </a:majorFont>
+      <a:minorFont>
+        <a:latin typeface="Calibri" panose="020F0502020204030204"/>
+        <a:ea typeface=""/>
+        <a:cs typeface=""/>
+        <a:font script="Jpan" typeface="游ゴシック"/>
+        <a:font script="Hang" typeface="맑은 고딕"/>
+        <a:font script="Hans" typeface="等线"/>
+        <a:font script="Hant" typeface="新細明體"/>
+        <a:font script="Arab" typeface="Arial"/>
+        <a:font script="Hebr" typeface="Arial"/>
+        <a:font script="Thai" typeface="Cordia New"/>
+        <a:font script="Ethi" typeface="Nyala"/>
+        <a:font script="Beng" typeface="Vrinda"/>
+        <a:font script="Gujr" typeface="Shruti"/>
+        <a:font script="Khmr" typeface="DaunPenh"/>
+        <a:font script="Knda" typeface="Tunga"/>
+        <a:font script="Guru" typeface="Raavi"/>
+        <a:font script="Cans" typeface="Euphemia"/>
+        <a:font script="Cher" typeface="Plantagenet Cherokee"/>
+        <a:font script="Yiii" typeface="Microsoft Yi Baiti"/>
+        <a:font script="Tibt" typeface="Microsoft Himalaya"/>
+        <a:font script="Thaa" typeface="MV Boli"/>
+        <a:font script="Deva" typeface="Mangal"/>
+        <a:font script="Telu" typeface="Gautami"/>
+        <a:font script="Taml" typeface="Latha"/>
+        <a:font script="Syrc" typeface="Estrangelo Edessa"/>
+        <a:font script="Orya" typeface="Kalinga"/>
+        <a:font script="Mlym" typeface="Kartika"/>
+        <a:font script="Laoo" typeface="DokChampa"/>
+        <a:font script="Sinh" typeface="Iskoola Pota"/>
+        <a:font script="Mong" typeface="Mongolian Baiti"/>
+        <a:font script="Viet" typeface="Arial"/>
+        <a:font script="Uigh" typeface="Microsoft Uighur"/>
+        <a:font script="Geor" typeface="Sylfaen"/>
+        <a:font script="Armn" typeface="Arial"/>
+        <a:font script="Bugi" typeface="Leelawadee UI"/>
+        <a:font script="Bopo" typeface="Microsoft JhengHei"/>
+        <a:font script="Java" typeface="Javanese Text"/>
+        <a:font script="Lisu" typeface="Segoe UI"/>
+        <a:font script="Mymr" typeface="Myanmar Text"/>
+        <a:font script="Nkoo" typeface="Ebrima"/>
+        <a:font script="Olck" typeface="Nirmala UI"/>
+        <a:font script="Osma" typeface="Ebrima"/>
+        <a:font script="Phag" typeface="Phagspa"/>
+        <a:font script="Syrn" typeface="Estrangelo Edessa"/>
+        <a:font script="Syrj" typeface="Estrangelo Edessa"/>
+        <a:font script="Syre" typeface="Estrangelo Edessa"/>
+        <a:font script="Sora" typeface="Nirmala UI"/>
+        <a:font script="Tale" typeface="Microsoft Tai Le"/>
+        <a:font script="Talu" typeface="Microsoft New Tai Lue"/>
+        <a:font script="Tfng" typeface="Ebrima"/>
+      </a:minorFont>
+    </a:fontScheme>
+    <a:fmtScheme name="Office">
+      <a:fillStyleLst>
+        <a:solidFill>
+          <a:schemeClr val="phClr"/>
+        </a:solidFill>
+        <a:gradFill rotWithShape="1">
+          <a:gsLst>
+            <a:gs pos="0">
+              <a:schemeClr val="phClr">
+                <a:lumMod val="110000"/>
+                <a:satMod val="105000"/>
+                <a:tint val="67000"/>
+              </a:schemeClr>
+            </a:gs>
+            <a:gs pos="50000">
+              <a:schemeClr val="phClr">
+                <a:lumMod val="105000"/>
+                <a:satMod val="103000"/>
+                <a:tint val="73000"/>
+              </a:schemeClr>
+            </a:gs>
+            <a:gs pos="100000">
+              <a:schemeClr val="phClr">
+                <a:lumMod val="105000"/>
+                <a:satMod val="109000"/>
+                <a:tint val="81000"/>
+              </a:schemeClr>
+            </a:gs>
+          </a:gsLst>
+          <a:lin ang="5400000" scaled="0"/>
+        </a:gradFill>
+        <a:gradFill rotWithShape="1">
+          <a:gsLst>
+            <a:gs pos="0">
+              <a:schemeClr val="phClr">
+                <a:satMod val="103000"/>
+                <a:lumMod val="102000"/>
+                <a:tint val="94000"/>
+              </a:schemeClr>
+            </a:gs>
+            <a:gs pos="50000">
+              <a:schemeClr val="phClr">
+                <a:satMod val="110000"/>
+                <a:lumMod val="100000"/>
+                <a:shade val="100000"/>
+              </a:schemeClr>
+            </a:gs>
+            <a:gs pos="100000">
+              <a:schemeClr val="phClr">
+                <a:lumMod val="99000"/>
+                <a:satMod val="120000"/>
+                <a:shade val="78000"/>
+              </a:schemeClr>
+            </a:gs>
+          </a:gsLst>
+          <a:lin ang="5400000" scaled="0"/>
+        </a:gradFill>
+      </a:fillStyleLst>
+      <a:lnStyleLst>
+        <a:ln w="6350" cap="flat" cmpd="sng" algn="ctr">
+          <a:solidFill>
+            <a:schemeClr val="phClr"/>
+          </a:solidFill>
+          <a:prstDash val="solid"/>
+          <a:miter lim="800000"/>
+        </a:ln>
+        <a:ln w="12700" cap="flat" cmpd="sng" algn="ctr">
+          <a:solidFill>
+            <a:schemeClr val="phClr"/>
+          </a:solidFill>
+          <a:prstDash val="solid"/>
+          <a:miter lim="800000"/>
+        </a:ln>
+        <a:ln w="19050" cap="flat" cmpd="sng" algn="ctr">
+          <a:solidFill>
+            <a:schemeClr val="phClr"/>
+          </a:solidFill>
+          <a:prstDash val="solid"/>
+          <a:miter lim="800000"/>
+        </a:ln>
+      </a:lnStyleLst>
+      <a:effectStyleLst>
+        <a:effectStyle>
+          <a:effectLst/>
+        </a:effectStyle>
+        <a:effectStyle>
+          <a:effectLst/>
+        </a:effectStyle>
+        <a:effectStyle>
+          <a:effectLst>
+            <a:outerShdw blurRad="57150" dist="19050" dir="5400000" algn="ctr" rotWithShape="0">
+              <a:srgbClr val="000000">
+                <a:alpha val="63000"/>
+              </a:srgbClr>
+            </a:outerShdw>
+          </a:effectLst>
+        </a:effectStyle>
+      </a:effectStyleLst>
+      <a:bgFillStyleLst>
+        <a:solidFill>
+          <a:schemeClr val="phClr"/>
+        </a:solidFill>
+        <a:solidFill>
+          <a:schemeClr val="phClr">
+            <a:tint val="95000"/>
+            <a:satMod val="170000"/>
+          </a:schemeClr>
+        </a:solidFill>
+        <a:gradFill rotWithShape="1">
+          <a:gsLst>
+            <a:gs pos="0">
+              <a:schemeClr val="phClr">
+                <a:tint val="93000"/>
+                <a:satMod val="150000"/>
+                <a:shade val="98000"/>
+                <a:lumMod val="102000"/>
+              </a:schemeClr>
+            </a:gs>
+            <a:gs pos="50000">
+              <a:schemeClr val="phClr">
+                <a:tint val="98000"/>
+                <a:satMod val="130000"/>
+                <a:shade val="90000"/>
+                <a:lumMod val="103000"/>
+              </a:schemeClr>
+            </a:gs>
+            <a:gs pos="100000">
+              <a:schemeClr val="phClr">
+                <a:shade val="63000"/>
+                <a:satMod val="120000"/>
+              </a:schemeClr>
+            </a:gs>
+          </a:gsLst>
+          <a:lin ang="5400000" scaled="0"/>
+        </a:gradFill>
+      </a:bgFillStyleLst>
+    </a:fmtScheme>
+  </a:themeElements>
+  <a:objectDefaults/>
+  <a:extraClrSchemeLst/>
+  <a:extLst>
+    <a:ext uri="{05A4C25C-085E-4340-85A3-A5531E510DB2}">
+      <thm15:themeFamily xmlns:thm15="http://schemas.microsoft.com/office/thememl/2012/main" name="Office Theme" id="{62F939B6-93AF-4DB8-9C6B-D6C7DFDC589F}" vid="{4A3C46E8-61CC-4603-A589-7422A47A8E4A}"/>
+    </a:ext>
+  </a:extLst>
+</a:theme>
 </file>